--- a/システム構成図.pptx
+++ b/システム構成図.pptx
@@ -5,12 +5,13 @@
     <p:sldMasterId id="2147483648" r:id="rId4"/>
   </p:sldMasterIdLst>
   <p:notesMasterIdLst>
-    <p:notesMasterId r:id="rId8"/>
+    <p:notesMasterId r:id="rId9"/>
   </p:notesMasterIdLst>
   <p:sldIdLst>
     <p:sldId id="324" r:id="rId5"/>
     <p:sldId id="325" r:id="rId6"/>
     <p:sldId id="326" r:id="rId7"/>
+    <p:sldId id="327" r:id="rId8"/>
   </p:sldIdLst>
   <p:sldSz cx="16200438" cy="6858000"/>
   <p:notesSz cx="6807200" cy="9939338"/>
@@ -298,7 +299,7 @@
       </p15:notesGuideLst>
     </p:ext>
     <p:ext uri="GoogleSlidesCustomDataVersion2">
-      <go:slidesCustomData xmlns:mc="http://schemas.openxmlformats.org/markup-compatibility/2006" xmlns:mv="urn:schemas-microsoft-com:mac:vml" xmlns:c="http://schemas.openxmlformats.org/drawingml/2006/chart" xmlns:dgm="http://schemas.openxmlformats.org/drawingml/2006/diagram" xmlns:o="urn:schemas-microsoft-com:office:office" xmlns:v="urn:schemas-microsoft-com:vml" xmlns:pvml="urn:schemas-microsoft-com:office:powerpoint" xmlns:com="http://schemas.openxmlformats.org/drawingml/2006/compatibility" xmlns:p14="http://schemas.microsoft.com/office/powerpoint/2010/main" xmlns:p15="http://schemas.microsoft.com/office/powerpoint/2012/main" xmlns:ahyp="http://schemas.microsoft.com/office/drawing/2018/hyperlinkcolor" xmlns:go="http://customooxmlschemas.google.com/" xmlns="" r:id="rId42" roundtripDataSignature="AMtx7mjjLadHqMIiphYAwzpEX8auZJ6O0g=="/>
+      <go:slidesCustomData xmlns="" xmlns:go="http://customooxmlschemas.google.com/" xmlns:ahyp="http://schemas.microsoft.com/office/drawing/2018/hyperlinkcolor" xmlns:p15="http://schemas.microsoft.com/office/powerpoint/2012/main" xmlns:p14="http://schemas.microsoft.com/office/powerpoint/2010/main" xmlns:com="http://schemas.openxmlformats.org/drawingml/2006/compatibility" xmlns:pvml="urn:schemas-microsoft-com:office:powerpoint" xmlns:v="urn:schemas-microsoft-com:vml" xmlns:o="urn:schemas-microsoft-com:office:office" xmlns:dgm="http://schemas.openxmlformats.org/drawingml/2006/diagram" xmlns:c="http://schemas.openxmlformats.org/drawingml/2006/chart" xmlns:mv="urn:schemas-microsoft-com:mac:vml" xmlns:mc="http://schemas.openxmlformats.org/markup-compatibility/2006" r:id="rId42" roundtripDataSignature="AMtx7mjjLadHqMIiphYAwzpEX8auZJ6O0g=="/>
     </p:ext>
   </p:extLst>
 </p:presentation>
@@ -2438,7 +2439,7 @@
             <a:fld id="{1D8BD707-D9CF-40AE-B4C6-C98DA3205C09}" type="datetimeFigureOut">
               <a:rPr lang="en-US" smtClean="0"/>
               <a:pPr/>
-              <a:t>1/15/26</a:t>
+              <a:t>1/19/2026</a:t>
             </a:fld>
             <a:endParaRPr lang="en-US"/>
           </a:p>
@@ -7180,6 +7181,3699 @@
 </p:sld>
 </file>
 
+<file path=ppt/slides/slide4.xml><?xml version="1.0" encoding="utf-8"?>
+<p:sld xmlns:a="http://schemas.openxmlformats.org/drawingml/2006/main" xmlns:r="http://schemas.openxmlformats.org/officeDocument/2006/relationships" xmlns:p="http://schemas.openxmlformats.org/presentationml/2006/main">
+  <p:cSld>
+    <p:spTree>
+      <p:nvGrpSpPr>
+        <p:cNvPr id="1" name=""/>
+        <p:cNvGrpSpPr/>
+        <p:nvPr/>
+      </p:nvGrpSpPr>
+      <p:grpSpPr>
+        <a:xfrm>
+          <a:off x="0" y="0"/>
+          <a:ext cx="0" cy="0"/>
+          <a:chOff x="0" y="0"/>
+          <a:chExt cx="0" cy="0"/>
+        </a:xfrm>
+      </p:grpSpPr>
+      <p:sp>
+        <p:nvSpPr>
+          <p:cNvPr id="4" name="平行四辺形 3">
+            <a:extLst>
+              <a:ext uri="{FF2B5EF4-FFF2-40B4-BE49-F238E27FC236}">
+                <a16:creationId xmlns:a16="http://schemas.microsoft.com/office/drawing/2014/main" id="{AFA22584-F335-6865-1C68-8B3B777890F1}"/>
+              </a:ext>
+            </a:extLst>
+          </p:cNvPr>
+          <p:cNvSpPr/>
+          <p:nvPr/>
+        </p:nvSpPr>
+        <p:spPr>
+          <a:xfrm>
+            <a:off x="1946935" y="5072013"/>
+            <a:ext cx="5623794" cy="1093719"/>
+          </a:xfrm>
+          <a:prstGeom prst="parallelogram">
+            <a:avLst>
+              <a:gd name="adj" fmla="val 87105"/>
+            </a:avLst>
+          </a:prstGeom>
+          <a:solidFill>
+            <a:schemeClr val="bg1">
+              <a:lumMod val="75000"/>
+            </a:schemeClr>
+          </a:solidFill>
+          <a:ln>
+            <a:solidFill>
+              <a:schemeClr val="tx1">
+                <a:lumMod val="95000"/>
+                <a:lumOff val="5000"/>
+              </a:schemeClr>
+            </a:solidFill>
+          </a:ln>
+        </p:spPr>
+        <p:style>
+          <a:lnRef idx="2">
+            <a:schemeClr val="accent1">
+              <a:shade val="15000"/>
+            </a:schemeClr>
+          </a:lnRef>
+          <a:fillRef idx="1">
+            <a:schemeClr val="accent1"/>
+          </a:fillRef>
+          <a:effectRef idx="0">
+            <a:schemeClr val="accent1"/>
+          </a:effectRef>
+          <a:fontRef idx="minor">
+            <a:schemeClr val="lt1"/>
+          </a:fontRef>
+        </p:style>
+        <p:txBody>
+          <a:bodyPr rtlCol="0" anchor="ctr"/>
+          <a:lstStyle/>
+          <a:p>
+            <a:pPr algn="ctr"/>
+            <a:endParaRPr kumimoji="1" lang="ja-JP" altLang="en-US"/>
+          </a:p>
+        </p:txBody>
+      </p:sp>
+      <p:grpSp>
+        <p:nvGrpSpPr>
+          <p:cNvPr id="20" name="グループ化 19">
+            <a:extLst>
+              <a:ext uri="{FF2B5EF4-FFF2-40B4-BE49-F238E27FC236}">
+                <a16:creationId xmlns:a16="http://schemas.microsoft.com/office/drawing/2014/main" id="{3CE35DC9-CC82-9DC8-A2A2-9B1D5A80DA3B}"/>
+              </a:ext>
+            </a:extLst>
+          </p:cNvPr>
+          <p:cNvGrpSpPr/>
+          <p:nvPr/>
+        </p:nvGrpSpPr>
+        <p:grpSpPr>
+          <a:xfrm>
+            <a:off x="4042606" y="3110870"/>
+            <a:ext cx="1561764" cy="1044319"/>
+            <a:chOff x="5256110" y="2542415"/>
+            <a:chExt cx="1561764" cy="1215325"/>
+          </a:xfrm>
+        </p:grpSpPr>
+        <p:sp>
+          <p:nvSpPr>
+            <p:cNvPr id="12" name="フローチャート: 磁気ディスク 11">
+              <a:extLst>
+                <a:ext uri="{FF2B5EF4-FFF2-40B4-BE49-F238E27FC236}">
+                  <a16:creationId xmlns:a16="http://schemas.microsoft.com/office/drawing/2014/main" id="{4CBC5356-14CE-4897-AB42-6252615ABB8D}"/>
+                </a:ext>
+              </a:extLst>
+            </p:cNvPr>
+            <p:cNvSpPr/>
+            <p:nvPr/>
+          </p:nvSpPr>
+          <p:spPr>
+            <a:xfrm>
+              <a:off x="5256110" y="3381460"/>
+              <a:ext cx="1561763" cy="376280"/>
+            </a:xfrm>
+            <a:prstGeom prst="flowChartMagneticDisk">
+              <a:avLst/>
+            </a:prstGeom>
+          </p:spPr>
+          <p:style>
+            <a:lnRef idx="2">
+              <a:schemeClr val="accent1">
+                <a:shade val="15000"/>
+              </a:schemeClr>
+            </a:lnRef>
+            <a:fillRef idx="1">
+              <a:schemeClr val="accent1"/>
+            </a:fillRef>
+            <a:effectRef idx="0">
+              <a:schemeClr val="accent1"/>
+            </a:effectRef>
+            <a:fontRef idx="minor">
+              <a:schemeClr val="lt1"/>
+            </a:fontRef>
+          </p:style>
+          <p:txBody>
+            <a:bodyPr rtlCol="0" anchor="ctr"/>
+            <a:lstStyle/>
+            <a:p>
+              <a:pPr algn="ctr"/>
+              <a:endParaRPr kumimoji="1" lang="ja-JP" altLang="en-US"/>
+            </a:p>
+          </p:txBody>
+        </p:sp>
+        <p:sp>
+          <p:nvSpPr>
+            <p:cNvPr id="13" name="フローチャート: 磁気ディスク 12">
+              <a:extLst>
+                <a:ext uri="{FF2B5EF4-FFF2-40B4-BE49-F238E27FC236}">
+                  <a16:creationId xmlns:a16="http://schemas.microsoft.com/office/drawing/2014/main" id="{3FD7C55B-4A1C-8971-2864-803CB448B395}"/>
+                </a:ext>
+              </a:extLst>
+            </p:cNvPr>
+            <p:cNvSpPr/>
+            <p:nvPr/>
+          </p:nvSpPr>
+          <p:spPr>
+            <a:xfrm>
+              <a:off x="5734216" y="2561888"/>
+              <a:ext cx="605553" cy="946768"/>
+            </a:xfrm>
+            <a:prstGeom prst="flowChartMagneticDisk">
+              <a:avLst/>
+            </a:prstGeom>
+          </p:spPr>
+          <p:style>
+            <a:lnRef idx="2">
+              <a:schemeClr val="accent1">
+                <a:shade val="15000"/>
+              </a:schemeClr>
+            </a:lnRef>
+            <a:fillRef idx="1">
+              <a:schemeClr val="accent1"/>
+            </a:fillRef>
+            <a:effectRef idx="0">
+              <a:schemeClr val="accent1"/>
+            </a:effectRef>
+            <a:fontRef idx="minor">
+              <a:schemeClr val="lt1"/>
+            </a:fontRef>
+          </p:style>
+          <p:txBody>
+            <a:bodyPr rtlCol="0" anchor="ctr"/>
+            <a:lstStyle/>
+            <a:p>
+              <a:pPr algn="ctr"/>
+              <a:endParaRPr kumimoji="1" lang="ja-JP" altLang="en-US"/>
+            </a:p>
+          </p:txBody>
+        </p:sp>
+        <p:sp>
+          <p:nvSpPr>
+            <p:cNvPr id="14" name="フローチャート: 磁気ディスク 13">
+              <a:extLst>
+                <a:ext uri="{FF2B5EF4-FFF2-40B4-BE49-F238E27FC236}">
+                  <a16:creationId xmlns:a16="http://schemas.microsoft.com/office/drawing/2014/main" id="{C62AFB54-281A-F740-A048-288C75C7976B}"/>
+                </a:ext>
+              </a:extLst>
+            </p:cNvPr>
+            <p:cNvSpPr/>
+            <p:nvPr/>
+          </p:nvSpPr>
+          <p:spPr>
+            <a:xfrm>
+              <a:off x="5345123" y="2926785"/>
+              <a:ext cx="1383738" cy="570489"/>
+            </a:xfrm>
+            <a:prstGeom prst="flowChartMagneticDisk">
+              <a:avLst/>
+            </a:prstGeom>
+            <a:solidFill>
+              <a:schemeClr val="accent6">
+                <a:lumMod val="75000"/>
+              </a:schemeClr>
+            </a:solidFill>
+          </p:spPr>
+          <p:style>
+            <a:lnRef idx="2">
+              <a:schemeClr val="accent1">
+                <a:shade val="15000"/>
+              </a:schemeClr>
+            </a:lnRef>
+            <a:fillRef idx="1">
+              <a:schemeClr val="accent1"/>
+            </a:fillRef>
+            <a:effectRef idx="0">
+              <a:schemeClr val="accent1"/>
+            </a:effectRef>
+            <a:fontRef idx="minor">
+              <a:schemeClr val="lt1"/>
+            </a:fontRef>
+          </p:style>
+          <p:txBody>
+            <a:bodyPr rtlCol="0" anchor="ctr"/>
+            <a:lstStyle/>
+            <a:p>
+              <a:pPr algn="ctr"/>
+              <a:endParaRPr kumimoji="1" lang="ja-JP" altLang="en-US"/>
+            </a:p>
+          </p:txBody>
+        </p:sp>
+        <p:sp>
+          <p:nvSpPr>
+            <p:cNvPr id="15" name="フローチャート: 磁気ディスク 14">
+              <a:extLst>
+                <a:ext uri="{FF2B5EF4-FFF2-40B4-BE49-F238E27FC236}">
+                  <a16:creationId xmlns:a16="http://schemas.microsoft.com/office/drawing/2014/main" id="{2DB7B166-3735-5AA4-BC7A-2B396B6EF561}"/>
+                </a:ext>
+              </a:extLst>
+            </p:cNvPr>
+            <p:cNvSpPr/>
+            <p:nvPr/>
+          </p:nvSpPr>
+          <p:spPr>
+            <a:xfrm>
+              <a:off x="5345124" y="2766716"/>
+              <a:ext cx="1383738" cy="570489"/>
+            </a:xfrm>
+            <a:prstGeom prst="flowChartMagneticDisk">
+              <a:avLst/>
+            </a:prstGeom>
+            <a:solidFill>
+              <a:schemeClr val="accent6">
+                <a:lumMod val="75000"/>
+              </a:schemeClr>
+            </a:solidFill>
+          </p:spPr>
+          <p:style>
+            <a:lnRef idx="2">
+              <a:schemeClr val="accent1">
+                <a:shade val="15000"/>
+              </a:schemeClr>
+            </a:lnRef>
+            <a:fillRef idx="1">
+              <a:schemeClr val="accent1"/>
+            </a:fillRef>
+            <a:effectRef idx="0">
+              <a:schemeClr val="accent1"/>
+            </a:effectRef>
+            <a:fontRef idx="minor">
+              <a:schemeClr val="lt1"/>
+            </a:fontRef>
+          </p:style>
+          <p:txBody>
+            <a:bodyPr rtlCol="0" anchor="ctr"/>
+            <a:lstStyle/>
+            <a:p>
+              <a:pPr algn="ctr"/>
+              <a:endParaRPr kumimoji="1" lang="ja-JP" altLang="en-US"/>
+            </a:p>
+          </p:txBody>
+        </p:sp>
+        <p:sp>
+          <p:nvSpPr>
+            <p:cNvPr id="16" name="フローチャート: 磁気ディスク 15">
+              <a:extLst>
+                <a:ext uri="{FF2B5EF4-FFF2-40B4-BE49-F238E27FC236}">
+                  <a16:creationId xmlns:a16="http://schemas.microsoft.com/office/drawing/2014/main" id="{FA545514-6729-2B0F-D8EC-CD5263203072}"/>
+                </a:ext>
+              </a:extLst>
+            </p:cNvPr>
+            <p:cNvSpPr/>
+            <p:nvPr/>
+          </p:nvSpPr>
+          <p:spPr>
+            <a:xfrm>
+              <a:off x="5345123" y="2667590"/>
+              <a:ext cx="1383738" cy="570489"/>
+            </a:xfrm>
+            <a:prstGeom prst="flowChartMagneticDisk">
+              <a:avLst/>
+            </a:prstGeom>
+            <a:solidFill>
+              <a:schemeClr val="accent6">
+                <a:lumMod val="75000"/>
+              </a:schemeClr>
+            </a:solidFill>
+          </p:spPr>
+          <p:style>
+            <a:lnRef idx="2">
+              <a:schemeClr val="accent1">
+                <a:shade val="15000"/>
+              </a:schemeClr>
+            </a:lnRef>
+            <a:fillRef idx="1">
+              <a:schemeClr val="accent1"/>
+            </a:fillRef>
+            <a:effectRef idx="0">
+              <a:schemeClr val="accent1"/>
+            </a:effectRef>
+            <a:fontRef idx="minor">
+              <a:schemeClr val="lt1"/>
+            </a:fontRef>
+          </p:style>
+          <p:txBody>
+            <a:bodyPr rtlCol="0" anchor="ctr"/>
+            <a:lstStyle/>
+            <a:p>
+              <a:pPr algn="ctr"/>
+              <a:endParaRPr kumimoji="1" lang="ja-JP" altLang="en-US"/>
+            </a:p>
+          </p:txBody>
+        </p:sp>
+        <p:sp>
+          <p:nvSpPr>
+            <p:cNvPr id="17" name="フローチャート: 磁気ディスク 16">
+              <a:extLst>
+                <a:ext uri="{FF2B5EF4-FFF2-40B4-BE49-F238E27FC236}">
+                  <a16:creationId xmlns:a16="http://schemas.microsoft.com/office/drawing/2014/main" id="{F8337369-C831-0A6E-DF57-A94D09A058F0}"/>
+                </a:ext>
+              </a:extLst>
+            </p:cNvPr>
+            <p:cNvSpPr/>
+            <p:nvPr/>
+          </p:nvSpPr>
+          <p:spPr>
+            <a:xfrm>
+              <a:off x="5345123" y="2542415"/>
+              <a:ext cx="1383738" cy="570489"/>
+            </a:xfrm>
+            <a:prstGeom prst="flowChartMagneticDisk">
+              <a:avLst/>
+            </a:prstGeom>
+            <a:solidFill>
+              <a:schemeClr val="accent6">
+                <a:lumMod val="75000"/>
+              </a:schemeClr>
+            </a:solidFill>
+          </p:spPr>
+          <p:style>
+            <a:lnRef idx="2">
+              <a:schemeClr val="accent1">
+                <a:shade val="15000"/>
+              </a:schemeClr>
+            </a:lnRef>
+            <a:fillRef idx="1">
+              <a:schemeClr val="accent1"/>
+            </a:fillRef>
+            <a:effectRef idx="0">
+              <a:schemeClr val="accent1"/>
+            </a:effectRef>
+            <a:fontRef idx="minor">
+              <a:schemeClr val="lt1"/>
+            </a:fontRef>
+          </p:style>
+          <p:txBody>
+            <a:bodyPr rtlCol="0" anchor="ctr"/>
+            <a:lstStyle/>
+            <a:p>
+              <a:pPr algn="ctr"/>
+              <a:endParaRPr kumimoji="1" lang="ja-JP" altLang="en-US"/>
+            </a:p>
+          </p:txBody>
+        </p:sp>
+        <p:sp>
+          <p:nvSpPr>
+            <p:cNvPr id="18" name="フローチャート: 磁気ディスク 17">
+              <a:extLst>
+                <a:ext uri="{FF2B5EF4-FFF2-40B4-BE49-F238E27FC236}">
+                  <a16:creationId xmlns:a16="http://schemas.microsoft.com/office/drawing/2014/main" id="{15E86F4F-2884-FBE5-4301-7342EBB3AFE4}"/>
+                </a:ext>
+              </a:extLst>
+            </p:cNvPr>
+            <p:cNvSpPr/>
+            <p:nvPr/>
+          </p:nvSpPr>
+          <p:spPr>
+            <a:xfrm>
+              <a:off x="5256111" y="2561887"/>
+              <a:ext cx="1561763" cy="376280"/>
+            </a:xfrm>
+            <a:prstGeom prst="flowChartMagneticDisk">
+              <a:avLst/>
+            </a:prstGeom>
+          </p:spPr>
+          <p:style>
+            <a:lnRef idx="2">
+              <a:schemeClr val="accent1">
+                <a:shade val="15000"/>
+              </a:schemeClr>
+            </a:lnRef>
+            <a:fillRef idx="1">
+              <a:schemeClr val="accent1"/>
+            </a:fillRef>
+            <a:effectRef idx="0">
+              <a:schemeClr val="accent1"/>
+            </a:effectRef>
+            <a:fontRef idx="minor">
+              <a:schemeClr val="lt1"/>
+            </a:fontRef>
+          </p:style>
+          <p:txBody>
+            <a:bodyPr rtlCol="0" anchor="ctr"/>
+            <a:lstStyle/>
+            <a:p>
+              <a:pPr algn="ctr"/>
+              <a:endParaRPr kumimoji="1" lang="ja-JP" altLang="en-US" dirty="0"/>
+            </a:p>
+          </p:txBody>
+        </p:sp>
+      </p:grpSp>
+      <p:grpSp>
+        <p:nvGrpSpPr>
+          <p:cNvPr id="19" name="グループ化 18">
+            <a:extLst>
+              <a:ext uri="{FF2B5EF4-FFF2-40B4-BE49-F238E27FC236}">
+                <a16:creationId xmlns:a16="http://schemas.microsoft.com/office/drawing/2014/main" id="{109D52CA-1420-20D8-C4FE-D5DA0E0FD19B}"/>
+              </a:ext>
+            </a:extLst>
+          </p:cNvPr>
+          <p:cNvGrpSpPr/>
+          <p:nvPr/>
+        </p:nvGrpSpPr>
+        <p:grpSpPr>
+          <a:xfrm>
+            <a:off x="4042606" y="2059915"/>
+            <a:ext cx="1561764" cy="1215325"/>
+            <a:chOff x="3310311" y="1314957"/>
+            <a:chExt cx="1561764" cy="1215325"/>
+          </a:xfrm>
+        </p:grpSpPr>
+        <p:sp>
+          <p:nvSpPr>
+            <p:cNvPr id="7" name="フローチャート: 磁気ディスク 6">
+              <a:extLst>
+                <a:ext uri="{FF2B5EF4-FFF2-40B4-BE49-F238E27FC236}">
+                  <a16:creationId xmlns:a16="http://schemas.microsoft.com/office/drawing/2014/main" id="{42A688E3-E76B-8274-781F-0459EDD8F693}"/>
+                </a:ext>
+              </a:extLst>
+            </p:cNvPr>
+            <p:cNvSpPr/>
+            <p:nvPr/>
+          </p:nvSpPr>
+          <p:spPr>
+            <a:xfrm>
+              <a:off x="3310311" y="2154002"/>
+              <a:ext cx="1561763" cy="376280"/>
+            </a:xfrm>
+            <a:prstGeom prst="flowChartMagneticDisk">
+              <a:avLst/>
+            </a:prstGeom>
+            <a:solidFill>
+              <a:srgbClr val="FFFF00"/>
+            </a:solidFill>
+          </p:spPr>
+          <p:style>
+            <a:lnRef idx="2">
+              <a:schemeClr val="accent1">
+                <a:shade val="15000"/>
+              </a:schemeClr>
+            </a:lnRef>
+            <a:fillRef idx="1">
+              <a:schemeClr val="accent1"/>
+            </a:fillRef>
+            <a:effectRef idx="0">
+              <a:schemeClr val="accent1"/>
+            </a:effectRef>
+            <a:fontRef idx="minor">
+              <a:schemeClr val="lt1"/>
+            </a:fontRef>
+          </p:style>
+          <p:txBody>
+            <a:bodyPr rtlCol="0" anchor="ctr"/>
+            <a:lstStyle/>
+            <a:p>
+              <a:pPr algn="ctr"/>
+              <a:endParaRPr kumimoji="1" lang="ja-JP" altLang="en-US"/>
+            </a:p>
+          </p:txBody>
+        </p:sp>
+        <p:sp>
+          <p:nvSpPr>
+            <p:cNvPr id="6" name="フローチャート: 磁気ディスク 5">
+              <a:extLst>
+                <a:ext uri="{FF2B5EF4-FFF2-40B4-BE49-F238E27FC236}">
+                  <a16:creationId xmlns:a16="http://schemas.microsoft.com/office/drawing/2014/main" id="{431E4EA0-D506-8740-D084-E5A210E8F9A1}"/>
+                </a:ext>
+              </a:extLst>
+            </p:cNvPr>
+            <p:cNvSpPr/>
+            <p:nvPr/>
+          </p:nvSpPr>
+          <p:spPr>
+            <a:xfrm>
+              <a:off x="3788417" y="1334430"/>
+              <a:ext cx="605553" cy="946768"/>
+            </a:xfrm>
+            <a:prstGeom prst="flowChartMagneticDisk">
+              <a:avLst/>
+            </a:prstGeom>
+          </p:spPr>
+          <p:style>
+            <a:lnRef idx="2">
+              <a:schemeClr val="accent1">
+                <a:shade val="15000"/>
+              </a:schemeClr>
+            </a:lnRef>
+            <a:fillRef idx="1">
+              <a:schemeClr val="accent1"/>
+            </a:fillRef>
+            <a:effectRef idx="0">
+              <a:schemeClr val="accent1"/>
+            </a:effectRef>
+            <a:fontRef idx="minor">
+              <a:schemeClr val="lt1"/>
+            </a:fontRef>
+          </p:style>
+          <p:txBody>
+            <a:bodyPr rtlCol="0" anchor="ctr"/>
+            <a:lstStyle/>
+            <a:p>
+              <a:pPr algn="ctr"/>
+              <a:endParaRPr kumimoji="1" lang="ja-JP" altLang="en-US"/>
+            </a:p>
+          </p:txBody>
+        </p:sp>
+        <p:sp>
+          <p:nvSpPr>
+            <p:cNvPr id="8" name="フローチャート: 磁気ディスク 7">
+              <a:extLst>
+                <a:ext uri="{FF2B5EF4-FFF2-40B4-BE49-F238E27FC236}">
+                  <a16:creationId xmlns:a16="http://schemas.microsoft.com/office/drawing/2014/main" id="{CEE386FE-D701-8265-F372-A4E1EE62AA83}"/>
+                </a:ext>
+              </a:extLst>
+            </p:cNvPr>
+            <p:cNvSpPr/>
+            <p:nvPr/>
+          </p:nvSpPr>
+          <p:spPr>
+            <a:xfrm>
+              <a:off x="3399324" y="1699327"/>
+              <a:ext cx="1383738" cy="570489"/>
+            </a:xfrm>
+            <a:prstGeom prst="flowChartMagneticDisk">
+              <a:avLst/>
+            </a:prstGeom>
+            <a:solidFill>
+              <a:schemeClr val="accent6">
+                <a:lumMod val="75000"/>
+              </a:schemeClr>
+            </a:solidFill>
+          </p:spPr>
+          <p:style>
+            <a:lnRef idx="2">
+              <a:schemeClr val="accent1">
+                <a:shade val="15000"/>
+              </a:schemeClr>
+            </a:lnRef>
+            <a:fillRef idx="1">
+              <a:schemeClr val="accent1"/>
+            </a:fillRef>
+            <a:effectRef idx="0">
+              <a:schemeClr val="accent1"/>
+            </a:effectRef>
+            <a:fontRef idx="minor">
+              <a:schemeClr val="lt1"/>
+            </a:fontRef>
+          </p:style>
+          <p:txBody>
+            <a:bodyPr rtlCol="0" anchor="ctr"/>
+            <a:lstStyle/>
+            <a:p>
+              <a:pPr algn="ctr"/>
+              <a:endParaRPr kumimoji="1" lang="ja-JP" altLang="en-US"/>
+            </a:p>
+          </p:txBody>
+        </p:sp>
+        <p:sp>
+          <p:nvSpPr>
+            <p:cNvPr id="9" name="フローチャート: 磁気ディスク 8">
+              <a:extLst>
+                <a:ext uri="{FF2B5EF4-FFF2-40B4-BE49-F238E27FC236}">
+                  <a16:creationId xmlns:a16="http://schemas.microsoft.com/office/drawing/2014/main" id="{0D3AC030-0070-3E62-4726-95C2441678D8}"/>
+                </a:ext>
+              </a:extLst>
+            </p:cNvPr>
+            <p:cNvSpPr/>
+            <p:nvPr/>
+          </p:nvSpPr>
+          <p:spPr>
+            <a:xfrm>
+              <a:off x="3399325" y="1539258"/>
+              <a:ext cx="1383738" cy="570489"/>
+            </a:xfrm>
+            <a:prstGeom prst="flowChartMagneticDisk">
+              <a:avLst/>
+            </a:prstGeom>
+            <a:solidFill>
+              <a:schemeClr val="accent6">
+                <a:lumMod val="75000"/>
+              </a:schemeClr>
+            </a:solidFill>
+          </p:spPr>
+          <p:style>
+            <a:lnRef idx="2">
+              <a:schemeClr val="accent1">
+                <a:shade val="15000"/>
+              </a:schemeClr>
+            </a:lnRef>
+            <a:fillRef idx="1">
+              <a:schemeClr val="accent1"/>
+            </a:fillRef>
+            <a:effectRef idx="0">
+              <a:schemeClr val="accent1"/>
+            </a:effectRef>
+            <a:fontRef idx="minor">
+              <a:schemeClr val="lt1"/>
+            </a:fontRef>
+          </p:style>
+          <p:txBody>
+            <a:bodyPr rtlCol="0" anchor="ctr"/>
+            <a:lstStyle/>
+            <a:p>
+              <a:pPr algn="ctr"/>
+              <a:endParaRPr kumimoji="1" lang="ja-JP" altLang="en-US"/>
+            </a:p>
+          </p:txBody>
+        </p:sp>
+        <p:sp>
+          <p:nvSpPr>
+            <p:cNvPr id="10" name="フローチャート: 磁気ディスク 9">
+              <a:extLst>
+                <a:ext uri="{FF2B5EF4-FFF2-40B4-BE49-F238E27FC236}">
+                  <a16:creationId xmlns:a16="http://schemas.microsoft.com/office/drawing/2014/main" id="{A12264EE-9CC7-62C8-EA54-0C71FD741B2F}"/>
+                </a:ext>
+              </a:extLst>
+            </p:cNvPr>
+            <p:cNvSpPr/>
+            <p:nvPr/>
+          </p:nvSpPr>
+          <p:spPr>
+            <a:xfrm>
+              <a:off x="3399324" y="1440132"/>
+              <a:ext cx="1383738" cy="570489"/>
+            </a:xfrm>
+            <a:prstGeom prst="flowChartMagneticDisk">
+              <a:avLst/>
+            </a:prstGeom>
+            <a:solidFill>
+              <a:schemeClr val="accent6">
+                <a:lumMod val="75000"/>
+              </a:schemeClr>
+            </a:solidFill>
+          </p:spPr>
+          <p:style>
+            <a:lnRef idx="2">
+              <a:schemeClr val="accent1">
+                <a:shade val="15000"/>
+              </a:schemeClr>
+            </a:lnRef>
+            <a:fillRef idx="1">
+              <a:schemeClr val="accent1"/>
+            </a:fillRef>
+            <a:effectRef idx="0">
+              <a:schemeClr val="accent1"/>
+            </a:effectRef>
+            <a:fontRef idx="minor">
+              <a:schemeClr val="lt1"/>
+            </a:fontRef>
+          </p:style>
+          <p:txBody>
+            <a:bodyPr rtlCol="0" anchor="ctr"/>
+            <a:lstStyle/>
+            <a:p>
+              <a:pPr algn="ctr"/>
+              <a:endParaRPr kumimoji="1" lang="ja-JP" altLang="en-US"/>
+            </a:p>
+          </p:txBody>
+        </p:sp>
+        <p:sp>
+          <p:nvSpPr>
+            <p:cNvPr id="11" name="フローチャート: 磁気ディスク 10">
+              <a:extLst>
+                <a:ext uri="{FF2B5EF4-FFF2-40B4-BE49-F238E27FC236}">
+                  <a16:creationId xmlns:a16="http://schemas.microsoft.com/office/drawing/2014/main" id="{8B65E70E-FFA2-D08A-15A2-711BB971211C}"/>
+                </a:ext>
+              </a:extLst>
+            </p:cNvPr>
+            <p:cNvSpPr/>
+            <p:nvPr/>
+          </p:nvSpPr>
+          <p:spPr>
+            <a:xfrm>
+              <a:off x="3399324" y="1314957"/>
+              <a:ext cx="1383738" cy="570489"/>
+            </a:xfrm>
+            <a:prstGeom prst="flowChartMagneticDisk">
+              <a:avLst/>
+            </a:prstGeom>
+            <a:solidFill>
+              <a:schemeClr val="accent6">
+                <a:lumMod val="75000"/>
+              </a:schemeClr>
+            </a:solidFill>
+          </p:spPr>
+          <p:style>
+            <a:lnRef idx="2">
+              <a:schemeClr val="accent1">
+                <a:shade val="15000"/>
+              </a:schemeClr>
+            </a:lnRef>
+            <a:fillRef idx="1">
+              <a:schemeClr val="accent1"/>
+            </a:fillRef>
+            <a:effectRef idx="0">
+              <a:schemeClr val="accent1"/>
+            </a:effectRef>
+            <a:fontRef idx="minor">
+              <a:schemeClr val="lt1"/>
+            </a:fontRef>
+          </p:style>
+          <p:txBody>
+            <a:bodyPr rtlCol="0" anchor="ctr"/>
+            <a:lstStyle/>
+            <a:p>
+              <a:pPr algn="ctr"/>
+              <a:endParaRPr kumimoji="1" lang="ja-JP" altLang="en-US"/>
+            </a:p>
+          </p:txBody>
+        </p:sp>
+        <p:sp>
+          <p:nvSpPr>
+            <p:cNvPr id="5" name="フローチャート: 磁気ディスク 4">
+              <a:extLst>
+                <a:ext uri="{FF2B5EF4-FFF2-40B4-BE49-F238E27FC236}">
+                  <a16:creationId xmlns:a16="http://schemas.microsoft.com/office/drawing/2014/main" id="{BE05E933-C5CA-EC6C-09D8-D369DB55FCB9}"/>
+                </a:ext>
+              </a:extLst>
+            </p:cNvPr>
+            <p:cNvSpPr/>
+            <p:nvPr/>
+          </p:nvSpPr>
+          <p:spPr>
+            <a:xfrm>
+              <a:off x="3310312" y="1334429"/>
+              <a:ext cx="1561763" cy="376280"/>
+            </a:xfrm>
+            <a:prstGeom prst="flowChartMagneticDisk">
+              <a:avLst/>
+            </a:prstGeom>
+            <a:solidFill>
+              <a:srgbClr val="FFFF00"/>
+            </a:solidFill>
+          </p:spPr>
+          <p:style>
+            <a:lnRef idx="2">
+              <a:schemeClr val="accent1">
+                <a:shade val="15000"/>
+              </a:schemeClr>
+            </a:lnRef>
+            <a:fillRef idx="1">
+              <a:schemeClr val="accent1"/>
+            </a:fillRef>
+            <a:effectRef idx="0">
+              <a:schemeClr val="accent1"/>
+            </a:effectRef>
+            <a:fontRef idx="minor">
+              <a:schemeClr val="lt1"/>
+            </a:fontRef>
+          </p:style>
+          <p:txBody>
+            <a:bodyPr rtlCol="0" anchor="ctr"/>
+            <a:lstStyle/>
+            <a:p>
+              <a:pPr algn="ctr"/>
+              <a:endParaRPr kumimoji="1" lang="ja-JP" altLang="en-US"/>
+            </a:p>
+          </p:txBody>
+        </p:sp>
+      </p:grpSp>
+      <p:sp>
+        <p:nvSpPr>
+          <p:cNvPr id="21" name="楕円 20">
+            <a:extLst>
+              <a:ext uri="{FF2B5EF4-FFF2-40B4-BE49-F238E27FC236}">
+                <a16:creationId xmlns:a16="http://schemas.microsoft.com/office/drawing/2014/main" id="{DBCE039F-270B-5B5A-0790-A14A82A00BFE}"/>
+              </a:ext>
+            </a:extLst>
+          </p:cNvPr>
+          <p:cNvSpPr/>
+          <p:nvPr/>
+        </p:nvSpPr>
+        <p:spPr>
+          <a:xfrm>
+            <a:off x="4498624" y="1269374"/>
+            <a:ext cx="659666" cy="623205"/>
+          </a:xfrm>
+          <a:prstGeom prst="ellipse">
+            <a:avLst/>
+          </a:prstGeom>
+          <a:noFill/>
+          <a:ln>
+            <a:solidFill>
+              <a:srgbClr val="FF0000"/>
+            </a:solidFill>
+          </a:ln>
+        </p:spPr>
+        <p:style>
+          <a:lnRef idx="2">
+            <a:schemeClr val="accent1">
+              <a:shade val="15000"/>
+            </a:schemeClr>
+          </a:lnRef>
+          <a:fillRef idx="1">
+            <a:schemeClr val="accent1"/>
+          </a:fillRef>
+          <a:effectRef idx="0">
+            <a:schemeClr val="accent1"/>
+          </a:effectRef>
+          <a:fontRef idx="minor">
+            <a:schemeClr val="lt1"/>
+          </a:fontRef>
+        </p:style>
+        <p:txBody>
+          <a:bodyPr rtlCol="0" anchor="ctr"/>
+          <a:lstStyle/>
+          <a:p>
+            <a:pPr algn="ctr"/>
+            <a:r>
+              <a:rPr kumimoji="1" lang="ja-JP" altLang="en-US" sz="3600" dirty="0">
+                <a:solidFill>
+                  <a:srgbClr val="FF0000"/>
+                </a:solidFill>
+              </a:rPr>
+              <a:t>～</a:t>
+            </a:r>
+          </a:p>
+        </p:txBody>
+      </p:sp>
+      <p:cxnSp>
+        <p:nvCxnSpPr>
+          <p:cNvPr id="35" name="コネクタ: カギ線 34">
+            <a:extLst>
+              <a:ext uri="{FF2B5EF4-FFF2-40B4-BE49-F238E27FC236}">
+                <a16:creationId xmlns:a16="http://schemas.microsoft.com/office/drawing/2014/main" id="{6EECC065-C38C-3F7C-CFAC-28906FF3F3BF}"/>
+              </a:ext>
+            </a:extLst>
+          </p:cNvPr>
+          <p:cNvCxnSpPr>
+            <a:stCxn id="5" idx="2"/>
+            <a:endCxn id="21" idx="2"/>
+          </p:cNvCxnSpPr>
+          <p:nvPr/>
+        </p:nvCxnSpPr>
+        <p:spPr>
+          <a:xfrm rot="10800000" flipH="1">
+            <a:off x="4042606" y="1580977"/>
+            <a:ext cx="456017" cy="686550"/>
+          </a:xfrm>
+          <a:prstGeom prst="bentConnector3">
+            <a:avLst>
+              <a:gd name="adj1" fmla="val -50130"/>
+            </a:avLst>
+          </a:prstGeom>
+          <a:ln w="25400">
+            <a:solidFill>
+              <a:srgbClr val="FF0000"/>
+            </a:solidFill>
+          </a:ln>
+        </p:spPr>
+        <p:style>
+          <a:lnRef idx="1">
+            <a:schemeClr val="accent1"/>
+          </a:lnRef>
+          <a:fillRef idx="0">
+            <a:schemeClr val="accent1"/>
+          </a:fillRef>
+          <a:effectRef idx="0">
+            <a:schemeClr val="accent1"/>
+          </a:effectRef>
+          <a:fontRef idx="minor">
+            <a:schemeClr val="tx1"/>
+          </a:fontRef>
+        </p:style>
+      </p:cxnSp>
+      <p:cxnSp>
+        <p:nvCxnSpPr>
+          <p:cNvPr id="37" name="コネクタ: カギ線 36">
+            <a:extLst>
+              <a:ext uri="{FF2B5EF4-FFF2-40B4-BE49-F238E27FC236}">
+                <a16:creationId xmlns:a16="http://schemas.microsoft.com/office/drawing/2014/main" id="{DADF76A7-E95D-163B-A5CC-61E870D320BE}"/>
+              </a:ext>
+            </a:extLst>
+          </p:cNvPr>
+          <p:cNvCxnSpPr>
+            <a:stCxn id="5" idx="4"/>
+            <a:endCxn id="21" idx="6"/>
+          </p:cNvCxnSpPr>
+          <p:nvPr/>
+        </p:nvCxnSpPr>
+        <p:spPr>
+          <a:xfrm flipH="1" flipV="1">
+            <a:off x="5158290" y="1580977"/>
+            <a:ext cx="446080" cy="686550"/>
+          </a:xfrm>
+          <a:prstGeom prst="bentConnector3">
+            <a:avLst>
+              <a:gd name="adj1" fmla="val -51246"/>
+            </a:avLst>
+          </a:prstGeom>
+          <a:ln w="25400">
+            <a:solidFill>
+              <a:srgbClr val="FF0000"/>
+            </a:solidFill>
+          </a:ln>
+        </p:spPr>
+        <p:style>
+          <a:lnRef idx="1">
+            <a:schemeClr val="accent1"/>
+          </a:lnRef>
+          <a:fillRef idx="0">
+            <a:schemeClr val="accent1"/>
+          </a:fillRef>
+          <a:effectRef idx="0">
+            <a:schemeClr val="accent1"/>
+          </a:effectRef>
+          <a:fontRef idx="minor">
+            <a:schemeClr val="tx1"/>
+          </a:fontRef>
+        </p:style>
+      </p:cxnSp>
+      <p:sp>
+        <p:nvSpPr>
+          <p:cNvPr id="40" name="楕円 39">
+            <a:extLst>
+              <a:ext uri="{FF2B5EF4-FFF2-40B4-BE49-F238E27FC236}">
+                <a16:creationId xmlns:a16="http://schemas.microsoft.com/office/drawing/2014/main" id="{8DA4597D-554E-8303-23CC-3B397070D30F}"/>
+              </a:ext>
+            </a:extLst>
+          </p:cNvPr>
+          <p:cNvSpPr/>
+          <p:nvPr/>
+        </p:nvSpPr>
+        <p:spPr>
+          <a:xfrm>
+            <a:off x="4042606" y="5310909"/>
+            <a:ext cx="1561763" cy="580677"/>
+          </a:xfrm>
+          <a:prstGeom prst="ellipse">
+            <a:avLst/>
+          </a:prstGeom>
+          <a:noFill/>
+          <a:ln>
+            <a:solidFill>
+              <a:srgbClr val="FFFF00"/>
+            </a:solidFill>
+          </a:ln>
+        </p:spPr>
+        <p:style>
+          <a:lnRef idx="2">
+            <a:schemeClr val="accent1">
+              <a:shade val="15000"/>
+            </a:schemeClr>
+          </a:lnRef>
+          <a:fillRef idx="1">
+            <a:schemeClr val="accent1"/>
+          </a:fillRef>
+          <a:effectRef idx="0">
+            <a:schemeClr val="accent1"/>
+          </a:effectRef>
+          <a:fontRef idx="minor">
+            <a:schemeClr val="lt1"/>
+          </a:fontRef>
+        </p:style>
+        <p:txBody>
+          <a:bodyPr rtlCol="0" anchor="ctr"/>
+          <a:lstStyle/>
+          <a:p>
+            <a:pPr algn="ctr"/>
+            <a:endParaRPr kumimoji="1" lang="ja-JP" altLang="en-US"/>
+          </a:p>
+        </p:txBody>
+      </p:sp>
+      <p:sp>
+        <p:nvSpPr>
+          <p:cNvPr id="41" name="楕円 40">
+            <a:extLst>
+              <a:ext uri="{FF2B5EF4-FFF2-40B4-BE49-F238E27FC236}">
+                <a16:creationId xmlns:a16="http://schemas.microsoft.com/office/drawing/2014/main" id="{924D6C1F-A9B5-CE11-D9E9-05FEEDD1C29A}"/>
+              </a:ext>
+            </a:extLst>
+          </p:cNvPr>
+          <p:cNvSpPr/>
+          <p:nvPr/>
+        </p:nvSpPr>
+        <p:spPr>
+          <a:xfrm>
+            <a:off x="3863957" y="5182648"/>
+            <a:ext cx="1919060" cy="837197"/>
+          </a:xfrm>
+          <a:prstGeom prst="ellipse">
+            <a:avLst/>
+          </a:prstGeom>
+          <a:noFill/>
+          <a:ln>
+            <a:solidFill>
+              <a:srgbClr val="FFFF00"/>
+            </a:solidFill>
+          </a:ln>
+        </p:spPr>
+        <p:style>
+          <a:lnRef idx="2">
+            <a:schemeClr val="accent1">
+              <a:shade val="15000"/>
+            </a:schemeClr>
+          </a:lnRef>
+          <a:fillRef idx="1">
+            <a:schemeClr val="accent1"/>
+          </a:fillRef>
+          <a:effectRef idx="0">
+            <a:schemeClr val="accent1"/>
+          </a:effectRef>
+          <a:fontRef idx="minor">
+            <a:schemeClr val="lt1"/>
+          </a:fontRef>
+        </p:style>
+        <p:txBody>
+          <a:bodyPr rtlCol="0" anchor="ctr"/>
+          <a:lstStyle/>
+          <a:p>
+            <a:pPr algn="ctr"/>
+            <a:endParaRPr kumimoji="1" lang="ja-JP" altLang="en-US"/>
+          </a:p>
+        </p:txBody>
+      </p:sp>
+      <p:sp>
+        <p:nvSpPr>
+          <p:cNvPr id="42" name="楕円 41">
+            <a:extLst>
+              <a:ext uri="{FF2B5EF4-FFF2-40B4-BE49-F238E27FC236}">
+                <a16:creationId xmlns:a16="http://schemas.microsoft.com/office/drawing/2014/main" id="{B98887E5-3719-88E8-EDA3-0C41FE2957C2}"/>
+              </a:ext>
+            </a:extLst>
+          </p:cNvPr>
+          <p:cNvSpPr/>
+          <p:nvPr/>
+        </p:nvSpPr>
+        <p:spPr>
+          <a:xfrm>
+            <a:off x="4270614" y="5387187"/>
+            <a:ext cx="1141933" cy="402878"/>
+          </a:xfrm>
+          <a:prstGeom prst="ellipse">
+            <a:avLst/>
+          </a:prstGeom>
+          <a:noFill/>
+          <a:ln>
+            <a:solidFill>
+              <a:srgbClr val="FFFF00"/>
+            </a:solidFill>
+          </a:ln>
+        </p:spPr>
+        <p:style>
+          <a:lnRef idx="2">
+            <a:schemeClr val="accent1">
+              <a:shade val="15000"/>
+            </a:schemeClr>
+          </a:lnRef>
+          <a:fillRef idx="1">
+            <a:schemeClr val="accent1"/>
+          </a:fillRef>
+          <a:effectRef idx="0">
+            <a:schemeClr val="accent1"/>
+          </a:effectRef>
+          <a:fontRef idx="minor">
+            <a:schemeClr val="lt1"/>
+          </a:fontRef>
+        </p:style>
+        <p:txBody>
+          <a:bodyPr rtlCol="0" anchor="ctr"/>
+          <a:lstStyle/>
+          <a:p>
+            <a:pPr algn="ctr"/>
+            <a:endParaRPr kumimoji="1" lang="ja-JP" altLang="en-US"/>
+          </a:p>
+        </p:txBody>
+      </p:sp>
+      <p:sp>
+        <p:nvSpPr>
+          <p:cNvPr id="43" name="楕円 42">
+            <a:extLst>
+              <a:ext uri="{FF2B5EF4-FFF2-40B4-BE49-F238E27FC236}">
+                <a16:creationId xmlns:a16="http://schemas.microsoft.com/office/drawing/2014/main" id="{F4B59178-4D80-E6EB-53C2-D023331CE233}"/>
+              </a:ext>
+            </a:extLst>
+          </p:cNvPr>
+          <p:cNvSpPr/>
+          <p:nvPr/>
+        </p:nvSpPr>
+        <p:spPr>
+          <a:xfrm>
+            <a:off x="4423015" y="5470286"/>
+            <a:ext cx="850950" cy="236679"/>
+          </a:xfrm>
+          <a:prstGeom prst="ellipse">
+            <a:avLst/>
+          </a:prstGeom>
+          <a:noFill/>
+          <a:ln>
+            <a:solidFill>
+              <a:srgbClr val="FFFF00"/>
+            </a:solidFill>
+          </a:ln>
+        </p:spPr>
+        <p:style>
+          <a:lnRef idx="2">
+            <a:schemeClr val="accent1">
+              <a:shade val="15000"/>
+            </a:schemeClr>
+          </a:lnRef>
+          <a:fillRef idx="1">
+            <a:schemeClr val="accent1"/>
+          </a:fillRef>
+          <a:effectRef idx="0">
+            <a:schemeClr val="accent1"/>
+          </a:effectRef>
+          <a:fontRef idx="minor">
+            <a:schemeClr val="lt1"/>
+          </a:fontRef>
+        </p:style>
+        <p:txBody>
+          <a:bodyPr rtlCol="0" anchor="ctr"/>
+          <a:lstStyle/>
+          <a:p>
+            <a:pPr algn="ctr"/>
+            <a:endParaRPr kumimoji="1" lang="ja-JP" altLang="en-US"/>
+          </a:p>
+        </p:txBody>
+      </p:sp>
+      <p:sp>
+        <p:nvSpPr>
+          <p:cNvPr id="44" name="円弧 43">
+            <a:extLst>
+              <a:ext uri="{FF2B5EF4-FFF2-40B4-BE49-F238E27FC236}">
+                <a16:creationId xmlns:a16="http://schemas.microsoft.com/office/drawing/2014/main" id="{15F9E10A-2CA9-D552-FE2E-2AA77212B8BB}"/>
+              </a:ext>
+            </a:extLst>
+          </p:cNvPr>
+          <p:cNvSpPr/>
+          <p:nvPr/>
+        </p:nvSpPr>
+        <p:spPr>
+          <a:xfrm rot="5400000">
+            <a:off x="130126" y="584966"/>
+            <a:ext cx="6033605" cy="2639341"/>
+          </a:xfrm>
+          <a:prstGeom prst="arc">
+            <a:avLst>
+              <a:gd name="adj1" fmla="val 19219920"/>
+              <a:gd name="adj2" fmla="val 21591226"/>
+            </a:avLst>
+          </a:prstGeom>
+          <a:noFill/>
+          <a:ln w="19050">
+            <a:solidFill>
+              <a:schemeClr val="tx1"/>
+            </a:solidFill>
+            <a:prstDash val="sysDash"/>
+            <a:tailEnd type="arrow"/>
+          </a:ln>
+        </p:spPr>
+        <p:style>
+          <a:lnRef idx="1">
+            <a:schemeClr val="accent1"/>
+          </a:lnRef>
+          <a:fillRef idx="0">
+            <a:schemeClr val="accent1"/>
+          </a:fillRef>
+          <a:effectRef idx="0">
+            <a:schemeClr val="accent1"/>
+          </a:effectRef>
+          <a:fontRef idx="minor">
+            <a:schemeClr val="tx1"/>
+          </a:fontRef>
+        </p:style>
+        <p:txBody>
+          <a:bodyPr rtlCol="0" anchor="ctr"/>
+          <a:lstStyle/>
+          <a:p>
+            <a:pPr algn="ctr"/>
+            <a:endParaRPr kumimoji="1" lang="ja-JP" altLang="en-US"/>
+          </a:p>
+        </p:txBody>
+      </p:sp>
+      <p:sp>
+        <p:nvSpPr>
+          <p:cNvPr id="45" name="円弧 44">
+            <a:extLst>
+              <a:ext uri="{FF2B5EF4-FFF2-40B4-BE49-F238E27FC236}">
+                <a16:creationId xmlns:a16="http://schemas.microsoft.com/office/drawing/2014/main" id="{8BF587CC-94F2-D1CD-4777-3B38F88E05E1}"/>
+              </a:ext>
+            </a:extLst>
+          </p:cNvPr>
+          <p:cNvSpPr/>
+          <p:nvPr/>
+        </p:nvSpPr>
+        <p:spPr>
+          <a:xfrm rot="5400000">
+            <a:off x="18919" y="844153"/>
+            <a:ext cx="6594511" cy="2639341"/>
+          </a:xfrm>
+          <a:prstGeom prst="arc">
+            <a:avLst>
+              <a:gd name="adj1" fmla="val 18748995"/>
+              <a:gd name="adj2" fmla="val 21134635"/>
+            </a:avLst>
+          </a:prstGeom>
+          <a:noFill/>
+          <a:ln w="19050">
+            <a:solidFill>
+              <a:schemeClr val="tx1"/>
+            </a:solidFill>
+            <a:prstDash val="sysDash"/>
+            <a:tailEnd type="arrow"/>
+          </a:ln>
+        </p:spPr>
+        <p:style>
+          <a:lnRef idx="1">
+            <a:schemeClr val="accent1"/>
+          </a:lnRef>
+          <a:fillRef idx="0">
+            <a:schemeClr val="accent1"/>
+          </a:fillRef>
+          <a:effectRef idx="0">
+            <a:schemeClr val="accent1"/>
+          </a:effectRef>
+          <a:fontRef idx="minor">
+            <a:schemeClr val="tx1"/>
+          </a:fontRef>
+        </p:style>
+        <p:txBody>
+          <a:bodyPr rtlCol="0" anchor="ctr"/>
+          <a:lstStyle/>
+          <a:p>
+            <a:pPr algn="ctr"/>
+            <a:endParaRPr kumimoji="1" lang="ja-JP" altLang="en-US"/>
+          </a:p>
+        </p:txBody>
+      </p:sp>
+      <p:sp>
+        <p:nvSpPr>
+          <p:cNvPr id="46" name="円弧 45">
+            <a:extLst>
+              <a:ext uri="{FF2B5EF4-FFF2-40B4-BE49-F238E27FC236}">
+                <a16:creationId xmlns:a16="http://schemas.microsoft.com/office/drawing/2014/main" id="{63B6BB72-48BC-7303-B8DA-87DD7CF98262}"/>
+              </a:ext>
+            </a:extLst>
+          </p:cNvPr>
+          <p:cNvSpPr/>
+          <p:nvPr/>
+        </p:nvSpPr>
+        <p:spPr>
+          <a:xfrm rot="5400000">
+            <a:off x="-263386" y="1292319"/>
+            <a:ext cx="7448311" cy="2639341"/>
+          </a:xfrm>
+          <a:prstGeom prst="arc">
+            <a:avLst>
+              <a:gd name="adj1" fmla="val 17818384"/>
+              <a:gd name="adj2" fmla="val 20583395"/>
+            </a:avLst>
+          </a:prstGeom>
+          <a:noFill/>
+          <a:ln w="19050">
+            <a:solidFill>
+              <a:schemeClr val="tx1"/>
+            </a:solidFill>
+            <a:prstDash val="sysDash"/>
+            <a:tailEnd type="arrow"/>
+          </a:ln>
+        </p:spPr>
+        <p:style>
+          <a:lnRef idx="1">
+            <a:schemeClr val="accent1"/>
+          </a:lnRef>
+          <a:fillRef idx="0">
+            <a:schemeClr val="accent1"/>
+          </a:fillRef>
+          <a:effectRef idx="0">
+            <a:schemeClr val="accent1"/>
+          </a:effectRef>
+          <a:fontRef idx="minor">
+            <a:schemeClr val="tx1"/>
+          </a:fontRef>
+        </p:style>
+        <p:txBody>
+          <a:bodyPr rtlCol="0" anchor="ctr"/>
+          <a:lstStyle/>
+          <a:p>
+            <a:pPr algn="ctr"/>
+            <a:endParaRPr kumimoji="1" lang="ja-JP" altLang="en-US"/>
+          </a:p>
+        </p:txBody>
+      </p:sp>
+      <p:sp>
+        <p:nvSpPr>
+          <p:cNvPr id="47" name="円弧 46">
+            <a:extLst>
+              <a:ext uri="{FF2B5EF4-FFF2-40B4-BE49-F238E27FC236}">
+                <a16:creationId xmlns:a16="http://schemas.microsoft.com/office/drawing/2014/main" id="{DB2A1F4F-2E7E-B080-44CE-503B832145D5}"/>
+              </a:ext>
+            </a:extLst>
+          </p:cNvPr>
+          <p:cNvSpPr/>
+          <p:nvPr/>
+        </p:nvSpPr>
+        <p:spPr>
+          <a:xfrm rot="5400000" flipV="1">
+            <a:off x="2475685" y="1310734"/>
+            <a:ext cx="7448311" cy="2639339"/>
+          </a:xfrm>
+          <a:prstGeom prst="arc">
+            <a:avLst>
+              <a:gd name="adj1" fmla="val 17818384"/>
+              <a:gd name="adj2" fmla="val 20583395"/>
+            </a:avLst>
+          </a:prstGeom>
+          <a:noFill/>
+          <a:ln w="19050">
+            <a:solidFill>
+              <a:schemeClr val="tx1"/>
+            </a:solidFill>
+            <a:prstDash val="sysDash"/>
+            <a:tailEnd type="arrow"/>
+          </a:ln>
+        </p:spPr>
+        <p:style>
+          <a:lnRef idx="1">
+            <a:schemeClr val="accent1"/>
+          </a:lnRef>
+          <a:fillRef idx="0">
+            <a:schemeClr val="accent1"/>
+          </a:fillRef>
+          <a:effectRef idx="0">
+            <a:schemeClr val="accent1"/>
+          </a:effectRef>
+          <a:fontRef idx="minor">
+            <a:schemeClr val="tx1"/>
+          </a:fontRef>
+        </p:style>
+        <p:txBody>
+          <a:bodyPr rtlCol="0" anchor="ctr"/>
+          <a:lstStyle/>
+          <a:p>
+            <a:pPr algn="ctr"/>
+            <a:endParaRPr kumimoji="1" lang="ja-JP" altLang="en-US"/>
+          </a:p>
+        </p:txBody>
+      </p:sp>
+      <p:sp>
+        <p:nvSpPr>
+          <p:cNvPr id="48" name="円弧 47">
+            <a:extLst>
+              <a:ext uri="{FF2B5EF4-FFF2-40B4-BE49-F238E27FC236}">
+                <a16:creationId xmlns:a16="http://schemas.microsoft.com/office/drawing/2014/main" id="{6E6DD23F-B426-9D7E-C8D2-0FE1769C2218}"/>
+              </a:ext>
+            </a:extLst>
+          </p:cNvPr>
+          <p:cNvSpPr/>
+          <p:nvPr/>
+        </p:nvSpPr>
+        <p:spPr>
+          <a:xfrm rot="5400000" flipV="1">
+            <a:off x="3012076" y="756288"/>
+            <a:ext cx="6594511" cy="2750385"/>
+          </a:xfrm>
+          <a:prstGeom prst="arc">
+            <a:avLst>
+              <a:gd name="adj1" fmla="val 18748995"/>
+              <a:gd name="adj2" fmla="val 21134635"/>
+            </a:avLst>
+          </a:prstGeom>
+          <a:noFill/>
+          <a:ln w="19050">
+            <a:solidFill>
+              <a:schemeClr val="tx1"/>
+            </a:solidFill>
+            <a:prstDash val="sysDash"/>
+            <a:tailEnd type="arrow"/>
+          </a:ln>
+        </p:spPr>
+        <p:style>
+          <a:lnRef idx="1">
+            <a:schemeClr val="accent1"/>
+          </a:lnRef>
+          <a:fillRef idx="0">
+            <a:schemeClr val="accent1"/>
+          </a:fillRef>
+          <a:effectRef idx="0">
+            <a:schemeClr val="accent1"/>
+          </a:effectRef>
+          <a:fontRef idx="minor">
+            <a:schemeClr val="tx1"/>
+          </a:fontRef>
+        </p:style>
+        <p:txBody>
+          <a:bodyPr rtlCol="0" anchor="ctr"/>
+          <a:lstStyle/>
+          <a:p>
+            <a:pPr algn="ctr"/>
+            <a:endParaRPr kumimoji="1" lang="ja-JP" altLang="en-US"/>
+          </a:p>
+        </p:txBody>
+      </p:sp>
+      <p:sp>
+        <p:nvSpPr>
+          <p:cNvPr id="49" name="円弧 48">
+            <a:extLst>
+              <a:ext uri="{FF2B5EF4-FFF2-40B4-BE49-F238E27FC236}">
+                <a16:creationId xmlns:a16="http://schemas.microsoft.com/office/drawing/2014/main" id="{0AA30988-525C-82CB-C7D4-C7CD932444D5}"/>
+              </a:ext>
+            </a:extLst>
+          </p:cNvPr>
+          <p:cNvSpPr/>
+          <p:nvPr/>
+        </p:nvSpPr>
+        <p:spPr>
+          <a:xfrm rot="5400000" flipV="1">
+            <a:off x="3383327" y="491190"/>
+            <a:ext cx="6033605" cy="2750387"/>
+          </a:xfrm>
+          <a:prstGeom prst="arc">
+            <a:avLst>
+              <a:gd name="adj1" fmla="val 19219920"/>
+              <a:gd name="adj2" fmla="val 21591226"/>
+            </a:avLst>
+          </a:prstGeom>
+          <a:noFill/>
+          <a:ln w="19050">
+            <a:solidFill>
+              <a:schemeClr val="tx1"/>
+            </a:solidFill>
+            <a:prstDash val="sysDash"/>
+            <a:tailEnd type="arrow"/>
+          </a:ln>
+        </p:spPr>
+        <p:style>
+          <a:lnRef idx="1">
+            <a:schemeClr val="accent1"/>
+          </a:lnRef>
+          <a:fillRef idx="0">
+            <a:schemeClr val="accent1"/>
+          </a:fillRef>
+          <a:effectRef idx="0">
+            <a:schemeClr val="accent1"/>
+          </a:effectRef>
+          <a:fontRef idx="minor">
+            <a:schemeClr val="tx1"/>
+          </a:fontRef>
+        </p:style>
+        <p:txBody>
+          <a:bodyPr rtlCol="0" anchor="ctr"/>
+          <a:lstStyle/>
+          <a:p>
+            <a:pPr algn="ctr"/>
+            <a:endParaRPr kumimoji="1" lang="ja-JP" altLang="en-US"/>
+          </a:p>
+        </p:txBody>
+      </p:sp>
+      <p:sp>
+        <p:nvSpPr>
+          <p:cNvPr id="50" name="テキスト ボックス 49">
+            <a:extLst>
+              <a:ext uri="{FF2B5EF4-FFF2-40B4-BE49-F238E27FC236}">
+                <a16:creationId xmlns:a16="http://schemas.microsoft.com/office/drawing/2014/main" id="{1968B69E-35F4-8B4E-0262-2397C8A256AB}"/>
+              </a:ext>
+            </a:extLst>
+          </p:cNvPr>
+          <p:cNvSpPr txBox="1"/>
+          <p:nvPr/>
+        </p:nvSpPr>
+        <p:spPr>
+          <a:xfrm>
+            <a:off x="2722920" y="2476514"/>
+            <a:ext cx="1261884" cy="307777"/>
+          </a:xfrm>
+          <a:prstGeom prst="rect">
+            <a:avLst/>
+          </a:prstGeom>
+          <a:noFill/>
+        </p:spPr>
+        <p:txBody>
+          <a:bodyPr wrap="none" rtlCol="0">
+            <a:spAutoFit/>
+          </a:bodyPr>
+          <a:lstStyle/>
+          <a:p>
+            <a:r>
+              <a:rPr kumimoji="1" lang="ja-JP" altLang="en-US" dirty="0"/>
+              <a:t>励磁コイル→</a:t>
+            </a:r>
+          </a:p>
+        </p:txBody>
+      </p:sp>
+      <p:sp>
+        <p:nvSpPr>
+          <p:cNvPr id="51" name="テキスト ボックス 50">
+            <a:extLst>
+              <a:ext uri="{FF2B5EF4-FFF2-40B4-BE49-F238E27FC236}">
+                <a16:creationId xmlns:a16="http://schemas.microsoft.com/office/drawing/2014/main" id="{7A582DB2-A639-020E-690E-0E801CB72B5D}"/>
+              </a:ext>
+            </a:extLst>
+          </p:cNvPr>
+          <p:cNvSpPr txBox="1"/>
+          <p:nvPr/>
+        </p:nvSpPr>
+        <p:spPr>
+          <a:xfrm>
+            <a:off x="2730858" y="3400872"/>
+            <a:ext cx="1261884" cy="307777"/>
+          </a:xfrm>
+          <a:prstGeom prst="rect">
+            <a:avLst/>
+          </a:prstGeom>
+          <a:noFill/>
+        </p:spPr>
+        <p:txBody>
+          <a:bodyPr wrap="none" rtlCol="0">
+            <a:spAutoFit/>
+          </a:bodyPr>
+          <a:lstStyle/>
+          <a:p>
+            <a:r>
+              <a:rPr kumimoji="1" lang="ja-JP" altLang="en-US" dirty="0"/>
+              <a:t>検出コイル→</a:t>
+            </a:r>
+          </a:p>
+        </p:txBody>
+      </p:sp>
+      <p:sp>
+        <p:nvSpPr>
+          <p:cNvPr id="52" name="テキスト ボックス 51">
+            <a:extLst>
+              <a:ext uri="{FF2B5EF4-FFF2-40B4-BE49-F238E27FC236}">
+                <a16:creationId xmlns:a16="http://schemas.microsoft.com/office/drawing/2014/main" id="{FA5B029F-7E98-9B69-8EEC-5F49E187A10C}"/>
+              </a:ext>
+            </a:extLst>
+          </p:cNvPr>
+          <p:cNvSpPr txBox="1"/>
+          <p:nvPr/>
+        </p:nvSpPr>
+        <p:spPr>
+          <a:xfrm>
+            <a:off x="1646719" y="5482288"/>
+            <a:ext cx="723275" cy="307777"/>
+          </a:xfrm>
+          <a:prstGeom prst="rect">
+            <a:avLst/>
+          </a:prstGeom>
+          <a:noFill/>
+        </p:spPr>
+        <p:txBody>
+          <a:bodyPr wrap="none" rtlCol="0">
+            <a:spAutoFit/>
+          </a:bodyPr>
+          <a:lstStyle/>
+          <a:p>
+            <a:r>
+              <a:rPr kumimoji="1" lang="ja-JP" altLang="en-US" dirty="0"/>
+              <a:t>金属→</a:t>
+            </a:r>
+          </a:p>
+        </p:txBody>
+      </p:sp>
+      <p:sp>
+        <p:nvSpPr>
+          <p:cNvPr id="53" name="テキスト ボックス 52">
+            <a:extLst>
+              <a:ext uri="{FF2B5EF4-FFF2-40B4-BE49-F238E27FC236}">
+                <a16:creationId xmlns:a16="http://schemas.microsoft.com/office/drawing/2014/main" id="{58820A16-F9AD-15B3-4419-B137A084D88B}"/>
+              </a:ext>
+            </a:extLst>
+          </p:cNvPr>
+          <p:cNvSpPr txBox="1"/>
+          <p:nvPr/>
+        </p:nvSpPr>
+        <p:spPr>
+          <a:xfrm>
+            <a:off x="3013830" y="5447357"/>
+            <a:ext cx="902811" cy="307777"/>
+          </a:xfrm>
+          <a:prstGeom prst="rect">
+            <a:avLst/>
+          </a:prstGeom>
+          <a:noFill/>
+        </p:spPr>
+        <p:txBody>
+          <a:bodyPr wrap="none" rtlCol="0">
+            <a:spAutoFit/>
+          </a:bodyPr>
+          <a:lstStyle/>
+          <a:p>
+            <a:r>
+              <a:rPr kumimoji="1" lang="ja-JP" altLang="en-US" dirty="0"/>
+              <a:t>渦電流→</a:t>
+            </a:r>
+          </a:p>
+        </p:txBody>
+      </p:sp>
+      <p:sp>
+        <p:nvSpPr>
+          <p:cNvPr id="54" name="テキスト ボックス 53">
+            <a:extLst>
+              <a:ext uri="{FF2B5EF4-FFF2-40B4-BE49-F238E27FC236}">
+                <a16:creationId xmlns:a16="http://schemas.microsoft.com/office/drawing/2014/main" id="{CAC3B332-516D-A9CF-2071-C41937C7780B}"/>
+              </a:ext>
+            </a:extLst>
+          </p:cNvPr>
+          <p:cNvSpPr txBox="1"/>
+          <p:nvPr/>
+        </p:nvSpPr>
+        <p:spPr>
+          <a:xfrm>
+            <a:off x="835770" y="4269498"/>
+            <a:ext cx="3057247" cy="307777"/>
+          </a:xfrm>
+          <a:prstGeom prst="rect">
+            <a:avLst/>
+          </a:prstGeom>
+          <a:noFill/>
+        </p:spPr>
+        <p:txBody>
+          <a:bodyPr wrap="none" rtlCol="0">
+            <a:spAutoFit/>
+          </a:bodyPr>
+          <a:lstStyle/>
+          <a:p>
+            <a:r>
+              <a:rPr kumimoji="1" lang="ja-JP" altLang="en-US" dirty="0"/>
+              <a:t>励磁コイルから発生した一次磁界→</a:t>
+            </a:r>
+          </a:p>
+        </p:txBody>
+      </p:sp>
+      <p:sp>
+        <p:nvSpPr>
+          <p:cNvPr id="55" name="平行四辺形 54">
+            <a:extLst>
+              <a:ext uri="{FF2B5EF4-FFF2-40B4-BE49-F238E27FC236}">
+                <a16:creationId xmlns:a16="http://schemas.microsoft.com/office/drawing/2014/main" id="{4EC0265E-BB76-2ECB-AA59-93E2782CE587}"/>
+              </a:ext>
+            </a:extLst>
+          </p:cNvPr>
+          <p:cNvSpPr/>
+          <p:nvPr/>
+        </p:nvSpPr>
+        <p:spPr>
+          <a:xfrm>
+            <a:off x="8769634" y="5072013"/>
+            <a:ext cx="5623794" cy="1093719"/>
+          </a:xfrm>
+          <a:prstGeom prst="parallelogram">
+            <a:avLst>
+              <a:gd name="adj" fmla="val 87105"/>
+            </a:avLst>
+          </a:prstGeom>
+          <a:solidFill>
+            <a:schemeClr val="bg1">
+              <a:lumMod val="75000"/>
+            </a:schemeClr>
+          </a:solidFill>
+          <a:ln>
+            <a:solidFill>
+              <a:schemeClr val="tx1">
+                <a:lumMod val="95000"/>
+                <a:lumOff val="5000"/>
+              </a:schemeClr>
+            </a:solidFill>
+          </a:ln>
+        </p:spPr>
+        <p:style>
+          <a:lnRef idx="2">
+            <a:schemeClr val="accent1">
+              <a:shade val="15000"/>
+            </a:schemeClr>
+          </a:lnRef>
+          <a:fillRef idx="1">
+            <a:schemeClr val="accent1"/>
+          </a:fillRef>
+          <a:effectRef idx="0">
+            <a:schemeClr val="accent1"/>
+          </a:effectRef>
+          <a:fontRef idx="minor">
+            <a:schemeClr val="lt1"/>
+          </a:fontRef>
+        </p:style>
+        <p:txBody>
+          <a:bodyPr rtlCol="0" anchor="ctr"/>
+          <a:lstStyle/>
+          <a:p>
+            <a:pPr algn="ctr"/>
+            <a:endParaRPr kumimoji="1" lang="ja-JP" altLang="en-US"/>
+          </a:p>
+        </p:txBody>
+      </p:sp>
+      <p:grpSp>
+        <p:nvGrpSpPr>
+          <p:cNvPr id="56" name="グループ化 55">
+            <a:extLst>
+              <a:ext uri="{FF2B5EF4-FFF2-40B4-BE49-F238E27FC236}">
+                <a16:creationId xmlns:a16="http://schemas.microsoft.com/office/drawing/2014/main" id="{909D7A5C-DDE6-26EA-B37C-C9099F6027FC}"/>
+              </a:ext>
+            </a:extLst>
+          </p:cNvPr>
+          <p:cNvGrpSpPr/>
+          <p:nvPr/>
+        </p:nvGrpSpPr>
+        <p:grpSpPr>
+          <a:xfrm>
+            <a:off x="10865305" y="3110870"/>
+            <a:ext cx="1561764" cy="1044319"/>
+            <a:chOff x="5256110" y="2542415"/>
+            <a:chExt cx="1561764" cy="1215325"/>
+          </a:xfrm>
+        </p:grpSpPr>
+        <p:sp>
+          <p:nvSpPr>
+            <p:cNvPr id="57" name="フローチャート: 磁気ディスク 56">
+              <a:extLst>
+                <a:ext uri="{FF2B5EF4-FFF2-40B4-BE49-F238E27FC236}">
+                  <a16:creationId xmlns:a16="http://schemas.microsoft.com/office/drawing/2014/main" id="{05A641C1-951E-B931-711D-7DD179D9396B}"/>
+                </a:ext>
+              </a:extLst>
+            </p:cNvPr>
+            <p:cNvSpPr/>
+            <p:nvPr/>
+          </p:nvSpPr>
+          <p:spPr>
+            <a:xfrm>
+              <a:off x="5256110" y="3381460"/>
+              <a:ext cx="1561763" cy="376280"/>
+            </a:xfrm>
+            <a:prstGeom prst="flowChartMagneticDisk">
+              <a:avLst/>
+            </a:prstGeom>
+          </p:spPr>
+          <p:style>
+            <a:lnRef idx="2">
+              <a:schemeClr val="accent1">
+                <a:shade val="15000"/>
+              </a:schemeClr>
+            </a:lnRef>
+            <a:fillRef idx="1">
+              <a:schemeClr val="accent1"/>
+            </a:fillRef>
+            <a:effectRef idx="0">
+              <a:schemeClr val="accent1"/>
+            </a:effectRef>
+            <a:fontRef idx="minor">
+              <a:schemeClr val="lt1"/>
+            </a:fontRef>
+          </p:style>
+          <p:txBody>
+            <a:bodyPr rtlCol="0" anchor="ctr"/>
+            <a:lstStyle/>
+            <a:p>
+              <a:pPr algn="ctr"/>
+              <a:endParaRPr kumimoji="1" lang="ja-JP" altLang="en-US"/>
+            </a:p>
+          </p:txBody>
+        </p:sp>
+        <p:sp>
+          <p:nvSpPr>
+            <p:cNvPr id="58" name="フローチャート: 磁気ディスク 57">
+              <a:extLst>
+                <a:ext uri="{FF2B5EF4-FFF2-40B4-BE49-F238E27FC236}">
+                  <a16:creationId xmlns:a16="http://schemas.microsoft.com/office/drawing/2014/main" id="{919ABBC3-7805-8CF4-BDAC-BCB37143EA5A}"/>
+                </a:ext>
+              </a:extLst>
+            </p:cNvPr>
+            <p:cNvSpPr/>
+            <p:nvPr/>
+          </p:nvSpPr>
+          <p:spPr>
+            <a:xfrm>
+              <a:off x="5734216" y="2561888"/>
+              <a:ext cx="605553" cy="946768"/>
+            </a:xfrm>
+            <a:prstGeom prst="flowChartMagneticDisk">
+              <a:avLst/>
+            </a:prstGeom>
+          </p:spPr>
+          <p:style>
+            <a:lnRef idx="2">
+              <a:schemeClr val="accent1">
+                <a:shade val="15000"/>
+              </a:schemeClr>
+            </a:lnRef>
+            <a:fillRef idx="1">
+              <a:schemeClr val="accent1"/>
+            </a:fillRef>
+            <a:effectRef idx="0">
+              <a:schemeClr val="accent1"/>
+            </a:effectRef>
+            <a:fontRef idx="minor">
+              <a:schemeClr val="lt1"/>
+            </a:fontRef>
+          </p:style>
+          <p:txBody>
+            <a:bodyPr rtlCol="0" anchor="ctr"/>
+            <a:lstStyle/>
+            <a:p>
+              <a:pPr algn="ctr"/>
+              <a:endParaRPr kumimoji="1" lang="ja-JP" altLang="en-US"/>
+            </a:p>
+          </p:txBody>
+        </p:sp>
+        <p:sp>
+          <p:nvSpPr>
+            <p:cNvPr id="59" name="フローチャート: 磁気ディスク 58">
+              <a:extLst>
+                <a:ext uri="{FF2B5EF4-FFF2-40B4-BE49-F238E27FC236}">
+                  <a16:creationId xmlns:a16="http://schemas.microsoft.com/office/drawing/2014/main" id="{31E884F7-FB6B-2885-5991-E80A5B3A2A14}"/>
+                </a:ext>
+              </a:extLst>
+            </p:cNvPr>
+            <p:cNvSpPr/>
+            <p:nvPr/>
+          </p:nvSpPr>
+          <p:spPr>
+            <a:xfrm>
+              <a:off x="5345123" y="2926785"/>
+              <a:ext cx="1383738" cy="570489"/>
+            </a:xfrm>
+            <a:prstGeom prst="flowChartMagneticDisk">
+              <a:avLst/>
+            </a:prstGeom>
+            <a:solidFill>
+              <a:schemeClr val="accent6">
+                <a:lumMod val="75000"/>
+              </a:schemeClr>
+            </a:solidFill>
+          </p:spPr>
+          <p:style>
+            <a:lnRef idx="2">
+              <a:schemeClr val="accent1">
+                <a:shade val="15000"/>
+              </a:schemeClr>
+            </a:lnRef>
+            <a:fillRef idx="1">
+              <a:schemeClr val="accent1"/>
+            </a:fillRef>
+            <a:effectRef idx="0">
+              <a:schemeClr val="accent1"/>
+            </a:effectRef>
+            <a:fontRef idx="minor">
+              <a:schemeClr val="lt1"/>
+            </a:fontRef>
+          </p:style>
+          <p:txBody>
+            <a:bodyPr rtlCol="0" anchor="ctr"/>
+            <a:lstStyle/>
+            <a:p>
+              <a:pPr algn="ctr"/>
+              <a:endParaRPr kumimoji="1" lang="ja-JP" altLang="en-US"/>
+            </a:p>
+          </p:txBody>
+        </p:sp>
+        <p:sp>
+          <p:nvSpPr>
+            <p:cNvPr id="60" name="フローチャート: 磁気ディスク 59">
+              <a:extLst>
+                <a:ext uri="{FF2B5EF4-FFF2-40B4-BE49-F238E27FC236}">
+                  <a16:creationId xmlns:a16="http://schemas.microsoft.com/office/drawing/2014/main" id="{A0A7DD0F-E0FF-BD5C-A023-70AD47EAE11C}"/>
+                </a:ext>
+              </a:extLst>
+            </p:cNvPr>
+            <p:cNvSpPr/>
+            <p:nvPr/>
+          </p:nvSpPr>
+          <p:spPr>
+            <a:xfrm>
+              <a:off x="5345124" y="2766716"/>
+              <a:ext cx="1383738" cy="570489"/>
+            </a:xfrm>
+            <a:prstGeom prst="flowChartMagneticDisk">
+              <a:avLst/>
+            </a:prstGeom>
+            <a:solidFill>
+              <a:schemeClr val="accent6">
+                <a:lumMod val="75000"/>
+              </a:schemeClr>
+            </a:solidFill>
+          </p:spPr>
+          <p:style>
+            <a:lnRef idx="2">
+              <a:schemeClr val="accent1">
+                <a:shade val="15000"/>
+              </a:schemeClr>
+            </a:lnRef>
+            <a:fillRef idx="1">
+              <a:schemeClr val="accent1"/>
+            </a:fillRef>
+            <a:effectRef idx="0">
+              <a:schemeClr val="accent1"/>
+            </a:effectRef>
+            <a:fontRef idx="minor">
+              <a:schemeClr val="lt1"/>
+            </a:fontRef>
+          </p:style>
+          <p:txBody>
+            <a:bodyPr rtlCol="0" anchor="ctr"/>
+            <a:lstStyle/>
+            <a:p>
+              <a:pPr algn="ctr"/>
+              <a:endParaRPr kumimoji="1" lang="ja-JP" altLang="en-US"/>
+            </a:p>
+          </p:txBody>
+        </p:sp>
+        <p:sp>
+          <p:nvSpPr>
+            <p:cNvPr id="61" name="フローチャート: 磁気ディスク 60">
+              <a:extLst>
+                <a:ext uri="{FF2B5EF4-FFF2-40B4-BE49-F238E27FC236}">
+                  <a16:creationId xmlns:a16="http://schemas.microsoft.com/office/drawing/2014/main" id="{15DB3BBC-DE45-73A1-9708-7E135434C786}"/>
+                </a:ext>
+              </a:extLst>
+            </p:cNvPr>
+            <p:cNvSpPr/>
+            <p:nvPr/>
+          </p:nvSpPr>
+          <p:spPr>
+            <a:xfrm>
+              <a:off x="5345123" y="2667590"/>
+              <a:ext cx="1383738" cy="570489"/>
+            </a:xfrm>
+            <a:prstGeom prst="flowChartMagneticDisk">
+              <a:avLst/>
+            </a:prstGeom>
+            <a:solidFill>
+              <a:schemeClr val="accent6">
+                <a:lumMod val="75000"/>
+              </a:schemeClr>
+            </a:solidFill>
+          </p:spPr>
+          <p:style>
+            <a:lnRef idx="2">
+              <a:schemeClr val="accent1">
+                <a:shade val="15000"/>
+              </a:schemeClr>
+            </a:lnRef>
+            <a:fillRef idx="1">
+              <a:schemeClr val="accent1"/>
+            </a:fillRef>
+            <a:effectRef idx="0">
+              <a:schemeClr val="accent1"/>
+            </a:effectRef>
+            <a:fontRef idx="minor">
+              <a:schemeClr val="lt1"/>
+            </a:fontRef>
+          </p:style>
+          <p:txBody>
+            <a:bodyPr rtlCol="0" anchor="ctr"/>
+            <a:lstStyle/>
+            <a:p>
+              <a:pPr algn="ctr"/>
+              <a:endParaRPr kumimoji="1" lang="ja-JP" altLang="en-US"/>
+            </a:p>
+          </p:txBody>
+        </p:sp>
+        <p:sp>
+          <p:nvSpPr>
+            <p:cNvPr id="62" name="フローチャート: 磁気ディスク 61">
+              <a:extLst>
+                <a:ext uri="{FF2B5EF4-FFF2-40B4-BE49-F238E27FC236}">
+                  <a16:creationId xmlns:a16="http://schemas.microsoft.com/office/drawing/2014/main" id="{41D55978-682B-0DB8-379A-58ED9CA00BED}"/>
+                </a:ext>
+              </a:extLst>
+            </p:cNvPr>
+            <p:cNvSpPr/>
+            <p:nvPr/>
+          </p:nvSpPr>
+          <p:spPr>
+            <a:xfrm>
+              <a:off x="5345123" y="2542415"/>
+              <a:ext cx="1383738" cy="570489"/>
+            </a:xfrm>
+            <a:prstGeom prst="flowChartMagneticDisk">
+              <a:avLst/>
+            </a:prstGeom>
+            <a:solidFill>
+              <a:schemeClr val="accent6">
+                <a:lumMod val="75000"/>
+              </a:schemeClr>
+            </a:solidFill>
+          </p:spPr>
+          <p:style>
+            <a:lnRef idx="2">
+              <a:schemeClr val="accent1">
+                <a:shade val="15000"/>
+              </a:schemeClr>
+            </a:lnRef>
+            <a:fillRef idx="1">
+              <a:schemeClr val="accent1"/>
+            </a:fillRef>
+            <a:effectRef idx="0">
+              <a:schemeClr val="accent1"/>
+            </a:effectRef>
+            <a:fontRef idx="minor">
+              <a:schemeClr val="lt1"/>
+            </a:fontRef>
+          </p:style>
+          <p:txBody>
+            <a:bodyPr rtlCol="0" anchor="ctr"/>
+            <a:lstStyle/>
+            <a:p>
+              <a:pPr algn="ctr"/>
+              <a:endParaRPr kumimoji="1" lang="ja-JP" altLang="en-US"/>
+            </a:p>
+          </p:txBody>
+        </p:sp>
+        <p:sp>
+          <p:nvSpPr>
+            <p:cNvPr id="63" name="フローチャート: 磁気ディスク 62">
+              <a:extLst>
+                <a:ext uri="{FF2B5EF4-FFF2-40B4-BE49-F238E27FC236}">
+                  <a16:creationId xmlns:a16="http://schemas.microsoft.com/office/drawing/2014/main" id="{58DA2BB4-E9C5-8291-327B-AFFF55CF5672}"/>
+                </a:ext>
+              </a:extLst>
+            </p:cNvPr>
+            <p:cNvSpPr/>
+            <p:nvPr/>
+          </p:nvSpPr>
+          <p:spPr>
+            <a:xfrm>
+              <a:off x="5256111" y="2561887"/>
+              <a:ext cx="1561763" cy="376280"/>
+            </a:xfrm>
+            <a:prstGeom prst="flowChartMagneticDisk">
+              <a:avLst/>
+            </a:prstGeom>
+          </p:spPr>
+          <p:style>
+            <a:lnRef idx="2">
+              <a:schemeClr val="accent1">
+                <a:shade val="15000"/>
+              </a:schemeClr>
+            </a:lnRef>
+            <a:fillRef idx="1">
+              <a:schemeClr val="accent1"/>
+            </a:fillRef>
+            <a:effectRef idx="0">
+              <a:schemeClr val="accent1"/>
+            </a:effectRef>
+            <a:fontRef idx="minor">
+              <a:schemeClr val="lt1"/>
+            </a:fontRef>
+          </p:style>
+          <p:txBody>
+            <a:bodyPr rtlCol="0" anchor="ctr"/>
+            <a:lstStyle/>
+            <a:p>
+              <a:pPr algn="ctr"/>
+              <a:endParaRPr kumimoji="1" lang="ja-JP" altLang="en-US" dirty="0"/>
+            </a:p>
+          </p:txBody>
+        </p:sp>
+      </p:grpSp>
+      <p:grpSp>
+        <p:nvGrpSpPr>
+          <p:cNvPr id="64" name="グループ化 63">
+            <a:extLst>
+              <a:ext uri="{FF2B5EF4-FFF2-40B4-BE49-F238E27FC236}">
+                <a16:creationId xmlns:a16="http://schemas.microsoft.com/office/drawing/2014/main" id="{6A1A7D8A-3420-EB89-55EF-42D5C17FE5B8}"/>
+              </a:ext>
+            </a:extLst>
+          </p:cNvPr>
+          <p:cNvGrpSpPr/>
+          <p:nvPr/>
+        </p:nvGrpSpPr>
+        <p:grpSpPr>
+          <a:xfrm>
+            <a:off x="10865305" y="2059915"/>
+            <a:ext cx="1561764" cy="1215325"/>
+            <a:chOff x="3310311" y="1314957"/>
+            <a:chExt cx="1561764" cy="1215325"/>
+          </a:xfrm>
+        </p:grpSpPr>
+        <p:sp>
+          <p:nvSpPr>
+            <p:cNvPr id="65" name="フローチャート: 磁気ディスク 64">
+              <a:extLst>
+                <a:ext uri="{FF2B5EF4-FFF2-40B4-BE49-F238E27FC236}">
+                  <a16:creationId xmlns:a16="http://schemas.microsoft.com/office/drawing/2014/main" id="{5EB3F5B5-3AD8-2D23-0ED5-D642D4AC700C}"/>
+                </a:ext>
+              </a:extLst>
+            </p:cNvPr>
+            <p:cNvSpPr/>
+            <p:nvPr/>
+          </p:nvSpPr>
+          <p:spPr>
+            <a:xfrm>
+              <a:off x="3310311" y="2154002"/>
+              <a:ext cx="1561763" cy="376280"/>
+            </a:xfrm>
+            <a:prstGeom prst="flowChartMagneticDisk">
+              <a:avLst/>
+            </a:prstGeom>
+            <a:solidFill>
+              <a:srgbClr val="FFFF00"/>
+            </a:solidFill>
+          </p:spPr>
+          <p:style>
+            <a:lnRef idx="2">
+              <a:schemeClr val="accent1">
+                <a:shade val="15000"/>
+              </a:schemeClr>
+            </a:lnRef>
+            <a:fillRef idx="1">
+              <a:schemeClr val="accent1"/>
+            </a:fillRef>
+            <a:effectRef idx="0">
+              <a:schemeClr val="accent1"/>
+            </a:effectRef>
+            <a:fontRef idx="minor">
+              <a:schemeClr val="lt1"/>
+            </a:fontRef>
+          </p:style>
+          <p:txBody>
+            <a:bodyPr rtlCol="0" anchor="ctr"/>
+            <a:lstStyle/>
+            <a:p>
+              <a:pPr algn="ctr"/>
+              <a:endParaRPr kumimoji="1" lang="ja-JP" altLang="en-US"/>
+            </a:p>
+          </p:txBody>
+        </p:sp>
+        <p:sp>
+          <p:nvSpPr>
+            <p:cNvPr id="66" name="フローチャート: 磁気ディスク 65">
+              <a:extLst>
+                <a:ext uri="{FF2B5EF4-FFF2-40B4-BE49-F238E27FC236}">
+                  <a16:creationId xmlns:a16="http://schemas.microsoft.com/office/drawing/2014/main" id="{BE4D83D8-B9A7-7746-D8B8-3BC4CCDACAF0}"/>
+                </a:ext>
+              </a:extLst>
+            </p:cNvPr>
+            <p:cNvSpPr/>
+            <p:nvPr/>
+          </p:nvSpPr>
+          <p:spPr>
+            <a:xfrm>
+              <a:off x="3788417" y="1334430"/>
+              <a:ext cx="605553" cy="946768"/>
+            </a:xfrm>
+            <a:prstGeom prst="flowChartMagneticDisk">
+              <a:avLst/>
+            </a:prstGeom>
+          </p:spPr>
+          <p:style>
+            <a:lnRef idx="2">
+              <a:schemeClr val="accent1">
+                <a:shade val="15000"/>
+              </a:schemeClr>
+            </a:lnRef>
+            <a:fillRef idx="1">
+              <a:schemeClr val="accent1"/>
+            </a:fillRef>
+            <a:effectRef idx="0">
+              <a:schemeClr val="accent1"/>
+            </a:effectRef>
+            <a:fontRef idx="minor">
+              <a:schemeClr val="lt1"/>
+            </a:fontRef>
+          </p:style>
+          <p:txBody>
+            <a:bodyPr rtlCol="0" anchor="ctr"/>
+            <a:lstStyle/>
+            <a:p>
+              <a:pPr algn="ctr"/>
+              <a:endParaRPr kumimoji="1" lang="ja-JP" altLang="en-US"/>
+            </a:p>
+          </p:txBody>
+        </p:sp>
+        <p:sp>
+          <p:nvSpPr>
+            <p:cNvPr id="67" name="フローチャート: 磁気ディスク 66">
+              <a:extLst>
+                <a:ext uri="{FF2B5EF4-FFF2-40B4-BE49-F238E27FC236}">
+                  <a16:creationId xmlns:a16="http://schemas.microsoft.com/office/drawing/2014/main" id="{6D996C7C-EB8A-F47C-8206-4F7C643FBC94}"/>
+                </a:ext>
+              </a:extLst>
+            </p:cNvPr>
+            <p:cNvSpPr/>
+            <p:nvPr/>
+          </p:nvSpPr>
+          <p:spPr>
+            <a:xfrm>
+              <a:off x="3399324" y="1699327"/>
+              <a:ext cx="1383738" cy="570489"/>
+            </a:xfrm>
+            <a:prstGeom prst="flowChartMagneticDisk">
+              <a:avLst/>
+            </a:prstGeom>
+            <a:solidFill>
+              <a:schemeClr val="accent6">
+                <a:lumMod val="75000"/>
+              </a:schemeClr>
+            </a:solidFill>
+          </p:spPr>
+          <p:style>
+            <a:lnRef idx="2">
+              <a:schemeClr val="accent1">
+                <a:shade val="15000"/>
+              </a:schemeClr>
+            </a:lnRef>
+            <a:fillRef idx="1">
+              <a:schemeClr val="accent1"/>
+            </a:fillRef>
+            <a:effectRef idx="0">
+              <a:schemeClr val="accent1"/>
+            </a:effectRef>
+            <a:fontRef idx="minor">
+              <a:schemeClr val="lt1"/>
+            </a:fontRef>
+          </p:style>
+          <p:txBody>
+            <a:bodyPr rtlCol="0" anchor="ctr"/>
+            <a:lstStyle/>
+            <a:p>
+              <a:pPr algn="ctr"/>
+              <a:endParaRPr kumimoji="1" lang="ja-JP" altLang="en-US"/>
+            </a:p>
+          </p:txBody>
+        </p:sp>
+        <p:sp>
+          <p:nvSpPr>
+            <p:cNvPr id="68" name="フローチャート: 磁気ディスク 67">
+              <a:extLst>
+                <a:ext uri="{FF2B5EF4-FFF2-40B4-BE49-F238E27FC236}">
+                  <a16:creationId xmlns:a16="http://schemas.microsoft.com/office/drawing/2014/main" id="{2C7D251B-5BF7-544D-886D-86CCB9675534}"/>
+                </a:ext>
+              </a:extLst>
+            </p:cNvPr>
+            <p:cNvSpPr/>
+            <p:nvPr/>
+          </p:nvSpPr>
+          <p:spPr>
+            <a:xfrm>
+              <a:off x="3399325" y="1539258"/>
+              <a:ext cx="1383738" cy="570489"/>
+            </a:xfrm>
+            <a:prstGeom prst="flowChartMagneticDisk">
+              <a:avLst/>
+            </a:prstGeom>
+            <a:solidFill>
+              <a:schemeClr val="accent6">
+                <a:lumMod val="75000"/>
+              </a:schemeClr>
+            </a:solidFill>
+          </p:spPr>
+          <p:style>
+            <a:lnRef idx="2">
+              <a:schemeClr val="accent1">
+                <a:shade val="15000"/>
+              </a:schemeClr>
+            </a:lnRef>
+            <a:fillRef idx="1">
+              <a:schemeClr val="accent1"/>
+            </a:fillRef>
+            <a:effectRef idx="0">
+              <a:schemeClr val="accent1"/>
+            </a:effectRef>
+            <a:fontRef idx="minor">
+              <a:schemeClr val="lt1"/>
+            </a:fontRef>
+          </p:style>
+          <p:txBody>
+            <a:bodyPr rtlCol="0" anchor="ctr"/>
+            <a:lstStyle/>
+            <a:p>
+              <a:pPr algn="ctr"/>
+              <a:endParaRPr kumimoji="1" lang="ja-JP" altLang="en-US"/>
+            </a:p>
+          </p:txBody>
+        </p:sp>
+        <p:sp>
+          <p:nvSpPr>
+            <p:cNvPr id="69" name="フローチャート: 磁気ディスク 68">
+              <a:extLst>
+                <a:ext uri="{FF2B5EF4-FFF2-40B4-BE49-F238E27FC236}">
+                  <a16:creationId xmlns:a16="http://schemas.microsoft.com/office/drawing/2014/main" id="{C768E38F-28FB-7EBF-FFF7-8A7F1FBCB605}"/>
+                </a:ext>
+              </a:extLst>
+            </p:cNvPr>
+            <p:cNvSpPr/>
+            <p:nvPr/>
+          </p:nvSpPr>
+          <p:spPr>
+            <a:xfrm>
+              <a:off x="3399324" y="1440132"/>
+              <a:ext cx="1383738" cy="570489"/>
+            </a:xfrm>
+            <a:prstGeom prst="flowChartMagneticDisk">
+              <a:avLst/>
+            </a:prstGeom>
+            <a:solidFill>
+              <a:schemeClr val="accent6">
+                <a:lumMod val="75000"/>
+              </a:schemeClr>
+            </a:solidFill>
+          </p:spPr>
+          <p:style>
+            <a:lnRef idx="2">
+              <a:schemeClr val="accent1">
+                <a:shade val="15000"/>
+              </a:schemeClr>
+            </a:lnRef>
+            <a:fillRef idx="1">
+              <a:schemeClr val="accent1"/>
+            </a:fillRef>
+            <a:effectRef idx="0">
+              <a:schemeClr val="accent1"/>
+            </a:effectRef>
+            <a:fontRef idx="minor">
+              <a:schemeClr val="lt1"/>
+            </a:fontRef>
+          </p:style>
+          <p:txBody>
+            <a:bodyPr rtlCol="0" anchor="ctr"/>
+            <a:lstStyle/>
+            <a:p>
+              <a:pPr algn="ctr"/>
+              <a:endParaRPr kumimoji="1" lang="ja-JP" altLang="en-US"/>
+            </a:p>
+          </p:txBody>
+        </p:sp>
+        <p:sp>
+          <p:nvSpPr>
+            <p:cNvPr id="70" name="フローチャート: 磁気ディスク 69">
+              <a:extLst>
+                <a:ext uri="{FF2B5EF4-FFF2-40B4-BE49-F238E27FC236}">
+                  <a16:creationId xmlns:a16="http://schemas.microsoft.com/office/drawing/2014/main" id="{F005EB9B-E33F-B917-7258-1439C01EFC3A}"/>
+                </a:ext>
+              </a:extLst>
+            </p:cNvPr>
+            <p:cNvSpPr/>
+            <p:nvPr/>
+          </p:nvSpPr>
+          <p:spPr>
+            <a:xfrm>
+              <a:off x="3399324" y="1314957"/>
+              <a:ext cx="1383738" cy="570489"/>
+            </a:xfrm>
+            <a:prstGeom prst="flowChartMagneticDisk">
+              <a:avLst/>
+            </a:prstGeom>
+            <a:solidFill>
+              <a:schemeClr val="accent6">
+                <a:lumMod val="75000"/>
+              </a:schemeClr>
+            </a:solidFill>
+          </p:spPr>
+          <p:style>
+            <a:lnRef idx="2">
+              <a:schemeClr val="accent1">
+                <a:shade val="15000"/>
+              </a:schemeClr>
+            </a:lnRef>
+            <a:fillRef idx="1">
+              <a:schemeClr val="accent1"/>
+            </a:fillRef>
+            <a:effectRef idx="0">
+              <a:schemeClr val="accent1"/>
+            </a:effectRef>
+            <a:fontRef idx="minor">
+              <a:schemeClr val="lt1"/>
+            </a:fontRef>
+          </p:style>
+          <p:txBody>
+            <a:bodyPr rtlCol="0" anchor="ctr"/>
+            <a:lstStyle/>
+            <a:p>
+              <a:pPr algn="ctr"/>
+              <a:endParaRPr kumimoji="1" lang="ja-JP" altLang="en-US"/>
+            </a:p>
+          </p:txBody>
+        </p:sp>
+        <p:sp>
+          <p:nvSpPr>
+            <p:cNvPr id="71" name="フローチャート: 磁気ディスク 70">
+              <a:extLst>
+                <a:ext uri="{FF2B5EF4-FFF2-40B4-BE49-F238E27FC236}">
+                  <a16:creationId xmlns:a16="http://schemas.microsoft.com/office/drawing/2014/main" id="{3F7ED84F-63AC-4B05-C83F-973E946E70A7}"/>
+                </a:ext>
+              </a:extLst>
+            </p:cNvPr>
+            <p:cNvSpPr/>
+            <p:nvPr/>
+          </p:nvSpPr>
+          <p:spPr>
+            <a:xfrm>
+              <a:off x="3310312" y="1334429"/>
+              <a:ext cx="1561763" cy="376280"/>
+            </a:xfrm>
+            <a:prstGeom prst="flowChartMagneticDisk">
+              <a:avLst/>
+            </a:prstGeom>
+            <a:solidFill>
+              <a:srgbClr val="FFFF00"/>
+            </a:solidFill>
+          </p:spPr>
+          <p:style>
+            <a:lnRef idx="2">
+              <a:schemeClr val="accent1">
+                <a:shade val="15000"/>
+              </a:schemeClr>
+            </a:lnRef>
+            <a:fillRef idx="1">
+              <a:schemeClr val="accent1"/>
+            </a:fillRef>
+            <a:effectRef idx="0">
+              <a:schemeClr val="accent1"/>
+            </a:effectRef>
+            <a:fontRef idx="minor">
+              <a:schemeClr val="lt1"/>
+            </a:fontRef>
+          </p:style>
+          <p:txBody>
+            <a:bodyPr rtlCol="0" anchor="ctr"/>
+            <a:lstStyle/>
+            <a:p>
+              <a:pPr algn="ctr"/>
+              <a:endParaRPr kumimoji="1" lang="ja-JP" altLang="en-US"/>
+            </a:p>
+          </p:txBody>
+        </p:sp>
+      </p:grpSp>
+      <p:sp>
+        <p:nvSpPr>
+          <p:cNvPr id="72" name="楕円 71">
+            <a:extLst>
+              <a:ext uri="{FF2B5EF4-FFF2-40B4-BE49-F238E27FC236}">
+                <a16:creationId xmlns:a16="http://schemas.microsoft.com/office/drawing/2014/main" id="{C6C8E515-685A-ADDE-C450-A94B1F78A9A4}"/>
+              </a:ext>
+            </a:extLst>
+          </p:cNvPr>
+          <p:cNvSpPr/>
+          <p:nvPr/>
+        </p:nvSpPr>
+        <p:spPr>
+          <a:xfrm>
+            <a:off x="11321323" y="1269374"/>
+            <a:ext cx="659666" cy="623205"/>
+          </a:xfrm>
+          <a:prstGeom prst="ellipse">
+            <a:avLst/>
+          </a:prstGeom>
+          <a:noFill/>
+        </p:spPr>
+        <p:style>
+          <a:lnRef idx="2">
+            <a:schemeClr val="accent1">
+              <a:shade val="15000"/>
+            </a:schemeClr>
+          </a:lnRef>
+          <a:fillRef idx="1">
+            <a:schemeClr val="accent1"/>
+          </a:fillRef>
+          <a:effectRef idx="0">
+            <a:schemeClr val="accent1"/>
+          </a:effectRef>
+          <a:fontRef idx="minor">
+            <a:schemeClr val="lt1"/>
+          </a:fontRef>
+        </p:style>
+        <p:txBody>
+          <a:bodyPr rtlCol="0" anchor="ctr"/>
+          <a:lstStyle/>
+          <a:p>
+            <a:pPr algn="ctr"/>
+            <a:r>
+              <a:rPr kumimoji="1" lang="ja-JP" altLang="en-US" sz="3600" dirty="0">
+                <a:solidFill>
+                  <a:schemeClr val="tx1"/>
+                </a:solidFill>
+              </a:rPr>
+              <a:t>～</a:t>
+            </a:r>
+          </a:p>
+        </p:txBody>
+      </p:sp>
+      <p:cxnSp>
+        <p:nvCxnSpPr>
+          <p:cNvPr id="73" name="コネクタ: カギ線 72">
+            <a:extLst>
+              <a:ext uri="{FF2B5EF4-FFF2-40B4-BE49-F238E27FC236}">
+                <a16:creationId xmlns:a16="http://schemas.microsoft.com/office/drawing/2014/main" id="{EFC3C348-D142-75E1-DF3A-C70B15D36187}"/>
+              </a:ext>
+            </a:extLst>
+          </p:cNvPr>
+          <p:cNvCxnSpPr>
+            <a:stCxn id="71" idx="2"/>
+            <a:endCxn id="72" idx="2"/>
+          </p:cNvCxnSpPr>
+          <p:nvPr/>
+        </p:nvCxnSpPr>
+        <p:spPr>
+          <a:xfrm rot="10800000" flipH="1">
+            <a:off x="10865305" y="1580977"/>
+            <a:ext cx="456017" cy="686550"/>
+          </a:xfrm>
+          <a:prstGeom prst="bentConnector3">
+            <a:avLst>
+              <a:gd name="adj1" fmla="val -50130"/>
+            </a:avLst>
+          </a:prstGeom>
+          <a:ln w="25400">
+            <a:solidFill>
+              <a:schemeClr val="tx1"/>
+            </a:solidFill>
+          </a:ln>
+        </p:spPr>
+        <p:style>
+          <a:lnRef idx="1">
+            <a:schemeClr val="accent1"/>
+          </a:lnRef>
+          <a:fillRef idx="0">
+            <a:schemeClr val="accent1"/>
+          </a:fillRef>
+          <a:effectRef idx="0">
+            <a:schemeClr val="accent1"/>
+          </a:effectRef>
+          <a:fontRef idx="minor">
+            <a:schemeClr val="tx1"/>
+          </a:fontRef>
+        </p:style>
+      </p:cxnSp>
+      <p:cxnSp>
+        <p:nvCxnSpPr>
+          <p:cNvPr id="74" name="コネクタ: カギ線 73">
+            <a:extLst>
+              <a:ext uri="{FF2B5EF4-FFF2-40B4-BE49-F238E27FC236}">
+                <a16:creationId xmlns:a16="http://schemas.microsoft.com/office/drawing/2014/main" id="{49C5556A-6D24-7971-F046-0C6F4F26837A}"/>
+              </a:ext>
+            </a:extLst>
+          </p:cNvPr>
+          <p:cNvCxnSpPr>
+            <a:stCxn id="71" idx="4"/>
+            <a:endCxn id="72" idx="6"/>
+          </p:cNvCxnSpPr>
+          <p:nvPr/>
+        </p:nvCxnSpPr>
+        <p:spPr>
+          <a:xfrm flipH="1" flipV="1">
+            <a:off x="11980989" y="1580977"/>
+            <a:ext cx="446080" cy="686550"/>
+          </a:xfrm>
+          <a:prstGeom prst="bentConnector3">
+            <a:avLst>
+              <a:gd name="adj1" fmla="val -51246"/>
+            </a:avLst>
+          </a:prstGeom>
+          <a:ln w="25400">
+            <a:solidFill>
+              <a:schemeClr val="tx1"/>
+            </a:solidFill>
+          </a:ln>
+        </p:spPr>
+        <p:style>
+          <a:lnRef idx="1">
+            <a:schemeClr val="accent1"/>
+          </a:lnRef>
+          <a:fillRef idx="0">
+            <a:schemeClr val="accent1"/>
+          </a:fillRef>
+          <a:effectRef idx="0">
+            <a:schemeClr val="accent1"/>
+          </a:effectRef>
+          <a:fontRef idx="minor">
+            <a:schemeClr val="tx1"/>
+          </a:fontRef>
+        </p:style>
+      </p:cxnSp>
+      <p:sp>
+        <p:nvSpPr>
+          <p:cNvPr id="75" name="楕円 74">
+            <a:extLst>
+              <a:ext uri="{FF2B5EF4-FFF2-40B4-BE49-F238E27FC236}">
+                <a16:creationId xmlns:a16="http://schemas.microsoft.com/office/drawing/2014/main" id="{6CDEAF2E-8980-4E47-0670-6F5484BEEFAB}"/>
+              </a:ext>
+            </a:extLst>
+          </p:cNvPr>
+          <p:cNvSpPr/>
+          <p:nvPr/>
+        </p:nvSpPr>
+        <p:spPr>
+          <a:xfrm>
+            <a:off x="10865305" y="5310909"/>
+            <a:ext cx="1561763" cy="580677"/>
+          </a:xfrm>
+          <a:prstGeom prst="ellipse">
+            <a:avLst/>
+          </a:prstGeom>
+          <a:noFill/>
+          <a:ln>
+            <a:solidFill>
+              <a:srgbClr val="FFFF00"/>
+            </a:solidFill>
+          </a:ln>
+        </p:spPr>
+        <p:style>
+          <a:lnRef idx="2">
+            <a:schemeClr val="accent1">
+              <a:shade val="15000"/>
+            </a:schemeClr>
+          </a:lnRef>
+          <a:fillRef idx="1">
+            <a:schemeClr val="accent1"/>
+          </a:fillRef>
+          <a:effectRef idx="0">
+            <a:schemeClr val="accent1"/>
+          </a:effectRef>
+          <a:fontRef idx="minor">
+            <a:schemeClr val="lt1"/>
+          </a:fontRef>
+        </p:style>
+        <p:txBody>
+          <a:bodyPr rtlCol="0" anchor="ctr"/>
+          <a:lstStyle/>
+          <a:p>
+            <a:pPr algn="ctr"/>
+            <a:endParaRPr kumimoji="1" lang="ja-JP" altLang="en-US"/>
+          </a:p>
+        </p:txBody>
+      </p:sp>
+      <p:sp>
+        <p:nvSpPr>
+          <p:cNvPr id="76" name="楕円 75">
+            <a:extLst>
+              <a:ext uri="{FF2B5EF4-FFF2-40B4-BE49-F238E27FC236}">
+                <a16:creationId xmlns:a16="http://schemas.microsoft.com/office/drawing/2014/main" id="{AE0AA362-F7BE-69ED-54D4-BDDF6EE368A2}"/>
+              </a:ext>
+            </a:extLst>
+          </p:cNvPr>
+          <p:cNvSpPr/>
+          <p:nvPr/>
+        </p:nvSpPr>
+        <p:spPr>
+          <a:xfrm>
+            <a:off x="10686656" y="5182648"/>
+            <a:ext cx="1919060" cy="837197"/>
+          </a:xfrm>
+          <a:prstGeom prst="ellipse">
+            <a:avLst/>
+          </a:prstGeom>
+          <a:noFill/>
+          <a:ln>
+            <a:solidFill>
+              <a:srgbClr val="FFFF00"/>
+            </a:solidFill>
+          </a:ln>
+        </p:spPr>
+        <p:style>
+          <a:lnRef idx="2">
+            <a:schemeClr val="accent1">
+              <a:shade val="15000"/>
+            </a:schemeClr>
+          </a:lnRef>
+          <a:fillRef idx="1">
+            <a:schemeClr val="accent1"/>
+          </a:fillRef>
+          <a:effectRef idx="0">
+            <a:schemeClr val="accent1"/>
+          </a:effectRef>
+          <a:fontRef idx="minor">
+            <a:schemeClr val="lt1"/>
+          </a:fontRef>
+        </p:style>
+        <p:txBody>
+          <a:bodyPr rtlCol="0" anchor="ctr"/>
+          <a:lstStyle/>
+          <a:p>
+            <a:pPr algn="ctr"/>
+            <a:endParaRPr kumimoji="1" lang="ja-JP" altLang="en-US"/>
+          </a:p>
+        </p:txBody>
+      </p:sp>
+      <p:sp>
+        <p:nvSpPr>
+          <p:cNvPr id="77" name="楕円 76">
+            <a:extLst>
+              <a:ext uri="{FF2B5EF4-FFF2-40B4-BE49-F238E27FC236}">
+                <a16:creationId xmlns:a16="http://schemas.microsoft.com/office/drawing/2014/main" id="{3BEAA7B5-C7ED-B9DD-A74B-42E624A5366E}"/>
+              </a:ext>
+            </a:extLst>
+          </p:cNvPr>
+          <p:cNvSpPr/>
+          <p:nvPr/>
+        </p:nvSpPr>
+        <p:spPr>
+          <a:xfrm>
+            <a:off x="11093313" y="5387187"/>
+            <a:ext cx="1141933" cy="402878"/>
+          </a:xfrm>
+          <a:prstGeom prst="ellipse">
+            <a:avLst/>
+          </a:prstGeom>
+          <a:noFill/>
+          <a:ln>
+            <a:solidFill>
+              <a:srgbClr val="FFFF00"/>
+            </a:solidFill>
+          </a:ln>
+        </p:spPr>
+        <p:style>
+          <a:lnRef idx="2">
+            <a:schemeClr val="accent1">
+              <a:shade val="15000"/>
+            </a:schemeClr>
+          </a:lnRef>
+          <a:fillRef idx="1">
+            <a:schemeClr val="accent1"/>
+          </a:fillRef>
+          <a:effectRef idx="0">
+            <a:schemeClr val="accent1"/>
+          </a:effectRef>
+          <a:fontRef idx="minor">
+            <a:schemeClr val="lt1"/>
+          </a:fontRef>
+        </p:style>
+        <p:txBody>
+          <a:bodyPr rtlCol="0" anchor="ctr"/>
+          <a:lstStyle/>
+          <a:p>
+            <a:pPr algn="ctr"/>
+            <a:endParaRPr kumimoji="1" lang="ja-JP" altLang="en-US"/>
+          </a:p>
+        </p:txBody>
+      </p:sp>
+      <p:sp>
+        <p:nvSpPr>
+          <p:cNvPr id="78" name="楕円 77">
+            <a:extLst>
+              <a:ext uri="{FF2B5EF4-FFF2-40B4-BE49-F238E27FC236}">
+                <a16:creationId xmlns:a16="http://schemas.microsoft.com/office/drawing/2014/main" id="{1AB1B017-FF4C-5359-5D4B-4A9E35165049}"/>
+              </a:ext>
+            </a:extLst>
+          </p:cNvPr>
+          <p:cNvSpPr/>
+          <p:nvPr/>
+        </p:nvSpPr>
+        <p:spPr>
+          <a:xfrm>
+            <a:off x="11245714" y="5470286"/>
+            <a:ext cx="850950" cy="236679"/>
+          </a:xfrm>
+          <a:prstGeom prst="ellipse">
+            <a:avLst/>
+          </a:prstGeom>
+          <a:noFill/>
+          <a:ln>
+            <a:solidFill>
+              <a:srgbClr val="FFFF00"/>
+            </a:solidFill>
+          </a:ln>
+        </p:spPr>
+        <p:style>
+          <a:lnRef idx="2">
+            <a:schemeClr val="accent1">
+              <a:shade val="15000"/>
+            </a:schemeClr>
+          </a:lnRef>
+          <a:fillRef idx="1">
+            <a:schemeClr val="accent1"/>
+          </a:fillRef>
+          <a:effectRef idx="0">
+            <a:schemeClr val="accent1"/>
+          </a:effectRef>
+          <a:fontRef idx="minor">
+            <a:schemeClr val="lt1"/>
+          </a:fontRef>
+        </p:style>
+        <p:txBody>
+          <a:bodyPr rtlCol="0" anchor="ctr"/>
+          <a:lstStyle/>
+          <a:p>
+            <a:pPr algn="ctr"/>
+            <a:endParaRPr kumimoji="1" lang="ja-JP" altLang="en-US"/>
+          </a:p>
+        </p:txBody>
+      </p:sp>
+      <p:sp>
+        <p:nvSpPr>
+          <p:cNvPr id="79" name="テキスト ボックス 78">
+            <a:extLst>
+              <a:ext uri="{FF2B5EF4-FFF2-40B4-BE49-F238E27FC236}">
+                <a16:creationId xmlns:a16="http://schemas.microsoft.com/office/drawing/2014/main" id="{17FE4BFB-6FF7-8C2B-6449-2326327B4E2F}"/>
+              </a:ext>
+            </a:extLst>
+          </p:cNvPr>
+          <p:cNvSpPr txBox="1"/>
+          <p:nvPr/>
+        </p:nvSpPr>
+        <p:spPr>
+          <a:xfrm>
+            <a:off x="9545619" y="2476514"/>
+            <a:ext cx="1261884" cy="307777"/>
+          </a:xfrm>
+          <a:prstGeom prst="rect">
+            <a:avLst/>
+          </a:prstGeom>
+          <a:noFill/>
+        </p:spPr>
+        <p:txBody>
+          <a:bodyPr wrap="none" rtlCol="0">
+            <a:spAutoFit/>
+          </a:bodyPr>
+          <a:lstStyle/>
+          <a:p>
+            <a:r>
+              <a:rPr kumimoji="1" lang="ja-JP" altLang="en-US" dirty="0"/>
+              <a:t>励磁コイル→</a:t>
+            </a:r>
+          </a:p>
+        </p:txBody>
+      </p:sp>
+      <p:sp>
+        <p:nvSpPr>
+          <p:cNvPr id="80" name="テキスト ボックス 79">
+            <a:extLst>
+              <a:ext uri="{FF2B5EF4-FFF2-40B4-BE49-F238E27FC236}">
+                <a16:creationId xmlns:a16="http://schemas.microsoft.com/office/drawing/2014/main" id="{62A361BA-CD92-5B8D-B57F-C70B2D21D242}"/>
+              </a:ext>
+            </a:extLst>
+          </p:cNvPr>
+          <p:cNvSpPr txBox="1"/>
+          <p:nvPr/>
+        </p:nvSpPr>
+        <p:spPr>
+          <a:xfrm>
+            <a:off x="9553557" y="3400872"/>
+            <a:ext cx="1261884" cy="307777"/>
+          </a:xfrm>
+          <a:prstGeom prst="rect">
+            <a:avLst/>
+          </a:prstGeom>
+          <a:noFill/>
+        </p:spPr>
+        <p:txBody>
+          <a:bodyPr wrap="none" rtlCol="0">
+            <a:spAutoFit/>
+          </a:bodyPr>
+          <a:lstStyle/>
+          <a:p>
+            <a:r>
+              <a:rPr kumimoji="1" lang="ja-JP" altLang="en-US" dirty="0"/>
+              <a:t>検出コイル→</a:t>
+            </a:r>
+          </a:p>
+        </p:txBody>
+      </p:sp>
+      <p:sp>
+        <p:nvSpPr>
+          <p:cNvPr id="81" name="テキスト ボックス 80">
+            <a:extLst>
+              <a:ext uri="{FF2B5EF4-FFF2-40B4-BE49-F238E27FC236}">
+                <a16:creationId xmlns:a16="http://schemas.microsoft.com/office/drawing/2014/main" id="{44127FF7-C09D-A306-74B8-2803C59FEAEB}"/>
+              </a:ext>
+            </a:extLst>
+          </p:cNvPr>
+          <p:cNvSpPr txBox="1"/>
+          <p:nvPr/>
+        </p:nvSpPr>
+        <p:spPr>
+          <a:xfrm>
+            <a:off x="8469418" y="5482288"/>
+            <a:ext cx="723275" cy="307777"/>
+          </a:xfrm>
+          <a:prstGeom prst="rect">
+            <a:avLst/>
+          </a:prstGeom>
+          <a:noFill/>
+        </p:spPr>
+        <p:txBody>
+          <a:bodyPr wrap="none" rtlCol="0">
+            <a:spAutoFit/>
+          </a:bodyPr>
+          <a:lstStyle/>
+          <a:p>
+            <a:r>
+              <a:rPr kumimoji="1" lang="ja-JP" altLang="en-US" dirty="0"/>
+              <a:t>金属→</a:t>
+            </a:r>
+          </a:p>
+        </p:txBody>
+      </p:sp>
+      <p:sp>
+        <p:nvSpPr>
+          <p:cNvPr id="82" name="テキスト ボックス 81">
+            <a:extLst>
+              <a:ext uri="{FF2B5EF4-FFF2-40B4-BE49-F238E27FC236}">
+                <a16:creationId xmlns:a16="http://schemas.microsoft.com/office/drawing/2014/main" id="{7132DF51-F713-5437-E3FC-A1E753C4438B}"/>
+              </a:ext>
+            </a:extLst>
+          </p:cNvPr>
+          <p:cNvSpPr txBox="1"/>
+          <p:nvPr/>
+        </p:nvSpPr>
+        <p:spPr>
+          <a:xfrm>
+            <a:off x="9836529" y="5447357"/>
+            <a:ext cx="902811" cy="307777"/>
+          </a:xfrm>
+          <a:prstGeom prst="rect">
+            <a:avLst/>
+          </a:prstGeom>
+          <a:noFill/>
+        </p:spPr>
+        <p:txBody>
+          <a:bodyPr wrap="none" rtlCol="0">
+            <a:spAutoFit/>
+          </a:bodyPr>
+          <a:lstStyle/>
+          <a:p>
+            <a:r>
+              <a:rPr kumimoji="1" lang="ja-JP" altLang="en-US" dirty="0"/>
+              <a:t>渦電流→</a:t>
+            </a:r>
+          </a:p>
+        </p:txBody>
+      </p:sp>
+      <p:sp>
+        <p:nvSpPr>
+          <p:cNvPr id="83" name="テキスト ボックス 82">
+            <a:extLst>
+              <a:ext uri="{FF2B5EF4-FFF2-40B4-BE49-F238E27FC236}">
+                <a16:creationId xmlns:a16="http://schemas.microsoft.com/office/drawing/2014/main" id="{090ACB2E-C065-1CC0-4DB1-0651F62D7DA8}"/>
+              </a:ext>
+            </a:extLst>
+          </p:cNvPr>
+          <p:cNvSpPr txBox="1"/>
+          <p:nvPr/>
+        </p:nvSpPr>
+        <p:spPr>
+          <a:xfrm>
+            <a:off x="8623289" y="4405563"/>
+            <a:ext cx="2698175" cy="307777"/>
+          </a:xfrm>
+          <a:prstGeom prst="rect">
+            <a:avLst/>
+          </a:prstGeom>
+          <a:noFill/>
+        </p:spPr>
+        <p:txBody>
+          <a:bodyPr wrap="none" rtlCol="0">
+            <a:spAutoFit/>
+          </a:bodyPr>
+          <a:lstStyle/>
+          <a:p>
+            <a:r>
+              <a:rPr kumimoji="1" lang="ja-JP" altLang="en-US" dirty="0"/>
+              <a:t>渦電流から発生した二次磁界→</a:t>
+            </a:r>
+          </a:p>
+        </p:txBody>
+      </p:sp>
+      <p:sp>
+        <p:nvSpPr>
+          <p:cNvPr id="84" name="楕円 83">
+            <a:extLst>
+              <a:ext uri="{FF2B5EF4-FFF2-40B4-BE49-F238E27FC236}">
+                <a16:creationId xmlns:a16="http://schemas.microsoft.com/office/drawing/2014/main" id="{79F0FAD0-E239-17C0-4E7C-0B6CE7986071}"/>
+              </a:ext>
+            </a:extLst>
+          </p:cNvPr>
+          <p:cNvSpPr/>
+          <p:nvPr/>
+        </p:nvSpPr>
+        <p:spPr>
+          <a:xfrm>
+            <a:off x="4493654" y="551755"/>
+            <a:ext cx="659666" cy="623205"/>
+          </a:xfrm>
+          <a:prstGeom prst="ellipse">
+            <a:avLst/>
+          </a:prstGeom>
+          <a:noFill/>
+        </p:spPr>
+        <p:style>
+          <a:lnRef idx="2">
+            <a:schemeClr val="accent1">
+              <a:shade val="15000"/>
+            </a:schemeClr>
+          </a:lnRef>
+          <a:fillRef idx="1">
+            <a:schemeClr val="accent1"/>
+          </a:fillRef>
+          <a:effectRef idx="0">
+            <a:schemeClr val="accent1"/>
+          </a:effectRef>
+          <a:fontRef idx="minor">
+            <a:schemeClr val="lt1"/>
+          </a:fontRef>
+        </p:style>
+        <p:txBody>
+          <a:bodyPr rtlCol="0" anchor="ctr"/>
+          <a:lstStyle/>
+          <a:p>
+            <a:pPr algn="ctr"/>
+            <a:r>
+              <a:rPr kumimoji="1" lang="en-US" altLang="ja-JP" sz="3600" dirty="0">
+                <a:solidFill>
+                  <a:schemeClr val="tx1"/>
+                </a:solidFill>
+              </a:rPr>
+              <a:t>V</a:t>
+            </a:r>
+            <a:endParaRPr kumimoji="1" lang="ja-JP" altLang="en-US" sz="3600" dirty="0">
+              <a:solidFill>
+                <a:schemeClr val="tx1"/>
+              </a:solidFill>
+            </a:endParaRPr>
+          </a:p>
+        </p:txBody>
+      </p:sp>
+      <p:cxnSp>
+        <p:nvCxnSpPr>
+          <p:cNvPr id="86" name="コネクタ: カギ線 85">
+            <a:extLst>
+              <a:ext uri="{FF2B5EF4-FFF2-40B4-BE49-F238E27FC236}">
+                <a16:creationId xmlns:a16="http://schemas.microsoft.com/office/drawing/2014/main" id="{60F2A504-E654-E0C6-511A-CA9E74C66FC1}"/>
+              </a:ext>
+            </a:extLst>
+          </p:cNvPr>
+          <p:cNvCxnSpPr>
+            <a:stCxn id="18" idx="2"/>
+            <a:endCxn id="84" idx="2"/>
+          </p:cNvCxnSpPr>
+          <p:nvPr/>
+        </p:nvCxnSpPr>
+        <p:spPr>
+          <a:xfrm rot="10800000" flipH="1">
+            <a:off x="4042606" y="863359"/>
+            <a:ext cx="451047" cy="2425911"/>
+          </a:xfrm>
+          <a:prstGeom prst="bentConnector3">
+            <a:avLst>
+              <a:gd name="adj1" fmla="val -311333"/>
+            </a:avLst>
+          </a:prstGeom>
+          <a:ln w="25400">
+            <a:solidFill>
+              <a:schemeClr val="tx1"/>
+            </a:solidFill>
+          </a:ln>
+        </p:spPr>
+        <p:style>
+          <a:lnRef idx="1">
+            <a:schemeClr val="accent1"/>
+          </a:lnRef>
+          <a:fillRef idx="0">
+            <a:schemeClr val="accent1"/>
+          </a:fillRef>
+          <a:effectRef idx="0">
+            <a:schemeClr val="accent1"/>
+          </a:effectRef>
+          <a:fontRef idx="minor">
+            <a:schemeClr val="tx1"/>
+          </a:fontRef>
+        </p:style>
+      </p:cxnSp>
+      <p:cxnSp>
+        <p:nvCxnSpPr>
+          <p:cNvPr id="89" name="コネクタ: カギ線 88">
+            <a:extLst>
+              <a:ext uri="{FF2B5EF4-FFF2-40B4-BE49-F238E27FC236}">
+                <a16:creationId xmlns:a16="http://schemas.microsoft.com/office/drawing/2014/main" id="{2671C9E1-B001-7E6A-D77C-678B53E9E2B5}"/>
+              </a:ext>
+            </a:extLst>
+          </p:cNvPr>
+          <p:cNvCxnSpPr>
+            <a:stCxn id="84" idx="6"/>
+            <a:endCxn id="18" idx="4"/>
+          </p:cNvCxnSpPr>
+          <p:nvPr/>
+        </p:nvCxnSpPr>
+        <p:spPr>
+          <a:xfrm>
+            <a:off x="5153320" y="863358"/>
+            <a:ext cx="451050" cy="2425911"/>
+          </a:xfrm>
+          <a:prstGeom prst="bentConnector3">
+            <a:avLst>
+              <a:gd name="adj1" fmla="val 420985"/>
+            </a:avLst>
+          </a:prstGeom>
+          <a:ln w="25400">
+            <a:solidFill>
+              <a:schemeClr val="tx1"/>
+            </a:solidFill>
+          </a:ln>
+        </p:spPr>
+        <p:style>
+          <a:lnRef idx="1">
+            <a:schemeClr val="accent1"/>
+          </a:lnRef>
+          <a:fillRef idx="0">
+            <a:schemeClr val="accent1"/>
+          </a:fillRef>
+          <a:effectRef idx="0">
+            <a:schemeClr val="accent1"/>
+          </a:effectRef>
+          <a:fontRef idx="minor">
+            <a:schemeClr val="tx1"/>
+          </a:fontRef>
+        </p:style>
+      </p:cxnSp>
+      <p:sp>
+        <p:nvSpPr>
+          <p:cNvPr id="91" name="楕円 90">
+            <a:extLst>
+              <a:ext uri="{FF2B5EF4-FFF2-40B4-BE49-F238E27FC236}">
+                <a16:creationId xmlns:a16="http://schemas.microsoft.com/office/drawing/2014/main" id="{0FADB7EF-60BD-3AB7-EB5F-B2462A8AC548}"/>
+              </a:ext>
+            </a:extLst>
+          </p:cNvPr>
+          <p:cNvSpPr/>
+          <p:nvPr/>
+        </p:nvSpPr>
+        <p:spPr>
+          <a:xfrm>
+            <a:off x="11289298" y="554828"/>
+            <a:ext cx="659666" cy="623205"/>
+          </a:xfrm>
+          <a:prstGeom prst="ellipse">
+            <a:avLst/>
+          </a:prstGeom>
+          <a:noFill/>
+          <a:ln>
+            <a:solidFill>
+              <a:srgbClr val="FF0000"/>
+            </a:solidFill>
+          </a:ln>
+        </p:spPr>
+        <p:style>
+          <a:lnRef idx="2">
+            <a:schemeClr val="accent1">
+              <a:shade val="15000"/>
+            </a:schemeClr>
+          </a:lnRef>
+          <a:fillRef idx="1">
+            <a:schemeClr val="accent1"/>
+          </a:fillRef>
+          <a:effectRef idx="0">
+            <a:schemeClr val="accent1"/>
+          </a:effectRef>
+          <a:fontRef idx="minor">
+            <a:schemeClr val="lt1"/>
+          </a:fontRef>
+        </p:style>
+        <p:txBody>
+          <a:bodyPr rtlCol="0" anchor="ctr"/>
+          <a:lstStyle/>
+          <a:p>
+            <a:pPr algn="ctr"/>
+            <a:r>
+              <a:rPr kumimoji="1" lang="en-US" altLang="ja-JP" sz="3600" dirty="0">
+                <a:solidFill>
+                  <a:srgbClr val="FF0000"/>
+                </a:solidFill>
+              </a:rPr>
+              <a:t>V</a:t>
+            </a:r>
+            <a:endParaRPr kumimoji="1" lang="ja-JP" altLang="en-US" sz="3600" dirty="0">
+              <a:solidFill>
+                <a:srgbClr val="FF0000"/>
+              </a:solidFill>
+            </a:endParaRPr>
+          </a:p>
+        </p:txBody>
+      </p:sp>
+      <p:cxnSp>
+        <p:nvCxnSpPr>
+          <p:cNvPr id="92" name="コネクタ: カギ線 91">
+            <a:extLst>
+              <a:ext uri="{FF2B5EF4-FFF2-40B4-BE49-F238E27FC236}">
+                <a16:creationId xmlns:a16="http://schemas.microsoft.com/office/drawing/2014/main" id="{AE18C6D3-C0A4-2794-BC13-7553C2BBC361}"/>
+              </a:ext>
+            </a:extLst>
+          </p:cNvPr>
+          <p:cNvCxnSpPr>
+            <a:endCxn id="91" idx="2"/>
+          </p:cNvCxnSpPr>
+          <p:nvPr/>
+        </p:nvCxnSpPr>
+        <p:spPr>
+          <a:xfrm rot="10800000" flipH="1">
+            <a:off x="10838250" y="866432"/>
+            <a:ext cx="451047" cy="2425911"/>
+          </a:xfrm>
+          <a:prstGeom prst="bentConnector3">
+            <a:avLst>
+              <a:gd name="adj1" fmla="val -311333"/>
+            </a:avLst>
+          </a:prstGeom>
+          <a:ln w="25400">
+            <a:solidFill>
+              <a:srgbClr val="FF0000"/>
+            </a:solidFill>
+          </a:ln>
+        </p:spPr>
+        <p:style>
+          <a:lnRef idx="1">
+            <a:schemeClr val="accent1"/>
+          </a:lnRef>
+          <a:fillRef idx="0">
+            <a:schemeClr val="accent1"/>
+          </a:fillRef>
+          <a:effectRef idx="0">
+            <a:schemeClr val="accent1"/>
+          </a:effectRef>
+          <a:fontRef idx="minor">
+            <a:schemeClr val="tx1"/>
+          </a:fontRef>
+        </p:style>
+      </p:cxnSp>
+      <p:cxnSp>
+        <p:nvCxnSpPr>
+          <p:cNvPr id="93" name="コネクタ: カギ線 92">
+            <a:extLst>
+              <a:ext uri="{FF2B5EF4-FFF2-40B4-BE49-F238E27FC236}">
+                <a16:creationId xmlns:a16="http://schemas.microsoft.com/office/drawing/2014/main" id="{D7E8DBC5-B88D-889B-1FAE-5A80BDD04225}"/>
+              </a:ext>
+            </a:extLst>
+          </p:cNvPr>
+          <p:cNvCxnSpPr>
+            <a:stCxn id="91" idx="6"/>
+          </p:cNvCxnSpPr>
+          <p:nvPr/>
+        </p:nvCxnSpPr>
+        <p:spPr>
+          <a:xfrm>
+            <a:off x="11948964" y="866431"/>
+            <a:ext cx="451050" cy="2425911"/>
+          </a:xfrm>
+          <a:prstGeom prst="bentConnector3">
+            <a:avLst>
+              <a:gd name="adj1" fmla="val 420985"/>
+            </a:avLst>
+          </a:prstGeom>
+          <a:ln w="25400">
+            <a:solidFill>
+              <a:srgbClr val="FF0000"/>
+            </a:solidFill>
+          </a:ln>
+        </p:spPr>
+        <p:style>
+          <a:lnRef idx="1">
+            <a:schemeClr val="accent1"/>
+          </a:lnRef>
+          <a:fillRef idx="0">
+            <a:schemeClr val="accent1"/>
+          </a:fillRef>
+          <a:effectRef idx="0">
+            <a:schemeClr val="accent1"/>
+          </a:effectRef>
+          <a:fontRef idx="minor">
+            <a:schemeClr val="tx1"/>
+          </a:fontRef>
+        </p:style>
+      </p:cxnSp>
+      <p:sp>
+        <p:nvSpPr>
+          <p:cNvPr id="94" name="円弧 93">
+            <a:extLst>
+              <a:ext uri="{FF2B5EF4-FFF2-40B4-BE49-F238E27FC236}">
+                <a16:creationId xmlns:a16="http://schemas.microsoft.com/office/drawing/2014/main" id="{94A8EF5D-F586-8022-C8DE-6019D2429D8F}"/>
+              </a:ext>
+            </a:extLst>
+          </p:cNvPr>
+          <p:cNvSpPr/>
+          <p:nvPr/>
+        </p:nvSpPr>
+        <p:spPr>
+          <a:xfrm rot="5400000" flipH="1">
+            <a:off x="6023801" y="4346375"/>
+            <a:ext cx="8569688" cy="2639341"/>
+          </a:xfrm>
+          <a:prstGeom prst="arc">
+            <a:avLst>
+              <a:gd name="adj1" fmla="val 16458379"/>
+              <a:gd name="adj2" fmla="val 20441669"/>
+            </a:avLst>
+          </a:prstGeom>
+          <a:noFill/>
+          <a:ln w="19050">
+            <a:solidFill>
+              <a:schemeClr val="tx1"/>
+            </a:solidFill>
+            <a:prstDash val="sysDash"/>
+            <a:tailEnd type="arrow"/>
+          </a:ln>
+        </p:spPr>
+        <p:style>
+          <a:lnRef idx="1">
+            <a:schemeClr val="accent1"/>
+          </a:lnRef>
+          <a:fillRef idx="0">
+            <a:schemeClr val="accent1"/>
+          </a:fillRef>
+          <a:effectRef idx="0">
+            <a:schemeClr val="accent1"/>
+          </a:effectRef>
+          <a:fontRef idx="minor">
+            <a:schemeClr val="tx1"/>
+          </a:fontRef>
+        </p:style>
+        <p:txBody>
+          <a:bodyPr rtlCol="0" anchor="ctr"/>
+          <a:lstStyle/>
+          <a:p>
+            <a:pPr algn="ctr"/>
+            <a:endParaRPr kumimoji="1" lang="ja-JP" altLang="en-US"/>
+          </a:p>
+        </p:txBody>
+      </p:sp>
+      <p:sp>
+        <p:nvSpPr>
+          <p:cNvPr id="95" name="円弧 94">
+            <a:extLst>
+              <a:ext uri="{FF2B5EF4-FFF2-40B4-BE49-F238E27FC236}">
+                <a16:creationId xmlns:a16="http://schemas.microsoft.com/office/drawing/2014/main" id="{72A4B06F-03B3-D7DB-C55B-6468445517CD}"/>
+              </a:ext>
+            </a:extLst>
+          </p:cNvPr>
+          <p:cNvSpPr/>
+          <p:nvPr/>
+        </p:nvSpPr>
+        <p:spPr>
+          <a:xfrm rot="5400000" flipH="1" flipV="1">
+            <a:off x="8672297" y="4346375"/>
+            <a:ext cx="8715574" cy="2639339"/>
+          </a:xfrm>
+          <a:prstGeom prst="arc">
+            <a:avLst>
+              <a:gd name="adj1" fmla="val 16458379"/>
+              <a:gd name="adj2" fmla="val 20420647"/>
+            </a:avLst>
+          </a:prstGeom>
+          <a:noFill/>
+          <a:ln w="19050">
+            <a:solidFill>
+              <a:schemeClr val="tx1"/>
+            </a:solidFill>
+            <a:prstDash val="sysDash"/>
+            <a:tailEnd type="arrow"/>
+          </a:ln>
+        </p:spPr>
+        <p:style>
+          <a:lnRef idx="1">
+            <a:schemeClr val="accent1"/>
+          </a:lnRef>
+          <a:fillRef idx="0">
+            <a:schemeClr val="accent1"/>
+          </a:fillRef>
+          <a:effectRef idx="0">
+            <a:schemeClr val="accent1"/>
+          </a:effectRef>
+          <a:fontRef idx="minor">
+            <a:schemeClr val="tx1"/>
+          </a:fontRef>
+        </p:style>
+        <p:txBody>
+          <a:bodyPr rtlCol="0" anchor="ctr"/>
+          <a:lstStyle/>
+          <a:p>
+            <a:pPr algn="ctr"/>
+            <a:endParaRPr kumimoji="1" lang="ja-JP" altLang="en-US"/>
+          </a:p>
+        </p:txBody>
+      </p:sp>
+      <p:sp>
+        <p:nvSpPr>
+          <p:cNvPr id="96" name="円弧 95">
+            <a:extLst>
+              <a:ext uri="{FF2B5EF4-FFF2-40B4-BE49-F238E27FC236}">
+                <a16:creationId xmlns:a16="http://schemas.microsoft.com/office/drawing/2014/main" id="{83EE198A-E81C-1130-C042-FC839FA4D2E2}"/>
+              </a:ext>
+            </a:extLst>
+          </p:cNvPr>
+          <p:cNvSpPr/>
+          <p:nvPr/>
+        </p:nvSpPr>
+        <p:spPr>
+          <a:xfrm rot="5400000" flipH="1" flipV="1">
+            <a:off x="9988645" y="4340127"/>
+            <a:ext cx="6196856" cy="2639339"/>
+          </a:xfrm>
+          <a:prstGeom prst="arc">
+            <a:avLst>
+              <a:gd name="adj1" fmla="val 16458379"/>
+              <a:gd name="adj2" fmla="val 20861527"/>
+            </a:avLst>
+          </a:prstGeom>
+          <a:noFill/>
+          <a:ln w="19050">
+            <a:solidFill>
+              <a:schemeClr val="tx1"/>
+            </a:solidFill>
+            <a:prstDash val="sysDash"/>
+            <a:tailEnd type="arrow"/>
+          </a:ln>
+        </p:spPr>
+        <p:style>
+          <a:lnRef idx="1">
+            <a:schemeClr val="accent1"/>
+          </a:lnRef>
+          <a:fillRef idx="0">
+            <a:schemeClr val="accent1"/>
+          </a:fillRef>
+          <a:effectRef idx="0">
+            <a:schemeClr val="accent1"/>
+          </a:effectRef>
+          <a:fontRef idx="minor">
+            <a:schemeClr val="tx1"/>
+          </a:fontRef>
+        </p:style>
+        <p:txBody>
+          <a:bodyPr rtlCol="0" anchor="ctr"/>
+          <a:lstStyle/>
+          <a:p>
+            <a:pPr algn="ctr"/>
+            <a:endParaRPr kumimoji="1" lang="ja-JP" altLang="en-US"/>
+          </a:p>
+        </p:txBody>
+      </p:sp>
+      <p:sp>
+        <p:nvSpPr>
+          <p:cNvPr id="97" name="円弧 96">
+            <a:extLst>
+              <a:ext uri="{FF2B5EF4-FFF2-40B4-BE49-F238E27FC236}">
+                <a16:creationId xmlns:a16="http://schemas.microsoft.com/office/drawing/2014/main" id="{9C449855-D6D1-9807-F152-B85B9E8C0EAF}"/>
+              </a:ext>
+            </a:extLst>
+          </p:cNvPr>
+          <p:cNvSpPr/>
+          <p:nvPr/>
+        </p:nvSpPr>
+        <p:spPr>
+          <a:xfrm rot="5400000" flipH="1" flipV="1">
+            <a:off x="10530247" y="4334527"/>
+            <a:ext cx="5278845" cy="2639339"/>
+          </a:xfrm>
+          <a:prstGeom prst="arc">
+            <a:avLst>
+              <a:gd name="adj1" fmla="val 16458379"/>
+              <a:gd name="adj2" fmla="val 21427619"/>
+            </a:avLst>
+          </a:prstGeom>
+          <a:noFill/>
+          <a:ln w="19050">
+            <a:solidFill>
+              <a:schemeClr val="tx1"/>
+            </a:solidFill>
+            <a:prstDash val="sysDash"/>
+            <a:tailEnd type="arrow"/>
+          </a:ln>
+        </p:spPr>
+        <p:style>
+          <a:lnRef idx="1">
+            <a:schemeClr val="accent1"/>
+          </a:lnRef>
+          <a:fillRef idx="0">
+            <a:schemeClr val="accent1"/>
+          </a:fillRef>
+          <a:effectRef idx="0">
+            <a:schemeClr val="accent1"/>
+          </a:effectRef>
+          <a:fontRef idx="minor">
+            <a:schemeClr val="tx1"/>
+          </a:fontRef>
+        </p:style>
+        <p:txBody>
+          <a:bodyPr rtlCol="0" anchor="ctr"/>
+          <a:lstStyle/>
+          <a:p>
+            <a:pPr algn="ctr"/>
+            <a:endParaRPr kumimoji="1" lang="ja-JP" altLang="en-US"/>
+          </a:p>
+        </p:txBody>
+      </p:sp>
+      <p:sp>
+        <p:nvSpPr>
+          <p:cNvPr id="98" name="円弧 97">
+            <a:extLst>
+              <a:ext uri="{FF2B5EF4-FFF2-40B4-BE49-F238E27FC236}">
+                <a16:creationId xmlns:a16="http://schemas.microsoft.com/office/drawing/2014/main" id="{292A39C8-3ED6-D4E3-F0C8-58B90D0E5D5C}"/>
+              </a:ext>
+            </a:extLst>
+          </p:cNvPr>
+          <p:cNvSpPr/>
+          <p:nvPr/>
+        </p:nvSpPr>
+        <p:spPr>
+          <a:xfrm rot="5400000" flipH="1">
+            <a:off x="7719847" y="4560756"/>
+            <a:ext cx="5278845" cy="2210575"/>
+          </a:xfrm>
+          <a:prstGeom prst="arc">
+            <a:avLst>
+              <a:gd name="adj1" fmla="val 16458379"/>
+              <a:gd name="adj2" fmla="val 21427619"/>
+            </a:avLst>
+          </a:prstGeom>
+          <a:noFill/>
+          <a:ln w="19050">
+            <a:solidFill>
+              <a:schemeClr val="tx1"/>
+            </a:solidFill>
+            <a:prstDash val="sysDash"/>
+            <a:tailEnd type="arrow"/>
+          </a:ln>
+        </p:spPr>
+        <p:style>
+          <a:lnRef idx="1">
+            <a:schemeClr val="accent1"/>
+          </a:lnRef>
+          <a:fillRef idx="0">
+            <a:schemeClr val="accent1"/>
+          </a:fillRef>
+          <a:effectRef idx="0">
+            <a:schemeClr val="accent1"/>
+          </a:effectRef>
+          <a:fontRef idx="minor">
+            <a:schemeClr val="tx1"/>
+          </a:fontRef>
+        </p:style>
+        <p:txBody>
+          <a:bodyPr rtlCol="0" anchor="ctr"/>
+          <a:lstStyle/>
+          <a:p>
+            <a:pPr algn="ctr"/>
+            <a:endParaRPr kumimoji="1" lang="ja-JP" altLang="en-US"/>
+          </a:p>
+        </p:txBody>
+      </p:sp>
+      <p:sp>
+        <p:nvSpPr>
+          <p:cNvPr id="100" name="円弧 99">
+            <a:extLst>
+              <a:ext uri="{FF2B5EF4-FFF2-40B4-BE49-F238E27FC236}">
+                <a16:creationId xmlns:a16="http://schemas.microsoft.com/office/drawing/2014/main" id="{F84F2D66-CE58-D07D-A805-10DCE51A2AC0}"/>
+              </a:ext>
+            </a:extLst>
+          </p:cNvPr>
+          <p:cNvSpPr/>
+          <p:nvPr/>
+        </p:nvSpPr>
+        <p:spPr>
+          <a:xfrm rot="5400000" flipH="1">
+            <a:off x="7270566" y="4478951"/>
+            <a:ext cx="6196856" cy="2374183"/>
+          </a:xfrm>
+          <a:prstGeom prst="arc">
+            <a:avLst>
+              <a:gd name="adj1" fmla="val 16458379"/>
+              <a:gd name="adj2" fmla="val 20861527"/>
+            </a:avLst>
+          </a:prstGeom>
+          <a:noFill/>
+          <a:ln w="19050">
+            <a:solidFill>
+              <a:schemeClr val="tx1"/>
+            </a:solidFill>
+            <a:prstDash val="sysDash"/>
+            <a:tailEnd type="arrow"/>
+          </a:ln>
+        </p:spPr>
+        <p:style>
+          <a:lnRef idx="1">
+            <a:schemeClr val="accent1"/>
+          </a:lnRef>
+          <a:fillRef idx="0">
+            <a:schemeClr val="accent1"/>
+          </a:fillRef>
+          <a:effectRef idx="0">
+            <a:schemeClr val="accent1"/>
+          </a:effectRef>
+          <a:fontRef idx="minor">
+            <a:schemeClr val="tx1"/>
+          </a:fontRef>
+        </p:style>
+        <p:txBody>
+          <a:bodyPr rtlCol="0" anchor="ctr"/>
+          <a:lstStyle/>
+          <a:p>
+            <a:pPr algn="ctr"/>
+            <a:endParaRPr kumimoji="1" lang="ja-JP" altLang="en-US"/>
+          </a:p>
+        </p:txBody>
+      </p:sp>
+      <p:sp>
+        <p:nvSpPr>
+          <p:cNvPr id="101" name="矢印: 右 100">
+            <a:extLst>
+              <a:ext uri="{FF2B5EF4-FFF2-40B4-BE49-F238E27FC236}">
+                <a16:creationId xmlns:a16="http://schemas.microsoft.com/office/drawing/2014/main" id="{2E924EFC-0397-2D96-C1A2-2CE2299E7078}"/>
+              </a:ext>
+            </a:extLst>
+          </p:cNvPr>
+          <p:cNvSpPr/>
+          <p:nvPr/>
+        </p:nvSpPr>
+        <p:spPr>
+          <a:xfrm>
+            <a:off x="7650690" y="3329686"/>
+            <a:ext cx="1180365" cy="574295"/>
+          </a:xfrm>
+          <a:prstGeom prst="rightArrow">
+            <a:avLst/>
+          </a:prstGeom>
+          <a:solidFill>
+            <a:schemeClr val="tx1"/>
+          </a:solidFill>
+        </p:spPr>
+        <p:style>
+          <a:lnRef idx="2">
+            <a:schemeClr val="accent1">
+              <a:shade val="15000"/>
+            </a:schemeClr>
+          </a:lnRef>
+          <a:fillRef idx="1">
+            <a:schemeClr val="accent1"/>
+          </a:fillRef>
+          <a:effectRef idx="0">
+            <a:schemeClr val="accent1"/>
+          </a:effectRef>
+          <a:fontRef idx="minor">
+            <a:schemeClr val="lt1"/>
+          </a:fontRef>
+        </p:style>
+        <p:txBody>
+          <a:bodyPr rtlCol="0" anchor="ctr"/>
+          <a:lstStyle/>
+          <a:p>
+            <a:pPr algn="ctr"/>
+            <a:endParaRPr kumimoji="1" lang="ja-JP" altLang="en-US"/>
+          </a:p>
+        </p:txBody>
+      </p:sp>
+    </p:spTree>
+    <p:extLst>
+      <p:ext uri="{BB962C8B-B14F-4D97-AF65-F5344CB8AC3E}">
+        <p14:creationId xmlns:p14="http://schemas.microsoft.com/office/powerpoint/2010/main" val="3669729014"/>
+      </p:ext>
+    </p:extLst>
+  </p:cSld>
+  <p:clrMapOvr>
+    <a:masterClrMapping/>
+  </p:clrMapOvr>
+</p:sld>
+</file>
+
 <file path=ppt/theme/theme1.xml><?xml version="1.0" encoding="utf-8"?>
 <a:theme xmlns:a="http://schemas.openxmlformats.org/drawingml/2006/main" name="1_blank">
   <a:themeElements>
@@ -7743,6 +11437,15 @@
 </file>
 
 <file path=customXml/item1.xml><?xml version="1.0" encoding="utf-8"?>
+<?mso-contentType ?>
+<FormTemplates xmlns="http://schemas.microsoft.com/sharepoint/v3/contenttype/forms">
+  <Display>DocumentLibraryForm</Display>
+  <Edit>DocumentLibraryForm</Edit>
+  <New>DocumentLibraryForm</New>
+</FormTemplates>
+</file>
+
+<file path=customXml/item2.xml><?xml version="1.0" encoding="utf-8"?>
 <ct:contentTypeSchema xmlns:ct="http://schemas.microsoft.com/office/2006/metadata/contentType" xmlns:ma="http://schemas.microsoft.com/office/2006/metadata/properties/metaAttributes" ct:_="" ma:_="" ma:contentTypeName="ドキュメント" ma:contentTypeID="0x0101004144450F3F33E8408330B89C726DDE2A" ma:contentTypeVersion="11" ma:contentTypeDescription="新しいドキュメントを作成します。" ma:contentTypeScope="" ma:versionID="9c58ff35178bf34284e6fd6aa2204bce">
   <xsd:schema xmlns:xsd="http://www.w3.org/2001/XMLSchema" xmlns:xs="http://www.w3.org/2001/XMLSchema" xmlns:p="http://schemas.microsoft.com/office/2006/metadata/properties" xmlns:ns2="3dbfb0cf-ada2-4966-9842-78e9c57467ee" xmlns:ns3="46c0a021-bb35-4d3d-8550-6038dbfbec1b" targetNamespace="http://schemas.microsoft.com/office/2006/metadata/properties" ma:root="true" ma:fieldsID="c40ee04c6bcef6283a2a18429e2e2b0b" ns2:_="" ns3:_="">
     <xsd:import namespace="3dbfb0cf-ada2-4966-9842-78e9c57467ee"/>
@@ -7937,15 +11640,6 @@
 </ct:contentTypeSchema>
 </file>
 
-<file path=customXml/item2.xml><?xml version="1.0" encoding="utf-8"?>
-<?mso-contentType ?>
-<FormTemplates xmlns="http://schemas.microsoft.com/sharepoint/v3/contenttype/forms">
-  <Display>DocumentLibraryForm</Display>
-  <Edit>DocumentLibraryForm</Edit>
-  <New>DocumentLibraryForm</New>
-</FormTemplates>
-</file>
-
 <file path=customXml/item3.xml><?xml version="1.0" encoding="utf-8"?>
 <p:properties xmlns:p="http://schemas.microsoft.com/office/2006/metadata/properties" xmlns:xsi="http://www.w3.org/2001/XMLSchema-instance" xmlns:pc="http://schemas.microsoft.com/office/infopath/2007/PartnerControls">
   <documentManagement>
@@ -7958,6 +11652,14 @@
 </file>
 
 <file path=customXml/itemProps1.xml><?xml version="1.0" encoding="utf-8"?>
+<ds:datastoreItem xmlns:ds="http://schemas.openxmlformats.org/officeDocument/2006/customXml" ds:itemID="{7969BDF6-02FD-4DD4-80C5-AE01D9C0B198}">
+  <ds:schemaRefs>
+    <ds:schemaRef ds:uri="http://schemas.microsoft.com/sharepoint/v3/contenttype/forms"/>
+  </ds:schemaRefs>
+</ds:datastoreItem>
+</file>
+
+<file path=customXml/itemProps2.xml><?xml version="1.0" encoding="utf-8"?>
 <ds:datastoreItem xmlns:ds="http://schemas.openxmlformats.org/officeDocument/2006/customXml" ds:itemID="{DFC9F469-61D4-42A4-9782-D2F9073712EC}">
   <ds:schemaRefs>
     <ds:schemaRef ds:uri="3dbfb0cf-ada2-4966-9842-78e9c57467ee"/>
@@ -7972,14 +11674,6 @@
     <ds:schemaRef ds:uri="http://schemas.microsoft.com/office/infopath/2007/PartnerControls"/>
     <ds:schemaRef ds:uri="http://schemas.openxmlformats.org/package/2006/metadata/core-properties"/>
     <ds:schemaRef ds:uri="http://www.w3.org/2001/XMLSchema"/>
-  </ds:schemaRefs>
-</ds:datastoreItem>
-</file>
-
-<file path=customXml/itemProps2.xml><?xml version="1.0" encoding="utf-8"?>
-<ds:datastoreItem xmlns:ds="http://schemas.openxmlformats.org/officeDocument/2006/customXml" ds:itemID="{7969BDF6-02FD-4DD4-80C5-AE01D9C0B198}">
-  <ds:schemaRefs>
-    <ds:schemaRef ds:uri="http://schemas.microsoft.com/sharepoint/v3/contenttype/forms"/>
   </ds:schemaRefs>
 </ds:datastoreItem>
 </file>

--- a/システム構成図.pptx
+++ b/システム構成図.pptx
@@ -299,7 +299,7 @@
       </p15:notesGuideLst>
     </p:ext>
     <p:ext uri="GoogleSlidesCustomDataVersion2">
-      <go:slidesCustomData xmlns="" xmlns:go="http://customooxmlschemas.google.com/" xmlns:ahyp="http://schemas.microsoft.com/office/drawing/2018/hyperlinkcolor" xmlns:p15="http://schemas.microsoft.com/office/powerpoint/2012/main" xmlns:p14="http://schemas.microsoft.com/office/powerpoint/2010/main" xmlns:com="http://schemas.openxmlformats.org/drawingml/2006/compatibility" xmlns:pvml="urn:schemas-microsoft-com:office:powerpoint" xmlns:v="urn:schemas-microsoft-com:vml" xmlns:o="urn:schemas-microsoft-com:office:office" xmlns:dgm="http://schemas.openxmlformats.org/drawingml/2006/diagram" xmlns:c="http://schemas.openxmlformats.org/drawingml/2006/chart" xmlns:mv="urn:schemas-microsoft-com:mac:vml" xmlns:mc="http://schemas.openxmlformats.org/markup-compatibility/2006" r:id="rId42" roundtripDataSignature="AMtx7mjjLadHqMIiphYAwzpEX8auZJ6O0g=="/>
+      <go:slidesCustomData xmlns:mc="http://schemas.openxmlformats.org/markup-compatibility/2006" xmlns:mv="urn:schemas-microsoft-com:mac:vml" xmlns:c="http://schemas.openxmlformats.org/drawingml/2006/chart" xmlns:dgm="http://schemas.openxmlformats.org/drawingml/2006/diagram" xmlns:o="urn:schemas-microsoft-com:office:office" xmlns:v="urn:schemas-microsoft-com:vml" xmlns:pvml="urn:schemas-microsoft-com:office:powerpoint" xmlns:com="http://schemas.openxmlformats.org/drawingml/2006/compatibility" xmlns:p14="http://schemas.microsoft.com/office/powerpoint/2010/main" xmlns:p15="http://schemas.microsoft.com/office/powerpoint/2012/main" xmlns:ahyp="http://schemas.microsoft.com/office/drawing/2018/hyperlinkcolor" xmlns:go="http://customooxmlschemas.google.com/" xmlns="" r:id="rId42" roundtripDataSignature="AMtx7mjjLadHqMIiphYAwzpEX8auZJ6O0g=="/>
     </p:ext>
   </p:extLst>
 </p:presentation>
@@ -2439,7 +2439,7 @@
             <a:fld id="{1D8BD707-D9CF-40AE-B4C6-C98DA3205C09}" type="datetimeFigureOut">
               <a:rPr lang="en-US" smtClean="0"/>
               <a:pPr/>
-              <a:t>1/19/2026</a:t>
+              <a:t>1/20/26</a:t>
             </a:fld>
             <a:endParaRPr lang="en-US"/>
           </a:p>
@@ -8694,8 +8694,8 @@
         </p:nvSpPr>
         <p:spPr>
           <a:xfrm>
-            <a:off x="2722920" y="2476514"/>
-            <a:ext cx="1261884" cy="307777"/>
+            <a:off x="2418456" y="2536051"/>
+            <a:ext cx="1723549" cy="400110"/>
           </a:xfrm>
           <a:prstGeom prst="rect">
             <a:avLst/>
@@ -8709,7 +8709,7 @@
           <a:lstStyle/>
           <a:p>
             <a:r>
-              <a:rPr kumimoji="1" lang="ja-JP" altLang="en-US" dirty="0"/>
+              <a:rPr kumimoji="1" lang="ja-JP" altLang="en-US" sz="2000" dirty="0"/>
               <a:t>励磁コイル→</a:t>
             </a:r>
           </a:p>
@@ -8729,8 +8729,8 @@
         </p:nvSpPr>
         <p:spPr>
           <a:xfrm>
-            <a:off x="2730858" y="3400872"/>
-            <a:ext cx="1261884" cy="307777"/>
+            <a:off x="2330665" y="3417258"/>
+            <a:ext cx="1723549" cy="400110"/>
           </a:xfrm>
           <a:prstGeom prst="rect">
             <a:avLst/>
@@ -8744,7 +8744,7 @@
           <a:lstStyle/>
           <a:p>
             <a:r>
-              <a:rPr kumimoji="1" lang="ja-JP" altLang="en-US" dirty="0"/>
+              <a:rPr kumimoji="1" lang="ja-JP" altLang="en-US" sz="2000" dirty="0"/>
               <a:t>検出コイル→</a:t>
             </a:r>
           </a:p>
@@ -8764,8 +8764,8 @@
         </p:nvSpPr>
         <p:spPr>
           <a:xfrm>
-            <a:off x="1646719" y="5482288"/>
-            <a:ext cx="723275" cy="307777"/>
+            <a:off x="1205608" y="5470286"/>
+            <a:ext cx="954107" cy="400110"/>
           </a:xfrm>
           <a:prstGeom prst="rect">
             <a:avLst/>
@@ -8779,7 +8779,7 @@
           <a:lstStyle/>
           <a:p>
             <a:r>
-              <a:rPr kumimoji="1" lang="ja-JP" altLang="en-US" dirty="0"/>
+              <a:rPr kumimoji="1" lang="ja-JP" altLang="en-US" sz="2000" dirty="0"/>
               <a:t>金属→</a:t>
             </a:r>
           </a:p>
@@ -8799,8 +8799,8 @@
         </p:nvSpPr>
         <p:spPr>
           <a:xfrm>
-            <a:off x="3013830" y="5447357"/>
-            <a:ext cx="902811" cy="307777"/>
+            <a:off x="2689363" y="5418817"/>
+            <a:ext cx="1210588" cy="400110"/>
           </a:xfrm>
           <a:prstGeom prst="rect">
             <a:avLst/>
@@ -8814,7 +8814,7 @@
           <a:lstStyle/>
           <a:p>
             <a:r>
-              <a:rPr kumimoji="1" lang="ja-JP" altLang="en-US" dirty="0"/>
+              <a:rPr kumimoji="1" lang="ja-JP" altLang="en-US" sz="2000" dirty="0"/>
               <a:t>渦電流→</a:t>
             </a:r>
           </a:p>
@@ -8834,8 +8834,8 @@
         </p:nvSpPr>
         <p:spPr>
           <a:xfrm>
-            <a:off x="835770" y="4269498"/>
-            <a:ext cx="3057247" cy="307777"/>
+            <a:off x="-461514" y="4167305"/>
+            <a:ext cx="4288353" cy="400110"/>
           </a:xfrm>
           <a:prstGeom prst="rect">
             <a:avLst/>
@@ -8849,7 +8849,7 @@
           <a:lstStyle/>
           <a:p>
             <a:r>
-              <a:rPr kumimoji="1" lang="ja-JP" altLang="en-US" dirty="0"/>
+              <a:rPr kumimoji="1" lang="ja-JP" altLang="en-US" sz="2000" dirty="0"/>
               <a:t>励磁コイルから発生した一次磁界→</a:t>
             </a:r>
           </a:p>
@@ -10016,8 +10016,8 @@
         </p:nvSpPr>
         <p:spPr>
           <a:xfrm>
-            <a:off x="9545619" y="2476514"/>
-            <a:ext cx="1261884" cy="307777"/>
+            <a:off x="9267353" y="2475886"/>
+            <a:ext cx="1723549" cy="400110"/>
           </a:xfrm>
           <a:prstGeom prst="rect">
             <a:avLst/>
@@ -10031,7 +10031,7 @@
           <a:lstStyle/>
           <a:p>
             <a:r>
-              <a:rPr kumimoji="1" lang="ja-JP" altLang="en-US" dirty="0"/>
+              <a:rPr kumimoji="1" lang="ja-JP" altLang="en-US" sz="2000" dirty="0"/>
               <a:t>励磁コイル→</a:t>
             </a:r>
           </a:p>
@@ -10051,8 +10051,8 @@
         </p:nvSpPr>
         <p:spPr>
           <a:xfrm>
-            <a:off x="9553557" y="3400872"/>
-            <a:ext cx="1261884" cy="307777"/>
+            <a:off x="9168843" y="3430421"/>
+            <a:ext cx="1723549" cy="400110"/>
           </a:xfrm>
           <a:prstGeom prst="rect">
             <a:avLst/>
@@ -10066,7 +10066,7 @@
           <a:lstStyle/>
           <a:p>
             <a:r>
-              <a:rPr kumimoji="1" lang="ja-JP" altLang="en-US" dirty="0"/>
+              <a:rPr kumimoji="1" lang="ja-JP" altLang="en-US" sz="2000" dirty="0"/>
               <a:t>検出コイル→</a:t>
             </a:r>
           </a:p>
@@ -10086,8 +10086,8 @@
         </p:nvSpPr>
         <p:spPr>
           <a:xfrm>
-            <a:off x="8469418" y="5482288"/>
-            <a:ext cx="723275" cy="307777"/>
+            <a:off x="8217279" y="5430109"/>
+            <a:ext cx="954107" cy="400110"/>
           </a:xfrm>
           <a:prstGeom prst="rect">
             <a:avLst/>
@@ -10101,7 +10101,7 @@
           <a:lstStyle/>
           <a:p>
             <a:r>
-              <a:rPr kumimoji="1" lang="ja-JP" altLang="en-US" dirty="0"/>
+              <a:rPr kumimoji="1" lang="ja-JP" altLang="en-US" sz="2000" dirty="0"/>
               <a:t>金属→</a:t>
             </a:r>
           </a:p>
@@ -10121,8 +10121,8 @@
         </p:nvSpPr>
         <p:spPr>
           <a:xfrm>
-            <a:off x="9836529" y="5447357"/>
-            <a:ext cx="902811" cy="307777"/>
+            <a:off x="9408967" y="5371937"/>
+            <a:ext cx="1210588" cy="400110"/>
           </a:xfrm>
           <a:prstGeom prst="rect">
             <a:avLst/>
@@ -10136,7 +10136,7 @@
           <a:lstStyle/>
           <a:p>
             <a:r>
-              <a:rPr kumimoji="1" lang="ja-JP" altLang="en-US" dirty="0"/>
+              <a:rPr kumimoji="1" lang="ja-JP" altLang="en-US" sz="2000" dirty="0"/>
               <a:t>渦電流→</a:t>
             </a:r>
           </a:p>
@@ -10156,8 +10156,8 @@
         </p:nvSpPr>
         <p:spPr>
           <a:xfrm>
-            <a:off x="8623289" y="4405563"/>
-            <a:ext cx="2698175" cy="307777"/>
+            <a:off x="12204029" y="4345398"/>
+            <a:ext cx="3775393" cy="400110"/>
           </a:xfrm>
           <a:prstGeom prst="rect">
             <a:avLst/>
@@ -10171,9 +10171,18 @@
           <a:lstStyle/>
           <a:p>
             <a:r>
-              <a:rPr kumimoji="1" lang="ja-JP" altLang="en-US" dirty="0"/>
-              <a:t>渦電流から発生した二次磁界→</a:t>
+              <a:rPr kumimoji="1" lang="ja-JP" altLang="en-US" sz="2000"/>
+              <a:t>←渦</a:t>
             </a:r>
+            <a:r>
+              <a:rPr kumimoji="1" lang="ja-JP" altLang="en-US" sz="2000" dirty="0"/>
+              <a:t>電流から発生した</a:t>
+            </a:r>
+            <a:r>
+              <a:rPr kumimoji="1" lang="ja-JP" altLang="en-US" sz="2000"/>
+              <a:t>二次磁界</a:t>
+            </a:r>
+            <a:endParaRPr kumimoji="1" lang="ja-JP" altLang="en-US" sz="2000" dirty="0"/>
           </a:p>
         </p:txBody>
       </p:sp>
@@ -10258,7 +10267,7 @@
           </a:xfrm>
           <a:prstGeom prst="bentConnector3">
             <a:avLst>
-              <a:gd name="adj1" fmla="val -311333"/>
+              <a:gd name="adj1" fmla="val -366920"/>
             </a:avLst>
           </a:prstGeom>
           <a:ln w="25400">
@@ -10413,7 +10422,7 @@
           </a:xfrm>
           <a:prstGeom prst="bentConnector3">
             <a:avLst>
-              <a:gd name="adj1" fmla="val -311333"/>
+              <a:gd name="adj1" fmla="val -389809"/>
             </a:avLst>
           </a:prstGeom>
           <a:ln w="25400">
@@ -11437,15 +11446,6 @@
 </file>
 
 <file path=customXml/item1.xml><?xml version="1.0" encoding="utf-8"?>
-<?mso-contentType ?>
-<FormTemplates xmlns="http://schemas.microsoft.com/sharepoint/v3/contenttype/forms">
-  <Display>DocumentLibraryForm</Display>
-  <Edit>DocumentLibraryForm</Edit>
-  <New>DocumentLibraryForm</New>
-</FormTemplates>
-</file>
-
-<file path=customXml/item2.xml><?xml version="1.0" encoding="utf-8"?>
 <ct:contentTypeSchema xmlns:ct="http://schemas.microsoft.com/office/2006/metadata/contentType" xmlns:ma="http://schemas.microsoft.com/office/2006/metadata/properties/metaAttributes" ct:_="" ma:_="" ma:contentTypeName="ドキュメント" ma:contentTypeID="0x0101004144450F3F33E8408330B89C726DDE2A" ma:contentTypeVersion="11" ma:contentTypeDescription="新しいドキュメントを作成します。" ma:contentTypeScope="" ma:versionID="9c58ff35178bf34284e6fd6aa2204bce">
   <xsd:schema xmlns:xsd="http://www.w3.org/2001/XMLSchema" xmlns:xs="http://www.w3.org/2001/XMLSchema" xmlns:p="http://schemas.microsoft.com/office/2006/metadata/properties" xmlns:ns2="3dbfb0cf-ada2-4966-9842-78e9c57467ee" xmlns:ns3="46c0a021-bb35-4d3d-8550-6038dbfbec1b" targetNamespace="http://schemas.microsoft.com/office/2006/metadata/properties" ma:root="true" ma:fieldsID="c40ee04c6bcef6283a2a18429e2e2b0b" ns2:_="" ns3:_="">
     <xsd:import namespace="3dbfb0cf-ada2-4966-9842-78e9c57467ee"/>
@@ -11640,6 +11640,15 @@
 </ct:contentTypeSchema>
 </file>
 
+<file path=customXml/item2.xml><?xml version="1.0" encoding="utf-8"?>
+<?mso-contentType ?>
+<FormTemplates xmlns="http://schemas.microsoft.com/sharepoint/v3/contenttype/forms">
+  <Display>DocumentLibraryForm</Display>
+  <Edit>DocumentLibraryForm</Edit>
+  <New>DocumentLibraryForm</New>
+</FormTemplates>
+</file>
+
 <file path=customXml/item3.xml><?xml version="1.0" encoding="utf-8"?>
 <p:properties xmlns:p="http://schemas.microsoft.com/office/2006/metadata/properties" xmlns:xsi="http://www.w3.org/2001/XMLSchema-instance" xmlns:pc="http://schemas.microsoft.com/office/infopath/2007/PartnerControls">
   <documentManagement>
@@ -11652,14 +11661,6 @@
 </file>
 
 <file path=customXml/itemProps1.xml><?xml version="1.0" encoding="utf-8"?>
-<ds:datastoreItem xmlns:ds="http://schemas.openxmlformats.org/officeDocument/2006/customXml" ds:itemID="{7969BDF6-02FD-4DD4-80C5-AE01D9C0B198}">
-  <ds:schemaRefs>
-    <ds:schemaRef ds:uri="http://schemas.microsoft.com/sharepoint/v3/contenttype/forms"/>
-  </ds:schemaRefs>
-</ds:datastoreItem>
-</file>
-
-<file path=customXml/itemProps2.xml><?xml version="1.0" encoding="utf-8"?>
 <ds:datastoreItem xmlns:ds="http://schemas.openxmlformats.org/officeDocument/2006/customXml" ds:itemID="{DFC9F469-61D4-42A4-9782-D2F9073712EC}">
   <ds:schemaRefs>
     <ds:schemaRef ds:uri="3dbfb0cf-ada2-4966-9842-78e9c57467ee"/>
@@ -11674,6 +11675,14 @@
     <ds:schemaRef ds:uri="http://schemas.microsoft.com/office/infopath/2007/PartnerControls"/>
     <ds:schemaRef ds:uri="http://schemas.openxmlformats.org/package/2006/metadata/core-properties"/>
     <ds:schemaRef ds:uri="http://www.w3.org/2001/XMLSchema"/>
+  </ds:schemaRefs>
+</ds:datastoreItem>
+</file>
+
+<file path=customXml/itemProps2.xml><?xml version="1.0" encoding="utf-8"?>
+<ds:datastoreItem xmlns:ds="http://schemas.openxmlformats.org/officeDocument/2006/customXml" ds:itemID="{7969BDF6-02FD-4DD4-80C5-AE01D9C0B198}">
+  <ds:schemaRefs>
+    <ds:schemaRef ds:uri="http://schemas.microsoft.com/sharepoint/v3/contenttype/forms"/>
   </ds:schemaRefs>
 </ds:datastoreItem>
 </file>

--- a/システム構成図.pptx
+++ b/システム構成図.pptx
@@ -5,13 +5,14 @@
     <p:sldMasterId id="2147483648" r:id="rId4"/>
   </p:sldMasterIdLst>
   <p:notesMasterIdLst>
-    <p:notesMasterId r:id="rId9"/>
+    <p:notesMasterId r:id="rId10"/>
   </p:notesMasterIdLst>
   <p:sldIdLst>
     <p:sldId id="324" r:id="rId5"/>
     <p:sldId id="325" r:id="rId6"/>
     <p:sldId id="326" r:id="rId7"/>
     <p:sldId id="327" r:id="rId8"/>
+    <p:sldId id="328" r:id="rId9"/>
   </p:sldIdLst>
   <p:sldSz cx="16200438" cy="6858000"/>
   <p:notesSz cx="6807200" cy="9939338"/>
@@ -299,7 +300,7 @@
       </p15:notesGuideLst>
     </p:ext>
     <p:ext uri="GoogleSlidesCustomDataVersion2">
-      <go:slidesCustomData xmlns:mc="http://schemas.openxmlformats.org/markup-compatibility/2006" xmlns:mv="urn:schemas-microsoft-com:mac:vml" xmlns:c="http://schemas.openxmlformats.org/drawingml/2006/chart" xmlns:dgm="http://schemas.openxmlformats.org/drawingml/2006/diagram" xmlns:o="urn:schemas-microsoft-com:office:office" xmlns:v="urn:schemas-microsoft-com:vml" xmlns:pvml="urn:schemas-microsoft-com:office:powerpoint" xmlns:com="http://schemas.openxmlformats.org/drawingml/2006/compatibility" xmlns:p14="http://schemas.microsoft.com/office/powerpoint/2010/main" xmlns:p15="http://schemas.microsoft.com/office/powerpoint/2012/main" xmlns:ahyp="http://schemas.microsoft.com/office/drawing/2018/hyperlinkcolor" xmlns:go="http://customooxmlschemas.google.com/" xmlns="" r:id="rId42" roundtripDataSignature="AMtx7mjjLadHqMIiphYAwzpEX8auZJ6O0g=="/>
+      <go:slidesCustomData xmlns="" xmlns:go="http://customooxmlschemas.google.com/" xmlns:ahyp="http://schemas.microsoft.com/office/drawing/2018/hyperlinkcolor" xmlns:p15="http://schemas.microsoft.com/office/powerpoint/2012/main" xmlns:p14="http://schemas.microsoft.com/office/powerpoint/2010/main" xmlns:com="http://schemas.openxmlformats.org/drawingml/2006/compatibility" xmlns:pvml="urn:schemas-microsoft-com:office:powerpoint" xmlns:v="urn:schemas-microsoft-com:vml" xmlns:o="urn:schemas-microsoft-com:office:office" xmlns:dgm="http://schemas.openxmlformats.org/drawingml/2006/diagram" xmlns:c="http://schemas.openxmlformats.org/drawingml/2006/chart" xmlns:mv="urn:schemas-microsoft-com:mac:vml" xmlns:mc="http://schemas.openxmlformats.org/markup-compatibility/2006" r:id="rId42" roundtripDataSignature="AMtx7mjjLadHqMIiphYAwzpEX8auZJ6O0g=="/>
     </p:ext>
   </p:extLst>
 </p:presentation>
@@ -2439,7 +2440,7 @@
             <a:fld id="{1D8BD707-D9CF-40AE-B4C6-C98DA3205C09}" type="datetimeFigureOut">
               <a:rPr lang="en-US" smtClean="0"/>
               <a:pPr/>
-              <a:t>1/20/26</a:t>
+              <a:t>1/21/26</a:t>
             </a:fld>
             <a:endParaRPr lang="en-US"/>
           </a:p>
@@ -10883,6 +10884,199 @@
 </p:sld>
 </file>
 
+<file path=ppt/slides/slide5.xml><?xml version="1.0" encoding="utf-8"?>
+<p:sld xmlns:a="http://schemas.openxmlformats.org/drawingml/2006/main" xmlns:r="http://schemas.openxmlformats.org/officeDocument/2006/relationships" xmlns:p="http://schemas.openxmlformats.org/presentationml/2006/main">
+  <p:cSld>
+    <p:spTree>
+      <p:nvGrpSpPr>
+        <p:cNvPr id="1" name=""/>
+        <p:cNvGrpSpPr/>
+        <p:nvPr/>
+      </p:nvGrpSpPr>
+      <p:grpSpPr>
+        <a:xfrm>
+          <a:off x="0" y="0"/>
+          <a:ext cx="0" cy="0"/>
+          <a:chOff x="0" y="0"/>
+          <a:chExt cx="0" cy="0"/>
+        </a:xfrm>
+      </p:grpSpPr>
+      <p:sp>
+        <p:nvSpPr>
+          <p:cNvPr id="2" name="スライド番号プレースホルダー 1">
+            <a:extLst>
+              <a:ext uri="{FF2B5EF4-FFF2-40B4-BE49-F238E27FC236}">
+                <a16:creationId xmlns:a16="http://schemas.microsoft.com/office/drawing/2014/main" id="{0A46A30D-4E72-7813-9C04-180956D45F17}"/>
+              </a:ext>
+            </a:extLst>
+          </p:cNvPr>
+          <p:cNvSpPr>
+            <a:spLocks noGrp="1"/>
+          </p:cNvSpPr>
+          <p:nvPr>
+            <p:ph type="sldNum" idx="12"/>
+          </p:nvPr>
+        </p:nvSpPr>
+        <p:spPr/>
+        <p:txBody>
+          <a:bodyPr/>
+          <a:lstStyle/>
+          <a:p>
+            <a:fld id="{00000000-1234-1234-1234-123412341234}" type="slidenum">
+              <a:rPr lang="en-US" altLang="ja-JP" smtClean="0"/>
+              <a:pPr/>
+              <a:t>4</a:t>
+            </a:fld>
+            <a:endParaRPr lang="en-US"/>
+          </a:p>
+        </p:txBody>
+      </p:sp>
+      <p:pic>
+        <p:nvPicPr>
+          <p:cNvPr id="4" name="図 3" descr="アイコン&#10;&#10;AI 生成コンテンツは誤りを含む可能性があります。">
+            <a:extLst>
+              <a:ext uri="{FF2B5EF4-FFF2-40B4-BE49-F238E27FC236}">
+                <a16:creationId xmlns:a16="http://schemas.microsoft.com/office/drawing/2014/main" id="{472515FF-DBAA-76F8-1853-D0E6D23A9E7F}"/>
+              </a:ext>
+            </a:extLst>
+          </p:cNvPr>
+          <p:cNvPicPr>
+            <a:picLocks noChangeAspect="1"/>
+          </p:cNvPicPr>
+          <p:nvPr/>
+        </p:nvPicPr>
+        <p:blipFill>
+          <a:blip r:embed="rId2"/>
+          <a:stretch>
+            <a:fillRect/>
+          </a:stretch>
+        </p:blipFill>
+        <p:spPr>
+          <a:xfrm>
+            <a:off x="2725004" y="490283"/>
+            <a:ext cx="7772400" cy="5877434"/>
+          </a:xfrm>
+          <a:prstGeom prst="rect">
+            <a:avLst/>
+          </a:prstGeom>
+        </p:spPr>
+      </p:pic>
+      <p:sp>
+        <p:nvSpPr>
+          <p:cNvPr id="5" name="テキスト ボックス 4">
+            <a:extLst>
+              <a:ext uri="{FF2B5EF4-FFF2-40B4-BE49-F238E27FC236}">
+                <a16:creationId xmlns:a16="http://schemas.microsoft.com/office/drawing/2014/main" id="{95588EBC-54CC-83C2-0D2A-0E1CD5E93A96}"/>
+              </a:ext>
+            </a:extLst>
+          </p:cNvPr>
+          <p:cNvSpPr txBox="1"/>
+          <p:nvPr/>
+        </p:nvSpPr>
+        <p:spPr>
+          <a:xfrm>
+            <a:off x="6930668" y="2359743"/>
+            <a:ext cx="2339102" cy="523220"/>
+          </a:xfrm>
+          <a:prstGeom prst="rect">
+            <a:avLst/>
+          </a:prstGeom>
+          <a:noFill/>
+        </p:spPr>
+        <p:txBody>
+          <a:bodyPr wrap="none" rtlCol="0">
+            <a:spAutoFit/>
+          </a:bodyPr>
+          <a:lstStyle/>
+          <a:p>
+            <a:r>
+              <a:rPr kumimoji="1" lang="ja-JP" altLang="en-US" sz="2800" b="1">
+                <a:latin typeface="MS Mincho" panose="02020609040205080304" pitchFamily="49" charset="-128"/>
+                <a:ea typeface="MS Mincho" panose="02020609040205080304" pitchFamily="49" charset="-128"/>
+              </a:rPr>
+              <a:t>←励磁コイル</a:t>
+            </a:r>
+          </a:p>
+        </p:txBody>
+      </p:sp>
+      <p:sp>
+        <p:nvSpPr>
+          <p:cNvPr id="8" name="テキスト ボックス 7">
+            <a:extLst>
+              <a:ext uri="{FF2B5EF4-FFF2-40B4-BE49-F238E27FC236}">
+                <a16:creationId xmlns:a16="http://schemas.microsoft.com/office/drawing/2014/main" id="{8102BCD7-D568-EE6D-2DE3-543A0209B465}"/>
+              </a:ext>
+            </a:extLst>
+          </p:cNvPr>
+          <p:cNvSpPr txBox="1"/>
+          <p:nvPr/>
+        </p:nvSpPr>
+        <p:spPr>
+          <a:xfrm>
+            <a:off x="6247326" y="5012757"/>
+            <a:ext cx="2339102" cy="954107"/>
+          </a:xfrm>
+          <a:prstGeom prst="rect">
+            <a:avLst/>
+          </a:prstGeom>
+          <a:noFill/>
+        </p:spPr>
+        <p:txBody>
+          <a:bodyPr wrap="none" rtlCol="0">
+            <a:spAutoFit/>
+          </a:bodyPr>
+          <a:lstStyle/>
+          <a:p>
+            <a:r>
+              <a:rPr kumimoji="1" lang="ja-JP" altLang="en-US" sz="2800">
+                <a:latin typeface="MS Mincho" panose="02020609040205080304" pitchFamily="49" charset="-128"/>
+                <a:ea typeface="MS Mincho" panose="02020609040205080304" pitchFamily="49" charset="-128"/>
+              </a:rPr>
+              <a:t>　　</a:t>
+            </a:r>
+            <a:r>
+              <a:rPr kumimoji="1" lang="en-US" altLang="ja-JP" sz="2800" dirty="0">
+                <a:latin typeface="MS Mincho" panose="02020609040205080304" pitchFamily="49" charset="-128"/>
+                <a:ea typeface="MS Mincho" panose="02020609040205080304" pitchFamily="49" charset="-128"/>
+              </a:rPr>
+              <a:t> </a:t>
+            </a:r>
+            <a:r>
+              <a:rPr kumimoji="1" lang="ja-JP" altLang="en-US" sz="2800" b="1">
+                <a:latin typeface="MS Mincho" panose="02020609040205080304" pitchFamily="49" charset="-128"/>
+                <a:ea typeface="MS Mincho" panose="02020609040205080304" pitchFamily="49" charset="-128"/>
+              </a:rPr>
+              <a:t>↑</a:t>
+            </a:r>
+            <a:endParaRPr kumimoji="1" lang="en-US" altLang="ja-JP" sz="2800" b="1" dirty="0">
+              <a:latin typeface="MS Mincho" panose="02020609040205080304" pitchFamily="49" charset="-128"/>
+              <a:ea typeface="MS Mincho" panose="02020609040205080304" pitchFamily="49" charset="-128"/>
+            </a:endParaRPr>
+          </a:p>
+          <a:p>
+            <a:r>
+              <a:rPr kumimoji="1" lang="ja-JP" altLang="en-US" sz="2800" b="1">
+                <a:latin typeface="MS Mincho" panose="02020609040205080304" pitchFamily="49" charset="-128"/>
+                <a:ea typeface="MS Mincho" panose="02020609040205080304" pitchFamily="49" charset="-128"/>
+              </a:rPr>
+              <a:t>←検出コイル</a:t>
+            </a:r>
+          </a:p>
+        </p:txBody>
+      </p:sp>
+    </p:spTree>
+    <p:extLst>
+      <p:ext uri="{BB962C8B-B14F-4D97-AF65-F5344CB8AC3E}">
+        <p14:creationId xmlns:p14="http://schemas.microsoft.com/office/powerpoint/2010/main" val="2011969113"/>
+      </p:ext>
+    </p:extLst>
+  </p:cSld>
+  <p:clrMapOvr>
+    <a:masterClrMapping/>
+  </p:clrMapOvr>
+</p:sld>
+</file>
+
 <file path=ppt/theme/theme1.xml><?xml version="1.0" encoding="utf-8"?>
 <a:theme xmlns:a="http://schemas.openxmlformats.org/drawingml/2006/main" name="1_blank">
   <a:themeElements>
@@ -11446,6 +11640,15 @@
 </file>
 
 <file path=customXml/item1.xml><?xml version="1.0" encoding="utf-8"?>
+<?mso-contentType ?>
+<FormTemplates xmlns="http://schemas.microsoft.com/sharepoint/v3/contenttype/forms">
+  <Display>DocumentLibraryForm</Display>
+  <Edit>DocumentLibraryForm</Edit>
+  <New>DocumentLibraryForm</New>
+</FormTemplates>
+</file>
+
+<file path=customXml/item2.xml><?xml version="1.0" encoding="utf-8"?>
 <ct:contentTypeSchema xmlns:ct="http://schemas.microsoft.com/office/2006/metadata/contentType" xmlns:ma="http://schemas.microsoft.com/office/2006/metadata/properties/metaAttributes" ct:_="" ma:_="" ma:contentTypeName="ドキュメント" ma:contentTypeID="0x0101004144450F3F33E8408330B89C726DDE2A" ma:contentTypeVersion="11" ma:contentTypeDescription="新しいドキュメントを作成します。" ma:contentTypeScope="" ma:versionID="9c58ff35178bf34284e6fd6aa2204bce">
   <xsd:schema xmlns:xsd="http://www.w3.org/2001/XMLSchema" xmlns:xs="http://www.w3.org/2001/XMLSchema" xmlns:p="http://schemas.microsoft.com/office/2006/metadata/properties" xmlns:ns2="3dbfb0cf-ada2-4966-9842-78e9c57467ee" xmlns:ns3="46c0a021-bb35-4d3d-8550-6038dbfbec1b" targetNamespace="http://schemas.microsoft.com/office/2006/metadata/properties" ma:root="true" ma:fieldsID="c40ee04c6bcef6283a2a18429e2e2b0b" ns2:_="" ns3:_="">
     <xsd:import namespace="3dbfb0cf-ada2-4966-9842-78e9c57467ee"/>
@@ -11640,15 +11843,6 @@
 </ct:contentTypeSchema>
 </file>
 
-<file path=customXml/item2.xml><?xml version="1.0" encoding="utf-8"?>
-<?mso-contentType ?>
-<FormTemplates xmlns="http://schemas.microsoft.com/sharepoint/v3/contenttype/forms">
-  <Display>DocumentLibraryForm</Display>
-  <Edit>DocumentLibraryForm</Edit>
-  <New>DocumentLibraryForm</New>
-</FormTemplates>
-</file>
-
 <file path=customXml/item3.xml><?xml version="1.0" encoding="utf-8"?>
 <p:properties xmlns:p="http://schemas.microsoft.com/office/2006/metadata/properties" xmlns:xsi="http://www.w3.org/2001/XMLSchema-instance" xmlns:pc="http://schemas.microsoft.com/office/infopath/2007/PartnerControls">
   <documentManagement>
@@ -11661,6 +11855,14 @@
 </file>
 
 <file path=customXml/itemProps1.xml><?xml version="1.0" encoding="utf-8"?>
+<ds:datastoreItem xmlns:ds="http://schemas.openxmlformats.org/officeDocument/2006/customXml" ds:itemID="{7969BDF6-02FD-4DD4-80C5-AE01D9C0B198}">
+  <ds:schemaRefs>
+    <ds:schemaRef ds:uri="http://schemas.microsoft.com/sharepoint/v3/contenttype/forms"/>
+  </ds:schemaRefs>
+</ds:datastoreItem>
+</file>
+
+<file path=customXml/itemProps2.xml><?xml version="1.0" encoding="utf-8"?>
 <ds:datastoreItem xmlns:ds="http://schemas.openxmlformats.org/officeDocument/2006/customXml" ds:itemID="{DFC9F469-61D4-42A4-9782-D2F9073712EC}">
   <ds:schemaRefs>
     <ds:schemaRef ds:uri="3dbfb0cf-ada2-4966-9842-78e9c57467ee"/>
@@ -11675,14 +11877,6 @@
     <ds:schemaRef ds:uri="http://schemas.microsoft.com/office/infopath/2007/PartnerControls"/>
     <ds:schemaRef ds:uri="http://schemas.openxmlformats.org/package/2006/metadata/core-properties"/>
     <ds:schemaRef ds:uri="http://www.w3.org/2001/XMLSchema"/>
-  </ds:schemaRefs>
-</ds:datastoreItem>
-</file>
-
-<file path=customXml/itemProps2.xml><?xml version="1.0" encoding="utf-8"?>
-<ds:datastoreItem xmlns:ds="http://schemas.openxmlformats.org/officeDocument/2006/customXml" ds:itemID="{7969BDF6-02FD-4DD4-80C5-AE01D9C0B198}">
-  <ds:schemaRefs>
-    <ds:schemaRef ds:uri="http://schemas.microsoft.com/sharepoint/v3/contenttype/forms"/>
   </ds:schemaRefs>
 </ds:datastoreItem>
 </file>

--- a/システム構成図.pptx
+++ b/システム構成図.pptx
@@ -5,14 +5,15 @@
     <p:sldMasterId id="2147483648" r:id="rId4"/>
   </p:sldMasterIdLst>
   <p:notesMasterIdLst>
-    <p:notesMasterId r:id="rId10"/>
+    <p:notesMasterId r:id="rId11"/>
   </p:notesMasterIdLst>
   <p:sldIdLst>
     <p:sldId id="324" r:id="rId5"/>
     <p:sldId id="325" r:id="rId6"/>
     <p:sldId id="326" r:id="rId7"/>
     <p:sldId id="327" r:id="rId8"/>
-    <p:sldId id="328" r:id="rId9"/>
+    <p:sldId id="329" r:id="rId9"/>
+    <p:sldId id="328" r:id="rId10"/>
   </p:sldIdLst>
   <p:sldSz cx="16200438" cy="6858000"/>
   <p:notesSz cx="6807200" cy="9939338"/>
@@ -300,7 +301,7 @@
       </p15:notesGuideLst>
     </p:ext>
     <p:ext uri="GoogleSlidesCustomDataVersion2">
-      <go:slidesCustomData xmlns="" xmlns:go="http://customooxmlschemas.google.com/" xmlns:ahyp="http://schemas.microsoft.com/office/drawing/2018/hyperlinkcolor" xmlns:p15="http://schemas.microsoft.com/office/powerpoint/2012/main" xmlns:p14="http://schemas.microsoft.com/office/powerpoint/2010/main" xmlns:com="http://schemas.openxmlformats.org/drawingml/2006/compatibility" xmlns:pvml="urn:schemas-microsoft-com:office:powerpoint" xmlns:v="urn:schemas-microsoft-com:vml" xmlns:o="urn:schemas-microsoft-com:office:office" xmlns:dgm="http://schemas.openxmlformats.org/drawingml/2006/diagram" xmlns:c="http://schemas.openxmlformats.org/drawingml/2006/chart" xmlns:mv="urn:schemas-microsoft-com:mac:vml" xmlns:mc="http://schemas.openxmlformats.org/markup-compatibility/2006" r:id="rId42" roundtripDataSignature="AMtx7mjjLadHqMIiphYAwzpEX8auZJ6O0g=="/>
+      <go:slidesCustomData xmlns:mc="http://schemas.openxmlformats.org/markup-compatibility/2006" xmlns:mv="urn:schemas-microsoft-com:mac:vml" xmlns:c="http://schemas.openxmlformats.org/drawingml/2006/chart" xmlns:dgm="http://schemas.openxmlformats.org/drawingml/2006/diagram" xmlns:o="urn:schemas-microsoft-com:office:office" xmlns:v="urn:schemas-microsoft-com:vml" xmlns:pvml="urn:schemas-microsoft-com:office:powerpoint" xmlns:com="http://schemas.openxmlformats.org/drawingml/2006/compatibility" xmlns:p14="http://schemas.microsoft.com/office/powerpoint/2010/main" xmlns:p15="http://schemas.microsoft.com/office/powerpoint/2012/main" xmlns:ahyp="http://schemas.microsoft.com/office/drawing/2018/hyperlinkcolor" xmlns:go="http://customooxmlschemas.google.com/" xmlns="" r:id="rId42" roundtripDataSignature="AMtx7mjjLadHqMIiphYAwzpEX8auZJ6O0g=="/>
     </p:ext>
   </p:extLst>
 </p:presentation>
@@ -10889,6 +10890,1865 @@
   <p:cSld>
     <p:spTree>
       <p:nvGrpSpPr>
+        <p:cNvPr id="1" name="">
+          <a:extLst>
+            <a:ext uri="{FF2B5EF4-FFF2-40B4-BE49-F238E27FC236}">
+              <a16:creationId xmlns:a16="http://schemas.microsoft.com/office/drawing/2014/main" id="{64B7114F-AFC9-B391-9CE7-077D13467742}"/>
+            </a:ext>
+          </a:extLst>
+        </p:cNvPr>
+        <p:cNvGrpSpPr/>
+        <p:nvPr/>
+      </p:nvGrpSpPr>
+      <p:grpSpPr>
+        <a:xfrm>
+          <a:off x="0" y="0"/>
+          <a:ext cx="0" cy="0"/>
+          <a:chOff x="0" y="0"/>
+          <a:chExt cx="0" cy="0"/>
+        </a:xfrm>
+      </p:grpSpPr>
+      <p:sp>
+        <p:nvSpPr>
+          <p:cNvPr id="55" name="平行四辺形 54">
+            <a:extLst>
+              <a:ext uri="{FF2B5EF4-FFF2-40B4-BE49-F238E27FC236}">
+                <a16:creationId xmlns:a16="http://schemas.microsoft.com/office/drawing/2014/main" id="{3D2C14EF-4A5F-DD6C-B755-CC4A23B897E8}"/>
+              </a:ext>
+            </a:extLst>
+          </p:cNvPr>
+          <p:cNvSpPr/>
+          <p:nvPr/>
+        </p:nvSpPr>
+        <p:spPr>
+          <a:xfrm>
+            <a:off x="8769634" y="5072013"/>
+            <a:ext cx="5623794" cy="1093719"/>
+          </a:xfrm>
+          <a:prstGeom prst="parallelogram">
+            <a:avLst>
+              <a:gd name="adj" fmla="val 87105"/>
+            </a:avLst>
+          </a:prstGeom>
+          <a:solidFill>
+            <a:schemeClr val="bg1">
+              <a:lumMod val="75000"/>
+            </a:schemeClr>
+          </a:solidFill>
+          <a:ln>
+            <a:solidFill>
+              <a:schemeClr val="tx1">
+                <a:lumMod val="95000"/>
+                <a:lumOff val="5000"/>
+              </a:schemeClr>
+            </a:solidFill>
+          </a:ln>
+        </p:spPr>
+        <p:style>
+          <a:lnRef idx="2">
+            <a:schemeClr val="accent1">
+              <a:shade val="15000"/>
+            </a:schemeClr>
+          </a:lnRef>
+          <a:fillRef idx="1">
+            <a:schemeClr val="accent1"/>
+          </a:fillRef>
+          <a:effectRef idx="0">
+            <a:schemeClr val="accent1"/>
+          </a:effectRef>
+          <a:fontRef idx="minor">
+            <a:schemeClr val="lt1"/>
+          </a:fontRef>
+        </p:style>
+        <p:txBody>
+          <a:bodyPr rtlCol="0" anchor="ctr"/>
+          <a:lstStyle/>
+          <a:p>
+            <a:pPr algn="ctr"/>
+            <a:endParaRPr kumimoji="1" lang="ja-JP" altLang="en-US"/>
+          </a:p>
+        </p:txBody>
+      </p:sp>
+      <p:grpSp>
+        <p:nvGrpSpPr>
+          <p:cNvPr id="56" name="グループ化 55">
+            <a:extLst>
+              <a:ext uri="{FF2B5EF4-FFF2-40B4-BE49-F238E27FC236}">
+                <a16:creationId xmlns:a16="http://schemas.microsoft.com/office/drawing/2014/main" id="{5FBD177A-EA46-B723-3B7B-3C36B021E98C}"/>
+              </a:ext>
+            </a:extLst>
+          </p:cNvPr>
+          <p:cNvGrpSpPr/>
+          <p:nvPr/>
+        </p:nvGrpSpPr>
+        <p:grpSpPr>
+          <a:xfrm>
+            <a:off x="10865305" y="3110870"/>
+            <a:ext cx="1561764" cy="1044319"/>
+            <a:chOff x="5256110" y="2542415"/>
+            <a:chExt cx="1561764" cy="1215325"/>
+          </a:xfrm>
+        </p:grpSpPr>
+        <p:sp>
+          <p:nvSpPr>
+            <p:cNvPr id="57" name="フローチャート: 磁気ディスク 56">
+              <a:extLst>
+                <a:ext uri="{FF2B5EF4-FFF2-40B4-BE49-F238E27FC236}">
+                  <a16:creationId xmlns:a16="http://schemas.microsoft.com/office/drawing/2014/main" id="{8A8A65AE-15F4-815D-9A11-EEE1F6359D60}"/>
+                </a:ext>
+              </a:extLst>
+            </p:cNvPr>
+            <p:cNvSpPr/>
+            <p:nvPr/>
+          </p:nvSpPr>
+          <p:spPr>
+            <a:xfrm>
+              <a:off x="5256110" y="3381460"/>
+              <a:ext cx="1561763" cy="376280"/>
+            </a:xfrm>
+            <a:prstGeom prst="flowChartMagneticDisk">
+              <a:avLst/>
+            </a:prstGeom>
+          </p:spPr>
+          <p:style>
+            <a:lnRef idx="2">
+              <a:schemeClr val="accent1">
+                <a:shade val="15000"/>
+              </a:schemeClr>
+            </a:lnRef>
+            <a:fillRef idx="1">
+              <a:schemeClr val="accent1"/>
+            </a:fillRef>
+            <a:effectRef idx="0">
+              <a:schemeClr val="accent1"/>
+            </a:effectRef>
+            <a:fontRef idx="minor">
+              <a:schemeClr val="lt1"/>
+            </a:fontRef>
+          </p:style>
+          <p:txBody>
+            <a:bodyPr rtlCol="0" anchor="ctr"/>
+            <a:lstStyle/>
+            <a:p>
+              <a:pPr algn="ctr"/>
+              <a:endParaRPr kumimoji="1" lang="ja-JP" altLang="en-US"/>
+            </a:p>
+          </p:txBody>
+        </p:sp>
+        <p:sp>
+          <p:nvSpPr>
+            <p:cNvPr id="58" name="フローチャート: 磁気ディスク 57">
+              <a:extLst>
+                <a:ext uri="{FF2B5EF4-FFF2-40B4-BE49-F238E27FC236}">
+                  <a16:creationId xmlns:a16="http://schemas.microsoft.com/office/drawing/2014/main" id="{2AF5CEF9-E1EE-61DC-94DD-CC0FB95A248F}"/>
+                </a:ext>
+              </a:extLst>
+            </p:cNvPr>
+            <p:cNvSpPr/>
+            <p:nvPr/>
+          </p:nvSpPr>
+          <p:spPr>
+            <a:xfrm>
+              <a:off x="5734216" y="2561888"/>
+              <a:ext cx="605553" cy="946768"/>
+            </a:xfrm>
+            <a:prstGeom prst="flowChartMagneticDisk">
+              <a:avLst/>
+            </a:prstGeom>
+          </p:spPr>
+          <p:style>
+            <a:lnRef idx="2">
+              <a:schemeClr val="accent1">
+                <a:shade val="15000"/>
+              </a:schemeClr>
+            </a:lnRef>
+            <a:fillRef idx="1">
+              <a:schemeClr val="accent1"/>
+            </a:fillRef>
+            <a:effectRef idx="0">
+              <a:schemeClr val="accent1"/>
+            </a:effectRef>
+            <a:fontRef idx="minor">
+              <a:schemeClr val="lt1"/>
+            </a:fontRef>
+          </p:style>
+          <p:txBody>
+            <a:bodyPr rtlCol="0" anchor="ctr"/>
+            <a:lstStyle/>
+            <a:p>
+              <a:pPr algn="ctr"/>
+              <a:endParaRPr kumimoji="1" lang="ja-JP" altLang="en-US"/>
+            </a:p>
+          </p:txBody>
+        </p:sp>
+        <p:sp>
+          <p:nvSpPr>
+            <p:cNvPr id="59" name="フローチャート: 磁気ディスク 58">
+              <a:extLst>
+                <a:ext uri="{FF2B5EF4-FFF2-40B4-BE49-F238E27FC236}">
+                  <a16:creationId xmlns:a16="http://schemas.microsoft.com/office/drawing/2014/main" id="{46194E24-27B6-A942-DE58-242FF31A114C}"/>
+                </a:ext>
+              </a:extLst>
+            </p:cNvPr>
+            <p:cNvSpPr/>
+            <p:nvPr/>
+          </p:nvSpPr>
+          <p:spPr>
+            <a:xfrm>
+              <a:off x="5345123" y="2926785"/>
+              <a:ext cx="1383738" cy="570489"/>
+            </a:xfrm>
+            <a:prstGeom prst="flowChartMagneticDisk">
+              <a:avLst/>
+            </a:prstGeom>
+            <a:solidFill>
+              <a:schemeClr val="accent6">
+                <a:lumMod val="75000"/>
+              </a:schemeClr>
+            </a:solidFill>
+          </p:spPr>
+          <p:style>
+            <a:lnRef idx="2">
+              <a:schemeClr val="accent1">
+                <a:shade val="15000"/>
+              </a:schemeClr>
+            </a:lnRef>
+            <a:fillRef idx="1">
+              <a:schemeClr val="accent1"/>
+            </a:fillRef>
+            <a:effectRef idx="0">
+              <a:schemeClr val="accent1"/>
+            </a:effectRef>
+            <a:fontRef idx="minor">
+              <a:schemeClr val="lt1"/>
+            </a:fontRef>
+          </p:style>
+          <p:txBody>
+            <a:bodyPr rtlCol="0" anchor="ctr"/>
+            <a:lstStyle/>
+            <a:p>
+              <a:pPr algn="ctr"/>
+              <a:endParaRPr kumimoji="1" lang="ja-JP" altLang="en-US"/>
+            </a:p>
+          </p:txBody>
+        </p:sp>
+        <p:sp>
+          <p:nvSpPr>
+            <p:cNvPr id="60" name="フローチャート: 磁気ディスク 59">
+              <a:extLst>
+                <a:ext uri="{FF2B5EF4-FFF2-40B4-BE49-F238E27FC236}">
+                  <a16:creationId xmlns:a16="http://schemas.microsoft.com/office/drawing/2014/main" id="{8A47E942-04E1-907E-1EEA-BB20CA6FEF5E}"/>
+                </a:ext>
+              </a:extLst>
+            </p:cNvPr>
+            <p:cNvSpPr/>
+            <p:nvPr/>
+          </p:nvSpPr>
+          <p:spPr>
+            <a:xfrm>
+              <a:off x="5345124" y="2766716"/>
+              <a:ext cx="1383738" cy="570489"/>
+            </a:xfrm>
+            <a:prstGeom prst="flowChartMagneticDisk">
+              <a:avLst/>
+            </a:prstGeom>
+            <a:solidFill>
+              <a:schemeClr val="accent6">
+                <a:lumMod val="75000"/>
+              </a:schemeClr>
+            </a:solidFill>
+          </p:spPr>
+          <p:style>
+            <a:lnRef idx="2">
+              <a:schemeClr val="accent1">
+                <a:shade val="15000"/>
+              </a:schemeClr>
+            </a:lnRef>
+            <a:fillRef idx="1">
+              <a:schemeClr val="accent1"/>
+            </a:fillRef>
+            <a:effectRef idx="0">
+              <a:schemeClr val="accent1"/>
+            </a:effectRef>
+            <a:fontRef idx="minor">
+              <a:schemeClr val="lt1"/>
+            </a:fontRef>
+          </p:style>
+          <p:txBody>
+            <a:bodyPr rtlCol="0" anchor="ctr"/>
+            <a:lstStyle/>
+            <a:p>
+              <a:pPr algn="ctr"/>
+              <a:endParaRPr kumimoji="1" lang="ja-JP" altLang="en-US"/>
+            </a:p>
+          </p:txBody>
+        </p:sp>
+        <p:sp>
+          <p:nvSpPr>
+            <p:cNvPr id="61" name="フローチャート: 磁気ディスク 60">
+              <a:extLst>
+                <a:ext uri="{FF2B5EF4-FFF2-40B4-BE49-F238E27FC236}">
+                  <a16:creationId xmlns:a16="http://schemas.microsoft.com/office/drawing/2014/main" id="{59F68CE8-2DE3-8BA9-A18F-3E3BA642FCCB}"/>
+                </a:ext>
+              </a:extLst>
+            </p:cNvPr>
+            <p:cNvSpPr/>
+            <p:nvPr/>
+          </p:nvSpPr>
+          <p:spPr>
+            <a:xfrm>
+              <a:off x="5345123" y="2667590"/>
+              <a:ext cx="1383738" cy="570489"/>
+            </a:xfrm>
+            <a:prstGeom prst="flowChartMagneticDisk">
+              <a:avLst/>
+            </a:prstGeom>
+            <a:solidFill>
+              <a:schemeClr val="accent6">
+                <a:lumMod val="75000"/>
+              </a:schemeClr>
+            </a:solidFill>
+          </p:spPr>
+          <p:style>
+            <a:lnRef idx="2">
+              <a:schemeClr val="accent1">
+                <a:shade val="15000"/>
+              </a:schemeClr>
+            </a:lnRef>
+            <a:fillRef idx="1">
+              <a:schemeClr val="accent1"/>
+            </a:fillRef>
+            <a:effectRef idx="0">
+              <a:schemeClr val="accent1"/>
+            </a:effectRef>
+            <a:fontRef idx="minor">
+              <a:schemeClr val="lt1"/>
+            </a:fontRef>
+          </p:style>
+          <p:txBody>
+            <a:bodyPr rtlCol="0" anchor="ctr"/>
+            <a:lstStyle/>
+            <a:p>
+              <a:pPr algn="ctr"/>
+              <a:endParaRPr kumimoji="1" lang="ja-JP" altLang="en-US"/>
+            </a:p>
+          </p:txBody>
+        </p:sp>
+        <p:sp>
+          <p:nvSpPr>
+            <p:cNvPr id="62" name="フローチャート: 磁気ディスク 61">
+              <a:extLst>
+                <a:ext uri="{FF2B5EF4-FFF2-40B4-BE49-F238E27FC236}">
+                  <a16:creationId xmlns:a16="http://schemas.microsoft.com/office/drawing/2014/main" id="{F52D0CC8-7CCA-E04C-7257-6222E78D4417}"/>
+                </a:ext>
+              </a:extLst>
+            </p:cNvPr>
+            <p:cNvSpPr/>
+            <p:nvPr/>
+          </p:nvSpPr>
+          <p:spPr>
+            <a:xfrm>
+              <a:off x="5345123" y="2542415"/>
+              <a:ext cx="1383738" cy="570489"/>
+            </a:xfrm>
+            <a:prstGeom prst="flowChartMagneticDisk">
+              <a:avLst/>
+            </a:prstGeom>
+            <a:solidFill>
+              <a:schemeClr val="accent6">
+                <a:lumMod val="75000"/>
+              </a:schemeClr>
+            </a:solidFill>
+          </p:spPr>
+          <p:style>
+            <a:lnRef idx="2">
+              <a:schemeClr val="accent1">
+                <a:shade val="15000"/>
+              </a:schemeClr>
+            </a:lnRef>
+            <a:fillRef idx="1">
+              <a:schemeClr val="accent1"/>
+            </a:fillRef>
+            <a:effectRef idx="0">
+              <a:schemeClr val="accent1"/>
+            </a:effectRef>
+            <a:fontRef idx="minor">
+              <a:schemeClr val="lt1"/>
+            </a:fontRef>
+          </p:style>
+          <p:txBody>
+            <a:bodyPr rtlCol="0" anchor="ctr"/>
+            <a:lstStyle/>
+            <a:p>
+              <a:pPr algn="ctr"/>
+              <a:endParaRPr kumimoji="1" lang="ja-JP" altLang="en-US"/>
+            </a:p>
+          </p:txBody>
+        </p:sp>
+        <p:sp>
+          <p:nvSpPr>
+            <p:cNvPr id="63" name="フローチャート: 磁気ディスク 62">
+              <a:extLst>
+                <a:ext uri="{FF2B5EF4-FFF2-40B4-BE49-F238E27FC236}">
+                  <a16:creationId xmlns:a16="http://schemas.microsoft.com/office/drawing/2014/main" id="{B3673A76-DCA2-E45A-FF31-19E6989285BB}"/>
+                </a:ext>
+              </a:extLst>
+            </p:cNvPr>
+            <p:cNvSpPr/>
+            <p:nvPr/>
+          </p:nvSpPr>
+          <p:spPr>
+            <a:xfrm>
+              <a:off x="5256111" y="2561887"/>
+              <a:ext cx="1561763" cy="376280"/>
+            </a:xfrm>
+            <a:prstGeom prst="flowChartMagneticDisk">
+              <a:avLst/>
+            </a:prstGeom>
+          </p:spPr>
+          <p:style>
+            <a:lnRef idx="2">
+              <a:schemeClr val="accent1">
+                <a:shade val="15000"/>
+              </a:schemeClr>
+            </a:lnRef>
+            <a:fillRef idx="1">
+              <a:schemeClr val="accent1"/>
+            </a:fillRef>
+            <a:effectRef idx="0">
+              <a:schemeClr val="accent1"/>
+            </a:effectRef>
+            <a:fontRef idx="minor">
+              <a:schemeClr val="lt1"/>
+            </a:fontRef>
+          </p:style>
+          <p:txBody>
+            <a:bodyPr rtlCol="0" anchor="ctr"/>
+            <a:lstStyle/>
+            <a:p>
+              <a:pPr algn="ctr"/>
+              <a:endParaRPr kumimoji="1" lang="ja-JP" altLang="en-US" dirty="0"/>
+            </a:p>
+          </p:txBody>
+        </p:sp>
+      </p:grpSp>
+      <p:grpSp>
+        <p:nvGrpSpPr>
+          <p:cNvPr id="64" name="グループ化 63">
+            <a:extLst>
+              <a:ext uri="{FF2B5EF4-FFF2-40B4-BE49-F238E27FC236}">
+                <a16:creationId xmlns:a16="http://schemas.microsoft.com/office/drawing/2014/main" id="{CE1CE5EA-5A71-41F8-FD20-EBB024B38ACC}"/>
+              </a:ext>
+            </a:extLst>
+          </p:cNvPr>
+          <p:cNvGrpSpPr/>
+          <p:nvPr/>
+        </p:nvGrpSpPr>
+        <p:grpSpPr>
+          <a:xfrm>
+            <a:off x="10865305" y="2059915"/>
+            <a:ext cx="1561764" cy="1215325"/>
+            <a:chOff x="3310311" y="1314957"/>
+            <a:chExt cx="1561764" cy="1215325"/>
+          </a:xfrm>
+        </p:grpSpPr>
+        <p:sp>
+          <p:nvSpPr>
+            <p:cNvPr id="65" name="フローチャート: 磁気ディスク 64">
+              <a:extLst>
+                <a:ext uri="{FF2B5EF4-FFF2-40B4-BE49-F238E27FC236}">
+                  <a16:creationId xmlns:a16="http://schemas.microsoft.com/office/drawing/2014/main" id="{242C5947-E5A7-0896-1D39-244A6D610ED7}"/>
+                </a:ext>
+              </a:extLst>
+            </p:cNvPr>
+            <p:cNvSpPr/>
+            <p:nvPr/>
+          </p:nvSpPr>
+          <p:spPr>
+            <a:xfrm>
+              <a:off x="3310311" y="2154002"/>
+              <a:ext cx="1561763" cy="376280"/>
+            </a:xfrm>
+            <a:prstGeom prst="flowChartMagneticDisk">
+              <a:avLst/>
+            </a:prstGeom>
+            <a:solidFill>
+              <a:srgbClr val="FFFF00"/>
+            </a:solidFill>
+          </p:spPr>
+          <p:style>
+            <a:lnRef idx="2">
+              <a:schemeClr val="accent1">
+                <a:shade val="15000"/>
+              </a:schemeClr>
+            </a:lnRef>
+            <a:fillRef idx="1">
+              <a:schemeClr val="accent1"/>
+            </a:fillRef>
+            <a:effectRef idx="0">
+              <a:schemeClr val="accent1"/>
+            </a:effectRef>
+            <a:fontRef idx="minor">
+              <a:schemeClr val="lt1"/>
+            </a:fontRef>
+          </p:style>
+          <p:txBody>
+            <a:bodyPr rtlCol="0" anchor="ctr"/>
+            <a:lstStyle/>
+            <a:p>
+              <a:pPr algn="ctr"/>
+              <a:endParaRPr kumimoji="1" lang="ja-JP" altLang="en-US"/>
+            </a:p>
+          </p:txBody>
+        </p:sp>
+        <p:sp>
+          <p:nvSpPr>
+            <p:cNvPr id="66" name="フローチャート: 磁気ディスク 65">
+              <a:extLst>
+                <a:ext uri="{FF2B5EF4-FFF2-40B4-BE49-F238E27FC236}">
+                  <a16:creationId xmlns:a16="http://schemas.microsoft.com/office/drawing/2014/main" id="{F1318FE4-10DD-7EBD-4152-ECD6677B96D5}"/>
+                </a:ext>
+              </a:extLst>
+            </p:cNvPr>
+            <p:cNvSpPr/>
+            <p:nvPr/>
+          </p:nvSpPr>
+          <p:spPr>
+            <a:xfrm>
+              <a:off x="3788417" y="1334430"/>
+              <a:ext cx="605553" cy="946768"/>
+            </a:xfrm>
+            <a:prstGeom prst="flowChartMagneticDisk">
+              <a:avLst/>
+            </a:prstGeom>
+          </p:spPr>
+          <p:style>
+            <a:lnRef idx="2">
+              <a:schemeClr val="accent1">
+                <a:shade val="15000"/>
+              </a:schemeClr>
+            </a:lnRef>
+            <a:fillRef idx="1">
+              <a:schemeClr val="accent1"/>
+            </a:fillRef>
+            <a:effectRef idx="0">
+              <a:schemeClr val="accent1"/>
+            </a:effectRef>
+            <a:fontRef idx="minor">
+              <a:schemeClr val="lt1"/>
+            </a:fontRef>
+          </p:style>
+          <p:txBody>
+            <a:bodyPr rtlCol="0" anchor="ctr"/>
+            <a:lstStyle/>
+            <a:p>
+              <a:pPr algn="ctr"/>
+              <a:endParaRPr kumimoji="1" lang="ja-JP" altLang="en-US"/>
+            </a:p>
+          </p:txBody>
+        </p:sp>
+        <p:sp>
+          <p:nvSpPr>
+            <p:cNvPr id="67" name="フローチャート: 磁気ディスク 66">
+              <a:extLst>
+                <a:ext uri="{FF2B5EF4-FFF2-40B4-BE49-F238E27FC236}">
+                  <a16:creationId xmlns:a16="http://schemas.microsoft.com/office/drawing/2014/main" id="{3F7FA22C-CF85-D7CB-8370-760E7A339196}"/>
+                </a:ext>
+              </a:extLst>
+            </p:cNvPr>
+            <p:cNvSpPr/>
+            <p:nvPr/>
+          </p:nvSpPr>
+          <p:spPr>
+            <a:xfrm>
+              <a:off x="3399324" y="1699327"/>
+              <a:ext cx="1383738" cy="570489"/>
+            </a:xfrm>
+            <a:prstGeom prst="flowChartMagneticDisk">
+              <a:avLst/>
+            </a:prstGeom>
+            <a:solidFill>
+              <a:schemeClr val="accent6">
+                <a:lumMod val="75000"/>
+              </a:schemeClr>
+            </a:solidFill>
+          </p:spPr>
+          <p:style>
+            <a:lnRef idx="2">
+              <a:schemeClr val="accent1">
+                <a:shade val="15000"/>
+              </a:schemeClr>
+            </a:lnRef>
+            <a:fillRef idx="1">
+              <a:schemeClr val="accent1"/>
+            </a:fillRef>
+            <a:effectRef idx="0">
+              <a:schemeClr val="accent1"/>
+            </a:effectRef>
+            <a:fontRef idx="minor">
+              <a:schemeClr val="lt1"/>
+            </a:fontRef>
+          </p:style>
+          <p:txBody>
+            <a:bodyPr rtlCol="0" anchor="ctr"/>
+            <a:lstStyle/>
+            <a:p>
+              <a:pPr algn="ctr"/>
+              <a:endParaRPr kumimoji="1" lang="ja-JP" altLang="en-US"/>
+            </a:p>
+          </p:txBody>
+        </p:sp>
+        <p:sp>
+          <p:nvSpPr>
+            <p:cNvPr id="68" name="フローチャート: 磁気ディスク 67">
+              <a:extLst>
+                <a:ext uri="{FF2B5EF4-FFF2-40B4-BE49-F238E27FC236}">
+                  <a16:creationId xmlns:a16="http://schemas.microsoft.com/office/drawing/2014/main" id="{2F763A89-63D4-B9A9-7FA0-4F8AE98FAA24}"/>
+                </a:ext>
+              </a:extLst>
+            </p:cNvPr>
+            <p:cNvSpPr/>
+            <p:nvPr/>
+          </p:nvSpPr>
+          <p:spPr>
+            <a:xfrm>
+              <a:off x="3399325" y="1539258"/>
+              <a:ext cx="1383738" cy="570489"/>
+            </a:xfrm>
+            <a:prstGeom prst="flowChartMagneticDisk">
+              <a:avLst/>
+            </a:prstGeom>
+            <a:solidFill>
+              <a:schemeClr val="accent6">
+                <a:lumMod val="75000"/>
+              </a:schemeClr>
+            </a:solidFill>
+          </p:spPr>
+          <p:style>
+            <a:lnRef idx="2">
+              <a:schemeClr val="accent1">
+                <a:shade val="15000"/>
+              </a:schemeClr>
+            </a:lnRef>
+            <a:fillRef idx="1">
+              <a:schemeClr val="accent1"/>
+            </a:fillRef>
+            <a:effectRef idx="0">
+              <a:schemeClr val="accent1"/>
+            </a:effectRef>
+            <a:fontRef idx="minor">
+              <a:schemeClr val="lt1"/>
+            </a:fontRef>
+          </p:style>
+          <p:txBody>
+            <a:bodyPr rtlCol="0" anchor="ctr"/>
+            <a:lstStyle/>
+            <a:p>
+              <a:pPr algn="ctr"/>
+              <a:endParaRPr kumimoji="1" lang="ja-JP" altLang="en-US"/>
+            </a:p>
+          </p:txBody>
+        </p:sp>
+        <p:sp>
+          <p:nvSpPr>
+            <p:cNvPr id="69" name="フローチャート: 磁気ディスク 68">
+              <a:extLst>
+                <a:ext uri="{FF2B5EF4-FFF2-40B4-BE49-F238E27FC236}">
+                  <a16:creationId xmlns:a16="http://schemas.microsoft.com/office/drawing/2014/main" id="{7D0904A1-7B1B-C75E-2862-8BDB2D03FC56}"/>
+                </a:ext>
+              </a:extLst>
+            </p:cNvPr>
+            <p:cNvSpPr/>
+            <p:nvPr/>
+          </p:nvSpPr>
+          <p:spPr>
+            <a:xfrm>
+              <a:off x="3399324" y="1440132"/>
+              <a:ext cx="1383738" cy="570489"/>
+            </a:xfrm>
+            <a:prstGeom prst="flowChartMagneticDisk">
+              <a:avLst/>
+            </a:prstGeom>
+            <a:solidFill>
+              <a:schemeClr val="accent6">
+                <a:lumMod val="75000"/>
+              </a:schemeClr>
+            </a:solidFill>
+          </p:spPr>
+          <p:style>
+            <a:lnRef idx="2">
+              <a:schemeClr val="accent1">
+                <a:shade val="15000"/>
+              </a:schemeClr>
+            </a:lnRef>
+            <a:fillRef idx="1">
+              <a:schemeClr val="accent1"/>
+            </a:fillRef>
+            <a:effectRef idx="0">
+              <a:schemeClr val="accent1"/>
+            </a:effectRef>
+            <a:fontRef idx="minor">
+              <a:schemeClr val="lt1"/>
+            </a:fontRef>
+          </p:style>
+          <p:txBody>
+            <a:bodyPr rtlCol="0" anchor="ctr"/>
+            <a:lstStyle/>
+            <a:p>
+              <a:pPr algn="ctr"/>
+              <a:endParaRPr kumimoji="1" lang="ja-JP" altLang="en-US"/>
+            </a:p>
+          </p:txBody>
+        </p:sp>
+        <p:sp>
+          <p:nvSpPr>
+            <p:cNvPr id="70" name="フローチャート: 磁気ディスク 69">
+              <a:extLst>
+                <a:ext uri="{FF2B5EF4-FFF2-40B4-BE49-F238E27FC236}">
+                  <a16:creationId xmlns:a16="http://schemas.microsoft.com/office/drawing/2014/main" id="{B3255782-964E-D229-16CD-27DADEE966D2}"/>
+                </a:ext>
+              </a:extLst>
+            </p:cNvPr>
+            <p:cNvSpPr/>
+            <p:nvPr/>
+          </p:nvSpPr>
+          <p:spPr>
+            <a:xfrm>
+              <a:off x="3399324" y="1314957"/>
+              <a:ext cx="1383738" cy="570489"/>
+            </a:xfrm>
+            <a:prstGeom prst="flowChartMagneticDisk">
+              <a:avLst/>
+            </a:prstGeom>
+            <a:solidFill>
+              <a:schemeClr val="accent6">
+                <a:lumMod val="75000"/>
+              </a:schemeClr>
+            </a:solidFill>
+          </p:spPr>
+          <p:style>
+            <a:lnRef idx="2">
+              <a:schemeClr val="accent1">
+                <a:shade val="15000"/>
+              </a:schemeClr>
+            </a:lnRef>
+            <a:fillRef idx="1">
+              <a:schemeClr val="accent1"/>
+            </a:fillRef>
+            <a:effectRef idx="0">
+              <a:schemeClr val="accent1"/>
+            </a:effectRef>
+            <a:fontRef idx="minor">
+              <a:schemeClr val="lt1"/>
+            </a:fontRef>
+          </p:style>
+          <p:txBody>
+            <a:bodyPr rtlCol="0" anchor="ctr"/>
+            <a:lstStyle/>
+            <a:p>
+              <a:pPr algn="ctr"/>
+              <a:endParaRPr kumimoji="1" lang="ja-JP" altLang="en-US"/>
+            </a:p>
+          </p:txBody>
+        </p:sp>
+        <p:sp>
+          <p:nvSpPr>
+            <p:cNvPr id="71" name="フローチャート: 磁気ディスク 70">
+              <a:extLst>
+                <a:ext uri="{FF2B5EF4-FFF2-40B4-BE49-F238E27FC236}">
+                  <a16:creationId xmlns:a16="http://schemas.microsoft.com/office/drawing/2014/main" id="{5EAC792D-598B-2E22-4ADE-DC4470D36DC5}"/>
+                </a:ext>
+              </a:extLst>
+            </p:cNvPr>
+            <p:cNvSpPr/>
+            <p:nvPr/>
+          </p:nvSpPr>
+          <p:spPr>
+            <a:xfrm>
+              <a:off x="3310312" y="1334429"/>
+              <a:ext cx="1561763" cy="376280"/>
+            </a:xfrm>
+            <a:prstGeom prst="flowChartMagneticDisk">
+              <a:avLst/>
+            </a:prstGeom>
+            <a:solidFill>
+              <a:srgbClr val="FFFF00"/>
+            </a:solidFill>
+          </p:spPr>
+          <p:style>
+            <a:lnRef idx="2">
+              <a:schemeClr val="accent1">
+                <a:shade val="15000"/>
+              </a:schemeClr>
+            </a:lnRef>
+            <a:fillRef idx="1">
+              <a:schemeClr val="accent1"/>
+            </a:fillRef>
+            <a:effectRef idx="0">
+              <a:schemeClr val="accent1"/>
+            </a:effectRef>
+            <a:fontRef idx="minor">
+              <a:schemeClr val="lt1"/>
+            </a:fontRef>
+          </p:style>
+          <p:txBody>
+            <a:bodyPr rtlCol="0" anchor="ctr"/>
+            <a:lstStyle/>
+            <a:p>
+              <a:pPr algn="ctr"/>
+              <a:endParaRPr kumimoji="1" lang="ja-JP" altLang="en-US"/>
+            </a:p>
+          </p:txBody>
+        </p:sp>
+      </p:grpSp>
+      <p:sp>
+        <p:nvSpPr>
+          <p:cNvPr id="72" name="楕円 71">
+            <a:extLst>
+              <a:ext uri="{FF2B5EF4-FFF2-40B4-BE49-F238E27FC236}">
+                <a16:creationId xmlns:a16="http://schemas.microsoft.com/office/drawing/2014/main" id="{2780C4FF-48F0-49C9-9EF7-85307B7C888C}"/>
+              </a:ext>
+            </a:extLst>
+          </p:cNvPr>
+          <p:cNvSpPr/>
+          <p:nvPr/>
+        </p:nvSpPr>
+        <p:spPr>
+          <a:xfrm>
+            <a:off x="11321323" y="1269374"/>
+            <a:ext cx="659666" cy="623205"/>
+          </a:xfrm>
+          <a:prstGeom prst="ellipse">
+            <a:avLst/>
+          </a:prstGeom>
+          <a:noFill/>
+        </p:spPr>
+        <p:style>
+          <a:lnRef idx="2">
+            <a:schemeClr val="accent1">
+              <a:shade val="15000"/>
+            </a:schemeClr>
+          </a:lnRef>
+          <a:fillRef idx="1">
+            <a:schemeClr val="accent1"/>
+          </a:fillRef>
+          <a:effectRef idx="0">
+            <a:schemeClr val="accent1"/>
+          </a:effectRef>
+          <a:fontRef idx="minor">
+            <a:schemeClr val="lt1"/>
+          </a:fontRef>
+        </p:style>
+        <p:txBody>
+          <a:bodyPr rtlCol="0" anchor="ctr"/>
+          <a:lstStyle/>
+          <a:p>
+            <a:pPr algn="ctr"/>
+            <a:r>
+              <a:rPr kumimoji="1" lang="ja-JP" altLang="en-US" sz="3600" dirty="0">
+                <a:solidFill>
+                  <a:schemeClr val="tx1"/>
+                </a:solidFill>
+              </a:rPr>
+              <a:t>～</a:t>
+            </a:r>
+          </a:p>
+        </p:txBody>
+      </p:sp>
+      <p:cxnSp>
+        <p:nvCxnSpPr>
+          <p:cNvPr id="73" name="コネクタ: カギ線 72">
+            <a:extLst>
+              <a:ext uri="{FF2B5EF4-FFF2-40B4-BE49-F238E27FC236}">
+                <a16:creationId xmlns:a16="http://schemas.microsoft.com/office/drawing/2014/main" id="{6076FFD2-9395-F287-9554-A043A7C51DC3}"/>
+              </a:ext>
+            </a:extLst>
+          </p:cNvPr>
+          <p:cNvCxnSpPr>
+            <a:stCxn id="71" idx="2"/>
+            <a:endCxn id="72" idx="2"/>
+          </p:cNvCxnSpPr>
+          <p:nvPr/>
+        </p:nvCxnSpPr>
+        <p:spPr>
+          <a:xfrm rot="10800000" flipH="1">
+            <a:off x="10865305" y="1580977"/>
+            <a:ext cx="456017" cy="686550"/>
+          </a:xfrm>
+          <a:prstGeom prst="bentConnector3">
+            <a:avLst>
+              <a:gd name="adj1" fmla="val -50130"/>
+            </a:avLst>
+          </a:prstGeom>
+          <a:ln w="25400">
+            <a:solidFill>
+              <a:schemeClr val="tx1"/>
+            </a:solidFill>
+          </a:ln>
+        </p:spPr>
+        <p:style>
+          <a:lnRef idx="1">
+            <a:schemeClr val="accent1"/>
+          </a:lnRef>
+          <a:fillRef idx="0">
+            <a:schemeClr val="accent1"/>
+          </a:fillRef>
+          <a:effectRef idx="0">
+            <a:schemeClr val="accent1"/>
+          </a:effectRef>
+          <a:fontRef idx="minor">
+            <a:schemeClr val="tx1"/>
+          </a:fontRef>
+        </p:style>
+      </p:cxnSp>
+      <p:cxnSp>
+        <p:nvCxnSpPr>
+          <p:cNvPr id="74" name="コネクタ: カギ線 73">
+            <a:extLst>
+              <a:ext uri="{FF2B5EF4-FFF2-40B4-BE49-F238E27FC236}">
+                <a16:creationId xmlns:a16="http://schemas.microsoft.com/office/drawing/2014/main" id="{B1CA1B96-AD10-8D06-0F0E-113831CCB624}"/>
+              </a:ext>
+            </a:extLst>
+          </p:cNvPr>
+          <p:cNvCxnSpPr>
+            <a:stCxn id="71" idx="4"/>
+            <a:endCxn id="72" idx="6"/>
+          </p:cNvCxnSpPr>
+          <p:nvPr/>
+        </p:nvCxnSpPr>
+        <p:spPr>
+          <a:xfrm flipH="1" flipV="1">
+            <a:off x="11980989" y="1580977"/>
+            <a:ext cx="446080" cy="686550"/>
+          </a:xfrm>
+          <a:prstGeom prst="bentConnector3">
+            <a:avLst>
+              <a:gd name="adj1" fmla="val -51246"/>
+            </a:avLst>
+          </a:prstGeom>
+          <a:ln w="25400">
+            <a:solidFill>
+              <a:schemeClr val="tx1"/>
+            </a:solidFill>
+          </a:ln>
+        </p:spPr>
+        <p:style>
+          <a:lnRef idx="1">
+            <a:schemeClr val="accent1"/>
+          </a:lnRef>
+          <a:fillRef idx="0">
+            <a:schemeClr val="accent1"/>
+          </a:fillRef>
+          <a:effectRef idx="0">
+            <a:schemeClr val="accent1"/>
+          </a:effectRef>
+          <a:fontRef idx="minor">
+            <a:schemeClr val="tx1"/>
+          </a:fontRef>
+        </p:style>
+      </p:cxnSp>
+      <p:sp>
+        <p:nvSpPr>
+          <p:cNvPr id="75" name="楕円 74">
+            <a:extLst>
+              <a:ext uri="{FF2B5EF4-FFF2-40B4-BE49-F238E27FC236}">
+                <a16:creationId xmlns:a16="http://schemas.microsoft.com/office/drawing/2014/main" id="{31F03499-5A32-089B-C5FE-EA0188B01A56}"/>
+              </a:ext>
+            </a:extLst>
+          </p:cNvPr>
+          <p:cNvSpPr/>
+          <p:nvPr/>
+        </p:nvSpPr>
+        <p:spPr>
+          <a:xfrm>
+            <a:off x="10865305" y="5310909"/>
+            <a:ext cx="1561763" cy="580677"/>
+          </a:xfrm>
+          <a:prstGeom prst="ellipse">
+            <a:avLst/>
+          </a:prstGeom>
+          <a:noFill/>
+          <a:ln>
+            <a:solidFill>
+              <a:srgbClr val="FFFF00"/>
+            </a:solidFill>
+          </a:ln>
+        </p:spPr>
+        <p:style>
+          <a:lnRef idx="2">
+            <a:schemeClr val="accent1">
+              <a:shade val="15000"/>
+            </a:schemeClr>
+          </a:lnRef>
+          <a:fillRef idx="1">
+            <a:schemeClr val="accent1"/>
+          </a:fillRef>
+          <a:effectRef idx="0">
+            <a:schemeClr val="accent1"/>
+          </a:effectRef>
+          <a:fontRef idx="minor">
+            <a:schemeClr val="lt1"/>
+          </a:fontRef>
+        </p:style>
+        <p:txBody>
+          <a:bodyPr rtlCol="0" anchor="ctr"/>
+          <a:lstStyle/>
+          <a:p>
+            <a:pPr algn="ctr"/>
+            <a:endParaRPr kumimoji="1" lang="ja-JP" altLang="en-US"/>
+          </a:p>
+        </p:txBody>
+      </p:sp>
+      <p:sp>
+        <p:nvSpPr>
+          <p:cNvPr id="76" name="楕円 75">
+            <a:extLst>
+              <a:ext uri="{FF2B5EF4-FFF2-40B4-BE49-F238E27FC236}">
+                <a16:creationId xmlns:a16="http://schemas.microsoft.com/office/drawing/2014/main" id="{DA66203D-19F8-18E1-D1D8-54300BC8CFED}"/>
+              </a:ext>
+            </a:extLst>
+          </p:cNvPr>
+          <p:cNvSpPr/>
+          <p:nvPr/>
+        </p:nvSpPr>
+        <p:spPr>
+          <a:xfrm>
+            <a:off x="10686656" y="5182648"/>
+            <a:ext cx="1919060" cy="837197"/>
+          </a:xfrm>
+          <a:prstGeom prst="ellipse">
+            <a:avLst/>
+          </a:prstGeom>
+          <a:noFill/>
+          <a:ln>
+            <a:solidFill>
+              <a:srgbClr val="FFFF00"/>
+            </a:solidFill>
+          </a:ln>
+        </p:spPr>
+        <p:style>
+          <a:lnRef idx="2">
+            <a:schemeClr val="accent1">
+              <a:shade val="15000"/>
+            </a:schemeClr>
+          </a:lnRef>
+          <a:fillRef idx="1">
+            <a:schemeClr val="accent1"/>
+          </a:fillRef>
+          <a:effectRef idx="0">
+            <a:schemeClr val="accent1"/>
+          </a:effectRef>
+          <a:fontRef idx="minor">
+            <a:schemeClr val="lt1"/>
+          </a:fontRef>
+        </p:style>
+        <p:txBody>
+          <a:bodyPr rtlCol="0" anchor="ctr"/>
+          <a:lstStyle/>
+          <a:p>
+            <a:pPr algn="ctr"/>
+            <a:endParaRPr kumimoji="1" lang="ja-JP" altLang="en-US"/>
+          </a:p>
+        </p:txBody>
+      </p:sp>
+      <p:sp>
+        <p:nvSpPr>
+          <p:cNvPr id="77" name="楕円 76">
+            <a:extLst>
+              <a:ext uri="{FF2B5EF4-FFF2-40B4-BE49-F238E27FC236}">
+                <a16:creationId xmlns:a16="http://schemas.microsoft.com/office/drawing/2014/main" id="{8BDE7AFF-CEBB-43E1-D832-33471C8142C4}"/>
+              </a:ext>
+            </a:extLst>
+          </p:cNvPr>
+          <p:cNvSpPr/>
+          <p:nvPr/>
+        </p:nvSpPr>
+        <p:spPr>
+          <a:xfrm>
+            <a:off x="11093313" y="5387187"/>
+            <a:ext cx="1141933" cy="402878"/>
+          </a:xfrm>
+          <a:prstGeom prst="ellipse">
+            <a:avLst/>
+          </a:prstGeom>
+          <a:noFill/>
+          <a:ln>
+            <a:solidFill>
+              <a:srgbClr val="FFFF00"/>
+            </a:solidFill>
+          </a:ln>
+        </p:spPr>
+        <p:style>
+          <a:lnRef idx="2">
+            <a:schemeClr val="accent1">
+              <a:shade val="15000"/>
+            </a:schemeClr>
+          </a:lnRef>
+          <a:fillRef idx="1">
+            <a:schemeClr val="accent1"/>
+          </a:fillRef>
+          <a:effectRef idx="0">
+            <a:schemeClr val="accent1"/>
+          </a:effectRef>
+          <a:fontRef idx="minor">
+            <a:schemeClr val="lt1"/>
+          </a:fontRef>
+        </p:style>
+        <p:txBody>
+          <a:bodyPr rtlCol="0" anchor="ctr"/>
+          <a:lstStyle/>
+          <a:p>
+            <a:pPr algn="ctr"/>
+            <a:endParaRPr kumimoji="1" lang="ja-JP" altLang="en-US"/>
+          </a:p>
+        </p:txBody>
+      </p:sp>
+      <p:sp>
+        <p:nvSpPr>
+          <p:cNvPr id="78" name="楕円 77">
+            <a:extLst>
+              <a:ext uri="{FF2B5EF4-FFF2-40B4-BE49-F238E27FC236}">
+                <a16:creationId xmlns:a16="http://schemas.microsoft.com/office/drawing/2014/main" id="{B02EFDE1-AC7A-B7A5-3C6F-718F6750FFE3}"/>
+              </a:ext>
+            </a:extLst>
+          </p:cNvPr>
+          <p:cNvSpPr/>
+          <p:nvPr/>
+        </p:nvSpPr>
+        <p:spPr>
+          <a:xfrm>
+            <a:off x="11245714" y="5470286"/>
+            <a:ext cx="850950" cy="236679"/>
+          </a:xfrm>
+          <a:prstGeom prst="ellipse">
+            <a:avLst/>
+          </a:prstGeom>
+          <a:noFill/>
+          <a:ln>
+            <a:solidFill>
+              <a:srgbClr val="FFFF00"/>
+            </a:solidFill>
+          </a:ln>
+        </p:spPr>
+        <p:style>
+          <a:lnRef idx="2">
+            <a:schemeClr val="accent1">
+              <a:shade val="15000"/>
+            </a:schemeClr>
+          </a:lnRef>
+          <a:fillRef idx="1">
+            <a:schemeClr val="accent1"/>
+          </a:fillRef>
+          <a:effectRef idx="0">
+            <a:schemeClr val="accent1"/>
+          </a:effectRef>
+          <a:fontRef idx="minor">
+            <a:schemeClr val="lt1"/>
+          </a:fontRef>
+        </p:style>
+        <p:txBody>
+          <a:bodyPr rtlCol="0" anchor="ctr"/>
+          <a:lstStyle/>
+          <a:p>
+            <a:pPr algn="ctr"/>
+            <a:endParaRPr kumimoji="1" lang="ja-JP" altLang="en-US"/>
+          </a:p>
+        </p:txBody>
+      </p:sp>
+      <p:sp>
+        <p:nvSpPr>
+          <p:cNvPr id="80" name="テキスト ボックス 79">
+            <a:extLst>
+              <a:ext uri="{FF2B5EF4-FFF2-40B4-BE49-F238E27FC236}">
+                <a16:creationId xmlns:a16="http://schemas.microsoft.com/office/drawing/2014/main" id="{AB58B57A-5CAA-342B-3D04-5C24E268DC11}"/>
+              </a:ext>
+            </a:extLst>
+          </p:cNvPr>
+          <p:cNvSpPr txBox="1"/>
+          <p:nvPr/>
+        </p:nvSpPr>
+        <p:spPr>
+          <a:xfrm>
+            <a:off x="8108757" y="3416261"/>
+            <a:ext cx="2646878" cy="584775"/>
+          </a:xfrm>
+          <a:prstGeom prst="rect">
+            <a:avLst/>
+          </a:prstGeom>
+          <a:noFill/>
+        </p:spPr>
+        <p:txBody>
+          <a:bodyPr wrap="none" rtlCol="0">
+            <a:spAutoFit/>
+          </a:bodyPr>
+          <a:lstStyle/>
+          <a:p>
+            <a:r>
+              <a:rPr kumimoji="1" lang="ja-JP" altLang="en-US" sz="3200" dirty="0"/>
+              <a:t>検出コイル→</a:t>
+            </a:r>
+          </a:p>
+        </p:txBody>
+      </p:sp>
+      <p:sp>
+        <p:nvSpPr>
+          <p:cNvPr id="81" name="テキスト ボックス 80">
+            <a:extLst>
+              <a:ext uri="{FF2B5EF4-FFF2-40B4-BE49-F238E27FC236}">
+                <a16:creationId xmlns:a16="http://schemas.microsoft.com/office/drawing/2014/main" id="{C56154D9-AEB7-8D2C-2784-92D59B2EFB6C}"/>
+              </a:ext>
+            </a:extLst>
+          </p:cNvPr>
+          <p:cNvSpPr txBox="1"/>
+          <p:nvPr/>
+        </p:nvSpPr>
+        <p:spPr>
+          <a:xfrm>
+            <a:off x="7705026" y="5177898"/>
+            <a:ext cx="1415772" cy="584775"/>
+          </a:xfrm>
+          <a:prstGeom prst="rect">
+            <a:avLst/>
+          </a:prstGeom>
+          <a:noFill/>
+        </p:spPr>
+        <p:txBody>
+          <a:bodyPr wrap="none" rtlCol="0">
+            <a:spAutoFit/>
+          </a:bodyPr>
+          <a:lstStyle/>
+          <a:p>
+            <a:r>
+              <a:rPr kumimoji="1" lang="ja-JP" altLang="en-US" sz="3200" dirty="0"/>
+              <a:t>金属→</a:t>
+            </a:r>
+          </a:p>
+        </p:txBody>
+      </p:sp>
+      <p:sp>
+        <p:nvSpPr>
+          <p:cNvPr id="82" name="テキスト ボックス 81">
+            <a:extLst>
+              <a:ext uri="{FF2B5EF4-FFF2-40B4-BE49-F238E27FC236}">
+                <a16:creationId xmlns:a16="http://schemas.microsoft.com/office/drawing/2014/main" id="{1206DF47-6085-4146-27C2-732B41B90AA8}"/>
+              </a:ext>
+            </a:extLst>
+          </p:cNvPr>
+          <p:cNvSpPr txBox="1"/>
+          <p:nvPr/>
+        </p:nvSpPr>
+        <p:spPr>
+          <a:xfrm>
+            <a:off x="9130344" y="5461500"/>
+            <a:ext cx="1620957" cy="523220"/>
+          </a:xfrm>
+          <a:prstGeom prst="rect">
+            <a:avLst/>
+          </a:prstGeom>
+          <a:noFill/>
+        </p:spPr>
+        <p:txBody>
+          <a:bodyPr wrap="none" rtlCol="0">
+            <a:spAutoFit/>
+          </a:bodyPr>
+          <a:lstStyle/>
+          <a:p>
+            <a:r>
+              <a:rPr kumimoji="1" lang="ja-JP" altLang="en-US" sz="2800" dirty="0"/>
+              <a:t>渦電流→</a:t>
+            </a:r>
+          </a:p>
+        </p:txBody>
+      </p:sp>
+      <p:sp>
+        <p:nvSpPr>
+          <p:cNvPr id="83" name="テキスト ボックス 82">
+            <a:extLst>
+              <a:ext uri="{FF2B5EF4-FFF2-40B4-BE49-F238E27FC236}">
+                <a16:creationId xmlns:a16="http://schemas.microsoft.com/office/drawing/2014/main" id="{6516F627-122B-33A3-9E5F-05575635B8B0}"/>
+              </a:ext>
+            </a:extLst>
+          </p:cNvPr>
+          <p:cNvSpPr txBox="1"/>
+          <p:nvPr/>
+        </p:nvSpPr>
+        <p:spPr>
+          <a:xfrm>
+            <a:off x="11980989" y="4076744"/>
+            <a:ext cx="4288353" cy="1077218"/>
+          </a:xfrm>
+          <a:prstGeom prst="rect">
+            <a:avLst/>
+          </a:prstGeom>
+          <a:noFill/>
+        </p:spPr>
+        <p:txBody>
+          <a:bodyPr wrap="none" rtlCol="0">
+            <a:spAutoFit/>
+          </a:bodyPr>
+          <a:lstStyle/>
+          <a:p>
+            <a:r>
+              <a:rPr kumimoji="1" lang="ja-JP" altLang="en-US" sz="3200"/>
+              <a:t>←渦</a:t>
+            </a:r>
+            <a:r>
+              <a:rPr kumimoji="1" lang="ja-JP" altLang="en-US" sz="3200" dirty="0"/>
+              <a:t>電流から</a:t>
+            </a:r>
+            <a:r>
+              <a:rPr kumimoji="1" lang="ja-JP" altLang="en-US" sz="3200"/>
+              <a:t>発生した</a:t>
+            </a:r>
+            <a:endParaRPr kumimoji="1" lang="en-US" altLang="ja-JP" sz="3200" dirty="0"/>
+          </a:p>
+          <a:p>
+            <a:pPr algn="ctr"/>
+            <a:r>
+              <a:rPr kumimoji="1" lang="ja-JP" altLang="en-US" sz="3200"/>
+              <a:t>二次磁界</a:t>
+            </a:r>
+            <a:endParaRPr kumimoji="1" lang="ja-JP" altLang="en-US" sz="3200" dirty="0"/>
+          </a:p>
+        </p:txBody>
+      </p:sp>
+      <p:sp>
+        <p:nvSpPr>
+          <p:cNvPr id="91" name="楕円 90">
+            <a:extLst>
+              <a:ext uri="{FF2B5EF4-FFF2-40B4-BE49-F238E27FC236}">
+                <a16:creationId xmlns:a16="http://schemas.microsoft.com/office/drawing/2014/main" id="{DD541133-BB7D-4FD5-40F6-C619AD094D48}"/>
+              </a:ext>
+            </a:extLst>
+          </p:cNvPr>
+          <p:cNvSpPr/>
+          <p:nvPr/>
+        </p:nvSpPr>
+        <p:spPr>
+          <a:xfrm>
+            <a:off x="11289298" y="554828"/>
+            <a:ext cx="659666" cy="623205"/>
+          </a:xfrm>
+          <a:prstGeom prst="ellipse">
+            <a:avLst/>
+          </a:prstGeom>
+          <a:noFill/>
+          <a:ln>
+            <a:solidFill>
+              <a:srgbClr val="FF0000"/>
+            </a:solidFill>
+          </a:ln>
+        </p:spPr>
+        <p:style>
+          <a:lnRef idx="2">
+            <a:schemeClr val="accent1">
+              <a:shade val="15000"/>
+            </a:schemeClr>
+          </a:lnRef>
+          <a:fillRef idx="1">
+            <a:schemeClr val="accent1"/>
+          </a:fillRef>
+          <a:effectRef idx="0">
+            <a:schemeClr val="accent1"/>
+          </a:effectRef>
+          <a:fontRef idx="minor">
+            <a:schemeClr val="lt1"/>
+          </a:fontRef>
+        </p:style>
+        <p:txBody>
+          <a:bodyPr rtlCol="0" anchor="ctr"/>
+          <a:lstStyle/>
+          <a:p>
+            <a:pPr algn="ctr"/>
+            <a:r>
+              <a:rPr kumimoji="1" lang="en-US" altLang="ja-JP" sz="3600" dirty="0">
+                <a:solidFill>
+                  <a:srgbClr val="FF0000"/>
+                </a:solidFill>
+              </a:rPr>
+              <a:t>V</a:t>
+            </a:r>
+            <a:endParaRPr kumimoji="1" lang="ja-JP" altLang="en-US" sz="3600" dirty="0">
+              <a:solidFill>
+                <a:srgbClr val="FF0000"/>
+              </a:solidFill>
+            </a:endParaRPr>
+          </a:p>
+        </p:txBody>
+      </p:sp>
+      <p:cxnSp>
+        <p:nvCxnSpPr>
+          <p:cNvPr id="92" name="コネクタ: カギ線 91">
+            <a:extLst>
+              <a:ext uri="{FF2B5EF4-FFF2-40B4-BE49-F238E27FC236}">
+                <a16:creationId xmlns:a16="http://schemas.microsoft.com/office/drawing/2014/main" id="{5B794BE7-49D7-817A-3665-91B3D8306C15}"/>
+              </a:ext>
+            </a:extLst>
+          </p:cNvPr>
+          <p:cNvCxnSpPr>
+            <a:endCxn id="91" idx="2"/>
+          </p:cNvCxnSpPr>
+          <p:nvPr/>
+        </p:nvCxnSpPr>
+        <p:spPr>
+          <a:xfrm rot="10800000" flipH="1">
+            <a:off x="10838250" y="866432"/>
+            <a:ext cx="451047" cy="2425911"/>
+          </a:xfrm>
+          <a:prstGeom prst="bentConnector3">
+            <a:avLst>
+              <a:gd name="adj1" fmla="val -389809"/>
+            </a:avLst>
+          </a:prstGeom>
+          <a:ln w="25400">
+            <a:solidFill>
+              <a:srgbClr val="FF0000"/>
+            </a:solidFill>
+          </a:ln>
+        </p:spPr>
+        <p:style>
+          <a:lnRef idx="1">
+            <a:schemeClr val="accent1"/>
+          </a:lnRef>
+          <a:fillRef idx="0">
+            <a:schemeClr val="accent1"/>
+          </a:fillRef>
+          <a:effectRef idx="0">
+            <a:schemeClr val="accent1"/>
+          </a:effectRef>
+          <a:fontRef idx="minor">
+            <a:schemeClr val="tx1"/>
+          </a:fontRef>
+        </p:style>
+      </p:cxnSp>
+      <p:cxnSp>
+        <p:nvCxnSpPr>
+          <p:cNvPr id="93" name="コネクタ: カギ線 92">
+            <a:extLst>
+              <a:ext uri="{FF2B5EF4-FFF2-40B4-BE49-F238E27FC236}">
+                <a16:creationId xmlns:a16="http://schemas.microsoft.com/office/drawing/2014/main" id="{0E2B0301-BF04-A14F-4700-1EEF35470CA8}"/>
+              </a:ext>
+            </a:extLst>
+          </p:cNvPr>
+          <p:cNvCxnSpPr>
+            <a:stCxn id="91" idx="6"/>
+          </p:cNvCxnSpPr>
+          <p:nvPr/>
+        </p:nvCxnSpPr>
+        <p:spPr>
+          <a:xfrm>
+            <a:off x="11948964" y="866431"/>
+            <a:ext cx="451050" cy="2425911"/>
+          </a:xfrm>
+          <a:prstGeom prst="bentConnector3">
+            <a:avLst>
+              <a:gd name="adj1" fmla="val 420985"/>
+            </a:avLst>
+          </a:prstGeom>
+          <a:ln w="25400">
+            <a:solidFill>
+              <a:srgbClr val="FF0000"/>
+            </a:solidFill>
+          </a:ln>
+        </p:spPr>
+        <p:style>
+          <a:lnRef idx="1">
+            <a:schemeClr val="accent1"/>
+          </a:lnRef>
+          <a:fillRef idx="0">
+            <a:schemeClr val="accent1"/>
+          </a:fillRef>
+          <a:effectRef idx="0">
+            <a:schemeClr val="accent1"/>
+          </a:effectRef>
+          <a:fontRef idx="minor">
+            <a:schemeClr val="tx1"/>
+          </a:fontRef>
+        </p:style>
+      </p:cxnSp>
+      <p:sp>
+        <p:nvSpPr>
+          <p:cNvPr id="94" name="円弧 93">
+            <a:extLst>
+              <a:ext uri="{FF2B5EF4-FFF2-40B4-BE49-F238E27FC236}">
+                <a16:creationId xmlns:a16="http://schemas.microsoft.com/office/drawing/2014/main" id="{EB304217-40C6-E5CB-E39A-E28EB9237EA6}"/>
+              </a:ext>
+            </a:extLst>
+          </p:cNvPr>
+          <p:cNvSpPr/>
+          <p:nvPr/>
+        </p:nvSpPr>
+        <p:spPr>
+          <a:xfrm rot="5400000" flipH="1">
+            <a:off x="6023801" y="4346375"/>
+            <a:ext cx="8569688" cy="2639341"/>
+          </a:xfrm>
+          <a:prstGeom prst="arc">
+            <a:avLst>
+              <a:gd name="adj1" fmla="val 16458379"/>
+              <a:gd name="adj2" fmla="val 20441669"/>
+            </a:avLst>
+          </a:prstGeom>
+          <a:noFill/>
+          <a:ln w="19050">
+            <a:solidFill>
+              <a:schemeClr val="tx1"/>
+            </a:solidFill>
+            <a:prstDash val="sysDash"/>
+            <a:tailEnd type="arrow"/>
+          </a:ln>
+        </p:spPr>
+        <p:style>
+          <a:lnRef idx="1">
+            <a:schemeClr val="accent1"/>
+          </a:lnRef>
+          <a:fillRef idx="0">
+            <a:schemeClr val="accent1"/>
+          </a:fillRef>
+          <a:effectRef idx="0">
+            <a:schemeClr val="accent1"/>
+          </a:effectRef>
+          <a:fontRef idx="minor">
+            <a:schemeClr val="tx1"/>
+          </a:fontRef>
+        </p:style>
+        <p:txBody>
+          <a:bodyPr rtlCol="0" anchor="ctr"/>
+          <a:lstStyle/>
+          <a:p>
+            <a:pPr algn="ctr"/>
+            <a:endParaRPr kumimoji="1" lang="ja-JP" altLang="en-US"/>
+          </a:p>
+        </p:txBody>
+      </p:sp>
+      <p:sp>
+        <p:nvSpPr>
+          <p:cNvPr id="95" name="円弧 94">
+            <a:extLst>
+              <a:ext uri="{FF2B5EF4-FFF2-40B4-BE49-F238E27FC236}">
+                <a16:creationId xmlns:a16="http://schemas.microsoft.com/office/drawing/2014/main" id="{BE317A3C-F164-6056-3EE1-91BD24931241}"/>
+              </a:ext>
+            </a:extLst>
+          </p:cNvPr>
+          <p:cNvSpPr/>
+          <p:nvPr/>
+        </p:nvSpPr>
+        <p:spPr>
+          <a:xfrm rot="5400000" flipH="1" flipV="1">
+            <a:off x="8672297" y="4346375"/>
+            <a:ext cx="8715574" cy="2639339"/>
+          </a:xfrm>
+          <a:prstGeom prst="arc">
+            <a:avLst>
+              <a:gd name="adj1" fmla="val 16458379"/>
+              <a:gd name="adj2" fmla="val 20420647"/>
+            </a:avLst>
+          </a:prstGeom>
+          <a:noFill/>
+          <a:ln w="19050">
+            <a:solidFill>
+              <a:schemeClr val="tx1"/>
+            </a:solidFill>
+            <a:prstDash val="sysDash"/>
+            <a:tailEnd type="arrow"/>
+          </a:ln>
+        </p:spPr>
+        <p:style>
+          <a:lnRef idx="1">
+            <a:schemeClr val="accent1"/>
+          </a:lnRef>
+          <a:fillRef idx="0">
+            <a:schemeClr val="accent1"/>
+          </a:fillRef>
+          <a:effectRef idx="0">
+            <a:schemeClr val="accent1"/>
+          </a:effectRef>
+          <a:fontRef idx="minor">
+            <a:schemeClr val="tx1"/>
+          </a:fontRef>
+        </p:style>
+        <p:txBody>
+          <a:bodyPr rtlCol="0" anchor="ctr"/>
+          <a:lstStyle/>
+          <a:p>
+            <a:pPr algn="ctr"/>
+            <a:endParaRPr kumimoji="1" lang="ja-JP" altLang="en-US"/>
+          </a:p>
+        </p:txBody>
+      </p:sp>
+      <p:sp>
+        <p:nvSpPr>
+          <p:cNvPr id="96" name="円弧 95">
+            <a:extLst>
+              <a:ext uri="{FF2B5EF4-FFF2-40B4-BE49-F238E27FC236}">
+                <a16:creationId xmlns:a16="http://schemas.microsoft.com/office/drawing/2014/main" id="{36619DC7-14A1-55B2-6004-AFF73816731F}"/>
+              </a:ext>
+            </a:extLst>
+          </p:cNvPr>
+          <p:cNvSpPr/>
+          <p:nvPr/>
+        </p:nvSpPr>
+        <p:spPr>
+          <a:xfrm rot="5400000" flipH="1" flipV="1">
+            <a:off x="9988645" y="4340127"/>
+            <a:ext cx="6196856" cy="2639339"/>
+          </a:xfrm>
+          <a:prstGeom prst="arc">
+            <a:avLst>
+              <a:gd name="adj1" fmla="val 16458379"/>
+              <a:gd name="adj2" fmla="val 20861527"/>
+            </a:avLst>
+          </a:prstGeom>
+          <a:noFill/>
+          <a:ln w="19050">
+            <a:solidFill>
+              <a:schemeClr val="tx1"/>
+            </a:solidFill>
+            <a:prstDash val="sysDash"/>
+            <a:tailEnd type="arrow"/>
+          </a:ln>
+        </p:spPr>
+        <p:style>
+          <a:lnRef idx="1">
+            <a:schemeClr val="accent1"/>
+          </a:lnRef>
+          <a:fillRef idx="0">
+            <a:schemeClr val="accent1"/>
+          </a:fillRef>
+          <a:effectRef idx="0">
+            <a:schemeClr val="accent1"/>
+          </a:effectRef>
+          <a:fontRef idx="minor">
+            <a:schemeClr val="tx1"/>
+          </a:fontRef>
+        </p:style>
+        <p:txBody>
+          <a:bodyPr rtlCol="0" anchor="ctr"/>
+          <a:lstStyle/>
+          <a:p>
+            <a:pPr algn="ctr"/>
+            <a:endParaRPr kumimoji="1" lang="ja-JP" altLang="en-US"/>
+          </a:p>
+        </p:txBody>
+      </p:sp>
+      <p:sp>
+        <p:nvSpPr>
+          <p:cNvPr id="97" name="円弧 96">
+            <a:extLst>
+              <a:ext uri="{FF2B5EF4-FFF2-40B4-BE49-F238E27FC236}">
+                <a16:creationId xmlns:a16="http://schemas.microsoft.com/office/drawing/2014/main" id="{4DB522B3-B3AF-AFFC-E8F9-15A2C2F98C21}"/>
+              </a:ext>
+            </a:extLst>
+          </p:cNvPr>
+          <p:cNvSpPr/>
+          <p:nvPr/>
+        </p:nvSpPr>
+        <p:spPr>
+          <a:xfrm rot="5400000" flipH="1" flipV="1">
+            <a:off x="10530247" y="4334527"/>
+            <a:ext cx="5278845" cy="2639339"/>
+          </a:xfrm>
+          <a:prstGeom prst="arc">
+            <a:avLst>
+              <a:gd name="adj1" fmla="val 16458379"/>
+              <a:gd name="adj2" fmla="val 21427619"/>
+            </a:avLst>
+          </a:prstGeom>
+          <a:noFill/>
+          <a:ln w="19050">
+            <a:solidFill>
+              <a:schemeClr val="tx1"/>
+            </a:solidFill>
+            <a:prstDash val="sysDash"/>
+            <a:tailEnd type="arrow"/>
+          </a:ln>
+        </p:spPr>
+        <p:style>
+          <a:lnRef idx="1">
+            <a:schemeClr val="accent1"/>
+          </a:lnRef>
+          <a:fillRef idx="0">
+            <a:schemeClr val="accent1"/>
+          </a:fillRef>
+          <a:effectRef idx="0">
+            <a:schemeClr val="accent1"/>
+          </a:effectRef>
+          <a:fontRef idx="minor">
+            <a:schemeClr val="tx1"/>
+          </a:fontRef>
+        </p:style>
+        <p:txBody>
+          <a:bodyPr rtlCol="0" anchor="ctr"/>
+          <a:lstStyle/>
+          <a:p>
+            <a:pPr algn="ctr"/>
+            <a:endParaRPr kumimoji="1" lang="ja-JP" altLang="en-US"/>
+          </a:p>
+        </p:txBody>
+      </p:sp>
+      <p:sp>
+        <p:nvSpPr>
+          <p:cNvPr id="98" name="円弧 97">
+            <a:extLst>
+              <a:ext uri="{FF2B5EF4-FFF2-40B4-BE49-F238E27FC236}">
+                <a16:creationId xmlns:a16="http://schemas.microsoft.com/office/drawing/2014/main" id="{677D581B-2E58-EE2A-C747-F835435B460C}"/>
+              </a:ext>
+            </a:extLst>
+          </p:cNvPr>
+          <p:cNvSpPr/>
+          <p:nvPr/>
+        </p:nvSpPr>
+        <p:spPr>
+          <a:xfrm rot="5400000" flipH="1">
+            <a:off x="7719847" y="4560756"/>
+            <a:ext cx="5278845" cy="2210575"/>
+          </a:xfrm>
+          <a:prstGeom prst="arc">
+            <a:avLst>
+              <a:gd name="adj1" fmla="val 16458379"/>
+              <a:gd name="adj2" fmla="val 21427619"/>
+            </a:avLst>
+          </a:prstGeom>
+          <a:noFill/>
+          <a:ln w="19050">
+            <a:solidFill>
+              <a:schemeClr val="tx1"/>
+            </a:solidFill>
+            <a:prstDash val="sysDash"/>
+            <a:tailEnd type="arrow"/>
+          </a:ln>
+        </p:spPr>
+        <p:style>
+          <a:lnRef idx="1">
+            <a:schemeClr val="accent1"/>
+          </a:lnRef>
+          <a:fillRef idx="0">
+            <a:schemeClr val="accent1"/>
+          </a:fillRef>
+          <a:effectRef idx="0">
+            <a:schemeClr val="accent1"/>
+          </a:effectRef>
+          <a:fontRef idx="minor">
+            <a:schemeClr val="tx1"/>
+          </a:fontRef>
+        </p:style>
+        <p:txBody>
+          <a:bodyPr rtlCol="0" anchor="ctr"/>
+          <a:lstStyle/>
+          <a:p>
+            <a:pPr algn="ctr"/>
+            <a:endParaRPr kumimoji="1" lang="ja-JP" altLang="en-US"/>
+          </a:p>
+        </p:txBody>
+      </p:sp>
+      <p:sp>
+        <p:nvSpPr>
+          <p:cNvPr id="100" name="円弧 99">
+            <a:extLst>
+              <a:ext uri="{FF2B5EF4-FFF2-40B4-BE49-F238E27FC236}">
+                <a16:creationId xmlns:a16="http://schemas.microsoft.com/office/drawing/2014/main" id="{F1BB1350-8BC1-8902-24BE-241F5B489A70}"/>
+              </a:ext>
+            </a:extLst>
+          </p:cNvPr>
+          <p:cNvSpPr/>
+          <p:nvPr/>
+        </p:nvSpPr>
+        <p:spPr>
+          <a:xfrm rot="5400000" flipH="1">
+            <a:off x="7270566" y="4478951"/>
+            <a:ext cx="6196856" cy="2374183"/>
+          </a:xfrm>
+          <a:prstGeom prst="arc">
+            <a:avLst>
+              <a:gd name="adj1" fmla="val 16458379"/>
+              <a:gd name="adj2" fmla="val 20861527"/>
+            </a:avLst>
+          </a:prstGeom>
+          <a:noFill/>
+          <a:ln w="19050">
+            <a:solidFill>
+              <a:schemeClr val="tx1"/>
+            </a:solidFill>
+            <a:prstDash val="sysDash"/>
+            <a:tailEnd type="arrow"/>
+          </a:ln>
+        </p:spPr>
+        <p:style>
+          <a:lnRef idx="1">
+            <a:schemeClr val="accent1"/>
+          </a:lnRef>
+          <a:fillRef idx="0">
+            <a:schemeClr val="accent1"/>
+          </a:fillRef>
+          <a:effectRef idx="0">
+            <a:schemeClr val="accent1"/>
+          </a:effectRef>
+          <a:fontRef idx="minor">
+            <a:schemeClr val="tx1"/>
+          </a:fontRef>
+        </p:style>
+        <p:txBody>
+          <a:bodyPr rtlCol="0" anchor="ctr"/>
+          <a:lstStyle/>
+          <a:p>
+            <a:pPr algn="ctr"/>
+            <a:endParaRPr kumimoji="1" lang="ja-JP" altLang="en-US"/>
+          </a:p>
+        </p:txBody>
+      </p:sp>
+      <p:sp>
+        <p:nvSpPr>
+          <p:cNvPr id="79" name="テキスト ボックス 78">
+            <a:extLst>
+              <a:ext uri="{FF2B5EF4-FFF2-40B4-BE49-F238E27FC236}">
+                <a16:creationId xmlns:a16="http://schemas.microsoft.com/office/drawing/2014/main" id="{9316E5F1-22BA-8C18-16CF-10758859102D}"/>
+              </a:ext>
+            </a:extLst>
+          </p:cNvPr>
+          <p:cNvSpPr txBox="1"/>
+          <p:nvPr/>
+        </p:nvSpPr>
+        <p:spPr>
+          <a:xfrm>
+            <a:off x="8382713" y="2461403"/>
+            <a:ext cx="2646878" cy="584775"/>
+          </a:xfrm>
+          <a:prstGeom prst="rect">
+            <a:avLst/>
+          </a:prstGeom>
+          <a:noFill/>
+        </p:spPr>
+        <p:txBody>
+          <a:bodyPr wrap="none" rtlCol="0">
+            <a:spAutoFit/>
+          </a:bodyPr>
+          <a:lstStyle/>
+          <a:p>
+            <a:r>
+              <a:rPr kumimoji="1" lang="ja-JP" altLang="en-US" sz="3200" dirty="0"/>
+              <a:t>励磁コイル→</a:t>
+            </a:r>
+          </a:p>
+        </p:txBody>
+      </p:sp>
+    </p:spTree>
+    <p:extLst>
+      <p:ext uri="{BB962C8B-B14F-4D97-AF65-F5344CB8AC3E}">
+        <p14:creationId xmlns:p14="http://schemas.microsoft.com/office/powerpoint/2010/main" val="4245760788"/>
+      </p:ext>
+    </p:extLst>
+  </p:cSld>
+  <p:clrMapOvr>
+    <a:masterClrMapping/>
+  </p:clrMapOvr>
+</p:sld>
+</file>
+
+<file path=ppt/slides/slide6.xml><?xml version="1.0" encoding="utf-8"?>
+<p:sld xmlns:a="http://schemas.openxmlformats.org/drawingml/2006/main" xmlns:r="http://schemas.openxmlformats.org/officeDocument/2006/relationships" xmlns:p="http://schemas.openxmlformats.org/presentationml/2006/main">
+  <p:cSld>
+    <p:spTree>
+      <p:nvGrpSpPr>
         <p:cNvPr id="1" name=""/>
         <p:cNvGrpSpPr/>
         <p:nvPr/>
@@ -10925,7 +12785,7 @@
             <a:fld id="{00000000-1234-1234-1234-123412341234}" type="slidenum">
               <a:rPr lang="en-US" altLang="ja-JP" smtClean="0"/>
               <a:pPr/>
-              <a:t>4</a:t>
+              <a:t>5</a:t>
             </a:fld>
             <a:endParaRPr lang="en-US"/>
           </a:p>
@@ -11640,15 +13500,6 @@
 </file>
 
 <file path=customXml/item1.xml><?xml version="1.0" encoding="utf-8"?>
-<?mso-contentType ?>
-<FormTemplates xmlns="http://schemas.microsoft.com/sharepoint/v3/contenttype/forms">
-  <Display>DocumentLibraryForm</Display>
-  <Edit>DocumentLibraryForm</Edit>
-  <New>DocumentLibraryForm</New>
-</FormTemplates>
-</file>
-
-<file path=customXml/item2.xml><?xml version="1.0" encoding="utf-8"?>
 <ct:contentTypeSchema xmlns:ct="http://schemas.microsoft.com/office/2006/metadata/contentType" xmlns:ma="http://schemas.microsoft.com/office/2006/metadata/properties/metaAttributes" ct:_="" ma:_="" ma:contentTypeName="ドキュメント" ma:contentTypeID="0x0101004144450F3F33E8408330B89C726DDE2A" ma:contentTypeVersion="11" ma:contentTypeDescription="新しいドキュメントを作成します。" ma:contentTypeScope="" ma:versionID="9c58ff35178bf34284e6fd6aa2204bce">
   <xsd:schema xmlns:xsd="http://www.w3.org/2001/XMLSchema" xmlns:xs="http://www.w3.org/2001/XMLSchema" xmlns:p="http://schemas.microsoft.com/office/2006/metadata/properties" xmlns:ns2="3dbfb0cf-ada2-4966-9842-78e9c57467ee" xmlns:ns3="46c0a021-bb35-4d3d-8550-6038dbfbec1b" targetNamespace="http://schemas.microsoft.com/office/2006/metadata/properties" ma:root="true" ma:fieldsID="c40ee04c6bcef6283a2a18429e2e2b0b" ns2:_="" ns3:_="">
     <xsd:import namespace="3dbfb0cf-ada2-4966-9842-78e9c57467ee"/>
@@ -11843,6 +13694,15 @@
 </ct:contentTypeSchema>
 </file>
 
+<file path=customXml/item2.xml><?xml version="1.0" encoding="utf-8"?>
+<?mso-contentType ?>
+<FormTemplates xmlns="http://schemas.microsoft.com/sharepoint/v3/contenttype/forms">
+  <Display>DocumentLibraryForm</Display>
+  <Edit>DocumentLibraryForm</Edit>
+  <New>DocumentLibraryForm</New>
+</FormTemplates>
+</file>
+
 <file path=customXml/item3.xml><?xml version="1.0" encoding="utf-8"?>
 <p:properties xmlns:p="http://schemas.microsoft.com/office/2006/metadata/properties" xmlns:xsi="http://www.w3.org/2001/XMLSchema-instance" xmlns:pc="http://schemas.microsoft.com/office/infopath/2007/PartnerControls">
   <documentManagement>
@@ -11855,14 +13715,6 @@
 </file>
 
 <file path=customXml/itemProps1.xml><?xml version="1.0" encoding="utf-8"?>
-<ds:datastoreItem xmlns:ds="http://schemas.openxmlformats.org/officeDocument/2006/customXml" ds:itemID="{7969BDF6-02FD-4DD4-80C5-AE01D9C0B198}">
-  <ds:schemaRefs>
-    <ds:schemaRef ds:uri="http://schemas.microsoft.com/sharepoint/v3/contenttype/forms"/>
-  </ds:schemaRefs>
-</ds:datastoreItem>
-</file>
-
-<file path=customXml/itemProps2.xml><?xml version="1.0" encoding="utf-8"?>
 <ds:datastoreItem xmlns:ds="http://schemas.openxmlformats.org/officeDocument/2006/customXml" ds:itemID="{DFC9F469-61D4-42A4-9782-D2F9073712EC}">
   <ds:schemaRefs>
     <ds:schemaRef ds:uri="3dbfb0cf-ada2-4966-9842-78e9c57467ee"/>
@@ -11877,6 +13729,14 @@
     <ds:schemaRef ds:uri="http://schemas.microsoft.com/office/infopath/2007/PartnerControls"/>
     <ds:schemaRef ds:uri="http://schemas.openxmlformats.org/package/2006/metadata/core-properties"/>
     <ds:schemaRef ds:uri="http://www.w3.org/2001/XMLSchema"/>
+  </ds:schemaRefs>
+</ds:datastoreItem>
+</file>
+
+<file path=customXml/itemProps2.xml><?xml version="1.0" encoding="utf-8"?>
+<ds:datastoreItem xmlns:ds="http://schemas.openxmlformats.org/officeDocument/2006/customXml" ds:itemID="{7969BDF6-02FD-4DD4-80C5-AE01D9C0B198}">
+  <ds:schemaRefs>
+    <ds:schemaRef ds:uri="http://schemas.microsoft.com/sharepoint/v3/contenttype/forms"/>
   </ds:schemaRefs>
 </ds:datastoreItem>
 </file>

--- a/システム構成図.pptx
+++ b/システム構成図.pptx
@@ -301,7 +301,7 @@
       </p15:notesGuideLst>
     </p:ext>
     <p:ext uri="GoogleSlidesCustomDataVersion2">
-      <go:slidesCustomData xmlns:mc="http://schemas.openxmlformats.org/markup-compatibility/2006" xmlns:mv="urn:schemas-microsoft-com:mac:vml" xmlns:c="http://schemas.openxmlformats.org/drawingml/2006/chart" xmlns:dgm="http://schemas.openxmlformats.org/drawingml/2006/diagram" xmlns:o="urn:schemas-microsoft-com:office:office" xmlns:v="urn:schemas-microsoft-com:vml" xmlns:pvml="urn:schemas-microsoft-com:office:powerpoint" xmlns:com="http://schemas.openxmlformats.org/drawingml/2006/compatibility" xmlns:p14="http://schemas.microsoft.com/office/powerpoint/2010/main" xmlns:p15="http://schemas.microsoft.com/office/powerpoint/2012/main" xmlns:ahyp="http://schemas.microsoft.com/office/drawing/2018/hyperlinkcolor" xmlns:go="http://customooxmlschemas.google.com/" xmlns="" r:id="rId42" roundtripDataSignature="AMtx7mjjLadHqMIiphYAwzpEX8auZJ6O0g=="/>
+      <go:slidesCustomData xmlns="" xmlns:go="http://customooxmlschemas.google.com/" xmlns:ahyp="http://schemas.microsoft.com/office/drawing/2018/hyperlinkcolor" xmlns:p15="http://schemas.microsoft.com/office/powerpoint/2012/main" xmlns:p14="http://schemas.microsoft.com/office/powerpoint/2010/main" xmlns:com="http://schemas.openxmlformats.org/drawingml/2006/compatibility" xmlns:pvml="urn:schemas-microsoft-com:office:powerpoint" xmlns:v="urn:schemas-microsoft-com:vml" xmlns:o="urn:schemas-microsoft-com:office:office" xmlns:dgm="http://schemas.openxmlformats.org/drawingml/2006/diagram" xmlns:c="http://schemas.openxmlformats.org/drawingml/2006/chart" xmlns:mv="urn:schemas-microsoft-com:mac:vml" xmlns:mc="http://schemas.openxmlformats.org/markup-compatibility/2006" r:id="rId42" roundtripDataSignature="AMtx7mjjLadHqMIiphYAwzpEX8auZJ6O0g=="/>
     </p:ext>
   </p:extLst>
 </p:presentation>
@@ -2441,7 +2441,7 @@
             <a:fld id="{1D8BD707-D9CF-40AE-B4C6-C98DA3205C09}" type="datetimeFigureOut">
               <a:rPr lang="en-US" smtClean="0"/>
               <a:pPr/>
-              <a:t>1/21/26</a:t>
+              <a:t>1/25/2026</a:t>
             </a:fld>
             <a:endParaRPr lang="en-US"/>
           </a:p>
@@ -3782,36 +3782,6 @@
           <a:chExt cx="0" cy="0"/>
         </a:xfrm>
       </p:grpSpPr>
-      <p:sp>
-        <p:nvSpPr>
-          <p:cNvPr id="2" name="スライド番号プレースホルダー 1">
-            <a:extLst>
-              <a:ext uri="{FF2B5EF4-FFF2-40B4-BE49-F238E27FC236}">
-                <a16:creationId xmlns:a16="http://schemas.microsoft.com/office/drawing/2014/main" id="{EEC9DD75-3131-1E4A-6E5F-9318A691BDD4}"/>
-              </a:ext>
-            </a:extLst>
-          </p:cNvPr>
-          <p:cNvSpPr>
-            <a:spLocks noGrp="1"/>
-          </p:cNvSpPr>
-          <p:nvPr>
-            <p:ph type="sldNum" idx="12"/>
-          </p:nvPr>
-        </p:nvSpPr>
-        <p:spPr/>
-        <p:txBody>
-          <a:bodyPr/>
-          <a:lstStyle/>
-          <a:p>
-            <a:fld id="{00000000-1234-1234-1234-123412341234}" type="slidenum">
-              <a:rPr lang="en-US" altLang="ja-JP" smtClean="0"/>
-              <a:pPr/>
-              <a:t>0</a:t>
-            </a:fld>
-            <a:endParaRPr lang="en-US"/>
-          </a:p>
-        </p:txBody>
-      </p:sp>
       <p:grpSp>
         <p:nvGrpSpPr>
           <p:cNvPr id="10" name="グループ化 9">
@@ -13500,6 +13470,26 @@
 </file>
 
 <file path=customXml/item1.xml><?xml version="1.0" encoding="utf-8"?>
+<p:properties xmlns:p="http://schemas.microsoft.com/office/2006/metadata/properties" xmlns:xsi="http://www.w3.org/2001/XMLSchema-instance" xmlns:pc="http://schemas.microsoft.com/office/infopath/2007/PartnerControls">
+  <documentManagement>
+    <lcf76f155ced4ddcb4097134ff3c332f xmlns="3dbfb0cf-ada2-4966-9842-78e9c57467ee">
+      <Terms xmlns="http://schemas.microsoft.com/office/infopath/2007/PartnerControls"/>
+    </lcf76f155ced4ddcb4097134ff3c332f>
+    <TaxCatchAll xmlns="46c0a021-bb35-4d3d-8550-6038dbfbec1b" xsi:nil="true"/>
+  </documentManagement>
+</p:properties>
+</file>
+
+<file path=customXml/item2.xml><?xml version="1.0" encoding="utf-8"?>
+<?mso-contentType ?>
+<FormTemplates xmlns="http://schemas.microsoft.com/sharepoint/v3/contenttype/forms">
+  <Display>DocumentLibraryForm</Display>
+  <Edit>DocumentLibraryForm</Edit>
+  <New>DocumentLibraryForm</New>
+</FormTemplates>
+</file>
+
+<file path=customXml/item3.xml><?xml version="1.0" encoding="utf-8"?>
 <ct:contentTypeSchema xmlns:ct="http://schemas.microsoft.com/office/2006/metadata/contentType" xmlns:ma="http://schemas.microsoft.com/office/2006/metadata/properties/metaAttributes" ct:_="" ma:_="" ma:contentTypeName="ドキュメント" ma:contentTypeID="0x0101004144450F3F33E8408330B89C726DDE2A" ma:contentTypeVersion="11" ma:contentTypeDescription="新しいドキュメントを作成します。" ma:contentTypeScope="" ma:versionID="9c58ff35178bf34284e6fd6aa2204bce">
   <xsd:schema xmlns:xsd="http://www.w3.org/2001/XMLSchema" xmlns:xs="http://www.w3.org/2001/XMLSchema" xmlns:p="http://schemas.microsoft.com/office/2006/metadata/properties" xmlns:ns2="3dbfb0cf-ada2-4966-9842-78e9c57467ee" xmlns:ns3="46c0a021-bb35-4d3d-8550-6038dbfbec1b" targetNamespace="http://schemas.microsoft.com/office/2006/metadata/properties" ma:root="true" ma:fieldsID="c40ee04c6bcef6283a2a18429e2e2b0b" ns2:_="" ns3:_="">
     <xsd:import namespace="3dbfb0cf-ada2-4966-9842-78e9c57467ee"/>
@@ -13694,27 +13684,32 @@
 </ct:contentTypeSchema>
 </file>
 
-<file path=customXml/item2.xml><?xml version="1.0" encoding="utf-8"?>
-<?mso-contentType ?>
-<FormTemplates xmlns="http://schemas.microsoft.com/sharepoint/v3/contenttype/forms">
-  <Display>DocumentLibraryForm</Display>
-  <Edit>DocumentLibraryForm</Edit>
-  <New>DocumentLibraryForm</New>
-</FormTemplates>
+<file path=customXml/itemProps1.xml><?xml version="1.0" encoding="utf-8"?>
+<ds:datastoreItem xmlns:ds="http://schemas.openxmlformats.org/officeDocument/2006/customXml" ds:itemID="{6BC85B79-7FE2-47BF-A6DD-DC60314F399F}">
+  <ds:schemaRefs>
+    <ds:schemaRef ds:uri="http://schemas.openxmlformats.org/package/2006/metadata/core-properties"/>
+    <ds:schemaRef ds:uri="http://purl.org/dc/elements/1.1/"/>
+    <ds:schemaRef ds:uri="http://schemas.microsoft.com/office/infopath/2007/PartnerControls"/>
+    <ds:schemaRef ds:uri="http://schemas.microsoft.com/office/2006/documentManagement/types"/>
+    <ds:schemaRef ds:uri="http://schemas.microsoft.com/office/2006/metadata/properties"/>
+    <ds:schemaRef ds:uri="http://www.w3.org/XML/1998/namespace"/>
+    <ds:schemaRef ds:uri="http://purl.org/dc/terms/"/>
+    <ds:schemaRef ds:uri="46c0a021-bb35-4d3d-8550-6038dbfbec1b"/>
+    <ds:schemaRef ds:uri="3dbfb0cf-ada2-4966-9842-78e9c57467ee"/>
+    <ds:schemaRef ds:uri="http://purl.org/dc/dcmitype/"/>
+  </ds:schemaRefs>
+</ds:datastoreItem>
 </file>
 
-<file path=customXml/item3.xml><?xml version="1.0" encoding="utf-8"?>
-<p:properties xmlns:p="http://schemas.microsoft.com/office/2006/metadata/properties" xmlns:xsi="http://www.w3.org/2001/XMLSchema-instance" xmlns:pc="http://schemas.microsoft.com/office/infopath/2007/PartnerControls">
-  <documentManagement>
-    <lcf76f155ced4ddcb4097134ff3c332f xmlns="3dbfb0cf-ada2-4966-9842-78e9c57467ee">
-      <Terms xmlns="http://schemas.microsoft.com/office/infopath/2007/PartnerControls"/>
-    </lcf76f155ced4ddcb4097134ff3c332f>
-    <TaxCatchAll xmlns="46c0a021-bb35-4d3d-8550-6038dbfbec1b" xsi:nil="true"/>
-  </documentManagement>
-</p:properties>
+<file path=customXml/itemProps2.xml><?xml version="1.0" encoding="utf-8"?>
+<ds:datastoreItem xmlns:ds="http://schemas.openxmlformats.org/officeDocument/2006/customXml" ds:itemID="{7969BDF6-02FD-4DD4-80C5-AE01D9C0B198}">
+  <ds:schemaRefs>
+    <ds:schemaRef ds:uri="http://schemas.microsoft.com/sharepoint/v3/contenttype/forms"/>
+  </ds:schemaRefs>
+</ds:datastoreItem>
 </file>
 
-<file path=customXml/itemProps1.xml><?xml version="1.0" encoding="utf-8"?>
+<file path=customXml/itemProps3.xml><?xml version="1.0" encoding="utf-8"?>
 <ds:datastoreItem xmlns:ds="http://schemas.openxmlformats.org/officeDocument/2006/customXml" ds:itemID="{DFC9F469-61D4-42A4-9782-D2F9073712EC}">
   <ds:schemaRefs>
     <ds:schemaRef ds:uri="3dbfb0cf-ada2-4966-9842-78e9c57467ee"/>
@@ -13733,31 +13728,6 @@
 </ds:datastoreItem>
 </file>
 
-<file path=customXml/itemProps2.xml><?xml version="1.0" encoding="utf-8"?>
-<ds:datastoreItem xmlns:ds="http://schemas.openxmlformats.org/officeDocument/2006/customXml" ds:itemID="{7969BDF6-02FD-4DD4-80C5-AE01D9C0B198}">
-  <ds:schemaRefs>
-    <ds:schemaRef ds:uri="http://schemas.microsoft.com/sharepoint/v3/contenttype/forms"/>
-  </ds:schemaRefs>
-</ds:datastoreItem>
-</file>
-
-<file path=customXml/itemProps3.xml><?xml version="1.0" encoding="utf-8"?>
-<ds:datastoreItem xmlns:ds="http://schemas.openxmlformats.org/officeDocument/2006/customXml" ds:itemID="{6BC85B79-7FE2-47BF-A6DD-DC60314F399F}">
-  <ds:schemaRefs>
-    <ds:schemaRef ds:uri="http://schemas.openxmlformats.org/package/2006/metadata/core-properties"/>
-    <ds:schemaRef ds:uri="http://purl.org/dc/elements/1.1/"/>
-    <ds:schemaRef ds:uri="http://schemas.microsoft.com/office/infopath/2007/PartnerControls"/>
-    <ds:schemaRef ds:uri="http://schemas.microsoft.com/office/2006/documentManagement/types"/>
-    <ds:schemaRef ds:uri="http://schemas.microsoft.com/office/2006/metadata/properties"/>
-    <ds:schemaRef ds:uri="http://www.w3.org/XML/1998/namespace"/>
-    <ds:schemaRef ds:uri="http://purl.org/dc/terms/"/>
-    <ds:schemaRef ds:uri="46c0a021-bb35-4d3d-8550-6038dbfbec1b"/>
-    <ds:schemaRef ds:uri="3dbfb0cf-ada2-4966-9842-78e9c57467ee"/>
-    <ds:schemaRef ds:uri="http://purl.org/dc/dcmitype/"/>
-  </ds:schemaRefs>
-</ds:datastoreItem>
-</file>
-
 <file path=docMetadata/LabelInfo.xml><?xml version="1.0" encoding="utf-8"?>
 <clbl:labelList xmlns:clbl="http://schemas.microsoft.com/office/2020/mipLabelMetadata">
   <clbl:label id="{72fe835d-5e95-4512-8ae0-a7b38af25fc8}" enabled="0" method="" siteId="{72fe835d-5e95-4512-8ae0-a7b38af25fc8}" removed="1"/>
